--- a/course materials/Lecture Notes/Python Slides/py_w01.pptx
+++ b/course materials/Lecture Notes/Python Slides/py_w01.pptx
@@ -4,6 +4,9 @@
   <p:sldMasterIdLst>
     <p:sldMasterId id="2147483648" r:id="rId1"/>
   </p:sldMasterIdLst>
+  <p:notesMasterIdLst>
+    <p:notesMasterId r:id="rId17"/>
+  </p:notesMasterIdLst>
   <p:sldIdLst>
     <p:sldId id="256" r:id="rId2"/>
     <p:sldId id="257" r:id="rId3"/>
@@ -21,10 +24,7 @@
     <p:sldId id="269" r:id="rId15"/>
     <p:sldId id="270" r:id="rId16"/>
   </p:sldIdLst>
-  <p:notesMasterIdLst>
-    <p:notesMasterId r:id="rId17"/>
-  </p:notesMasterIdLst>
-  <p:sldSz cx="9144000" cy="5143500"/>
+  <p:sldSz cx="9144000" cy="5143500" type="screen16x9"/>
   <p:notesSz cx="5143500" cy="9144000"/>
   <p:defaultTextStyle>
     <a:lvl1pPr marL="0" algn="l" defTabSz="914400" rtl="0" eaLnBrk="1" latinLnBrk="0" hangingPunct="1">
@@ -118,7 +118,49 @@
       </a:defRPr>
     </a:lvl9pPr>
   </p:defaultTextStyle>
+  <p:extLst>
+    <p:ext uri="{EFAFB233-063F-42B5-8137-9DF3F51BA10A}">
+      <p15:sldGuideLst xmlns:p15="http://schemas.microsoft.com/office/powerpoint/2012/main"/>
+    </p:ext>
+  </p:extLst>
 </p:presentation>
+</file>
+
+<file path=ppt/changesInfos/changesInfo1.xml><?xml version="1.0" encoding="utf-8"?>
+<pc:chgInfo xmlns:a="http://schemas.openxmlformats.org/drawingml/2006/main" xmlns:r="http://schemas.openxmlformats.org/officeDocument/2006/relationships" xmlns:ac="http://schemas.microsoft.com/office/drawing/2013/main/command" xmlns:pc="http://schemas.microsoft.com/office/powerpoint/2013/main/command">
+  <pc:docChgLst>
+    <pc:chgData name="Natasya Khoo" userId="0ecc0b9a-0188-4623-9ca0-b3455d063396" providerId="ADAL" clId="{2771EFA1-4DDC-4B97-8AAF-DBDC6D7669D6}"/>
+    <pc:docChg chg="undo custSel modSld">
+      <pc:chgData name="Natasya Khoo" userId="0ecc0b9a-0188-4623-9ca0-b3455d063396" providerId="ADAL" clId="{2771EFA1-4DDC-4B97-8AAF-DBDC6D7669D6}" dt="2026-04-13T05:26:13.315" v="2" actId="478"/>
+      <pc:docMkLst>
+        <pc:docMk/>
+      </pc:docMkLst>
+      <pc:sldChg chg="addSp delSp modSp mod">
+        <pc:chgData name="Natasya Khoo" userId="0ecc0b9a-0188-4623-9ca0-b3455d063396" providerId="ADAL" clId="{2771EFA1-4DDC-4B97-8AAF-DBDC6D7669D6}" dt="2026-04-13T05:26:13.315" v="2" actId="478"/>
+        <pc:sldMkLst>
+          <pc:docMk/>
+          <pc:sldMk cId="0" sldId="262"/>
+        </pc:sldMkLst>
+        <pc:spChg chg="add del">
+          <ac:chgData name="Natasya Khoo" userId="0ecc0b9a-0188-4623-9ca0-b3455d063396" providerId="ADAL" clId="{2771EFA1-4DDC-4B97-8AAF-DBDC6D7669D6}" dt="2026-04-13T05:26:13.315" v="2" actId="478"/>
+          <ac:spMkLst>
+            <pc:docMk/>
+            <pc:sldMk cId="0" sldId="262"/>
+            <ac:spMk id="6" creationId="{00000000-0000-0000-0000-000000000000}"/>
+          </ac:spMkLst>
+        </pc:spChg>
+        <pc:spChg chg="mod">
+          <ac:chgData name="Natasya Khoo" userId="0ecc0b9a-0188-4623-9ca0-b3455d063396" providerId="ADAL" clId="{2771EFA1-4DDC-4B97-8AAF-DBDC6D7669D6}" dt="2026-04-13T05:26:07.075" v="0" actId="404"/>
+          <ac:spMkLst>
+            <pc:docMk/>
+            <pc:sldMk cId="0" sldId="262"/>
+            <ac:spMk id="11" creationId="{00000000-0000-0000-0000-000000000000}"/>
+          </ac:spMkLst>
+        </pc:spChg>
+      </pc:sldChg>
+    </pc:docChg>
+  </pc:docChgLst>
+</pc:chgInfo>
 </file>
 
 <file path=ppt/notesMasters/notesMaster1.xml><?xml version="1.0" encoding="utf-8"?>
@@ -143,234 +185,10 @@
           <a:chExt cx="0" cy="0"/>
         </a:xfrm>
       </p:grpSpPr>
-      <p:sp>
-        <p:nvSpPr>
-          <p:cNvPr id="2" name="Header Placeholder 1"/>
-          <p:cNvSpPr>
-            <a:spLocks noGrp="1"/>
-          </p:cNvSpPr>
-          <p:nvPr>
-            <p:ph type="hdr" sz="quarter"/>
-          </p:nvPr>
-        </p:nvSpPr>
-        <p:spPr>
-          <a:xfrm>
-            <a:off x="0" y="0"/>
-            <a:ext cx="2971800" cy="458788"/>
-          </a:xfrm>
-          <a:prstGeom prst="rect">
-            <a:avLst/>
-          </a:prstGeom>
-        </p:spPr>
-        <p:txBody>
-          <a:bodyPr vert="horz" lIns="91440" tIns="45720" rIns="91440" bIns="45720" rtlCol="0"/>
-          <a:lstStyle>
-            <a:lvl1pPr algn="l">
-              <a:defRPr sz="1200"/>
-            </a:lvl1pPr>
-          </a:lstStyle>
-          <a:p>
-            <a:endParaRPr lang="en-US"/>
-          </a:p>
-        </p:txBody>
-      </p:sp>
-      <p:sp>
-        <p:nvSpPr>
-          <p:cNvPr id="3" name="Date Placeholder 2"/>
-          <p:cNvSpPr>
-            <a:spLocks noGrp="1"/>
-          </p:cNvSpPr>
-          <p:nvPr>
-            <p:ph type="dt" idx="1"/>
-          </p:nvPr>
-        </p:nvSpPr>
-        <p:spPr>
-          <a:xfrm>
-            <a:off x="3884613" y="0"/>
-            <a:ext cx="2971800" cy="458788"/>
-          </a:xfrm>
-          <a:prstGeom prst="rect">
-            <a:avLst/>
-          </a:prstGeom>
-        </p:spPr>
-        <p:txBody>
-          <a:bodyPr vert="horz" lIns="91440" tIns="45720" rIns="91440" bIns="45720" rtlCol="0"/>
-          <a:lstStyle>
-            <a:lvl1pPr algn="r">
-              <a:defRPr sz="1200"/>
-            </a:lvl1pPr>
-          </a:lstStyle>
-          <a:p>
-            <a:fld id="{5282F153-3F37-0F45-9E97-73ACFA13230C}" type="datetimeFigureOut">
-              <a:rPr lang="en-US"/>
-              <a:t>7/23/19</a:t>
-            </a:fld>
-            <a:endParaRPr lang="en-US"/>
-          </a:p>
-        </p:txBody>
-      </p:sp>
-      <p:sp>
-        <p:nvSpPr>
-          <p:cNvPr id="4" name="Slide Image Placeholder 3"/>
-          <p:cNvSpPr>
-            <a:spLocks noGrp="1" noRot="1" noChangeAspect="1"/>
-          </p:cNvSpPr>
-          <p:nvPr>
-            <p:ph type="sldImg" idx="2"/>
-          </p:nvPr>
-        </p:nvSpPr>
-        <p:spPr>
-          <a:xfrm>
-            <a:off x="685800" y="1143000"/>
-            <a:ext cx="5486400" cy="3086100"/>
-          </a:xfrm>
-          <a:prstGeom prst="rect">
-            <a:avLst/>
-          </a:prstGeom>
-          <a:noFill/>
-          <a:ln w="12700">
-            <a:solidFill>
-              <a:prstClr val="black"/>
-            </a:solidFill>
-          </a:ln>
-        </p:spPr>
-        <p:txBody>
-          <a:bodyPr vert="horz" lIns="91440" tIns="45720" rIns="91440" bIns="45720" rtlCol="0" anchor="ctr"/>
-          <a:lstStyle/>
-          <a:p>
-            <a:endParaRPr lang="en-US"/>
-          </a:p>
-        </p:txBody>
-      </p:sp>
-      <p:sp>
-        <p:nvSpPr>
-          <p:cNvPr id="5" name="Notes Placeholder 4"/>
-          <p:cNvSpPr>
-            <a:spLocks noGrp="1"/>
-          </p:cNvSpPr>
-          <p:nvPr>
-            <p:ph type="body" sz="quarter" idx="3"/>
-          </p:nvPr>
-        </p:nvSpPr>
-        <p:spPr>
-          <a:xfrm>
-            <a:off x="685800" y="4400550"/>
-            <a:ext cx="5486400" cy="3600450"/>
-          </a:xfrm>
-          <a:prstGeom prst="rect">
-            <a:avLst/>
-          </a:prstGeom>
-        </p:spPr>
-        <p:txBody>
-          <a:bodyPr vert="horz" lIns="91440" tIns="45720" rIns="91440" bIns="45720" rtlCol="0"/>
-          <a:lstStyle/>
-          <a:p>
-            <a:pPr lvl="0"/>
-            <a:r>
-              <a:rPr lang="en-US"/>
-              <a:t>Click to edit Master text styles</a:t>
-            </a:r>
-          </a:p>
-          <a:p>
-            <a:pPr lvl="1"/>
-            <a:r>
-              <a:rPr lang="en-US"/>
-              <a:t>Second level</a:t>
-            </a:r>
-          </a:p>
-          <a:p>
-            <a:pPr lvl="2"/>
-            <a:r>
-              <a:rPr lang="en-US"/>
-              <a:t>Third level</a:t>
-            </a:r>
-          </a:p>
-          <a:p>
-            <a:pPr lvl="3"/>
-            <a:r>
-              <a:rPr lang="en-US"/>
-              <a:t>Fourth level</a:t>
-            </a:r>
-          </a:p>
-          <a:p>
-            <a:pPr lvl="4"/>
-            <a:r>
-              <a:rPr lang="en-US"/>
-              <a:t>Fifth level</a:t>
-            </a:r>
-          </a:p>
-        </p:txBody>
-      </p:sp>
-      <p:sp>
-        <p:nvSpPr>
-          <p:cNvPr id="6" name="Footer Placeholder 5"/>
-          <p:cNvSpPr>
-            <a:spLocks noGrp="1"/>
-          </p:cNvSpPr>
-          <p:nvPr>
-            <p:ph type="ftr" sz="quarter" idx="4"/>
-          </p:nvPr>
-        </p:nvSpPr>
-        <p:spPr>
-          <a:xfrm>
-            <a:off x="0" y="8685213"/>
-            <a:ext cx="2971800" cy="458787"/>
-          </a:xfrm>
-          <a:prstGeom prst="rect">
-            <a:avLst/>
-          </a:prstGeom>
-        </p:spPr>
-        <p:txBody>
-          <a:bodyPr vert="horz" lIns="91440" tIns="45720" rIns="91440" bIns="45720" rtlCol="0" anchor="b"/>
-          <a:lstStyle>
-            <a:lvl1pPr algn="l">
-              <a:defRPr sz="1200"/>
-            </a:lvl1pPr>
-          </a:lstStyle>
-          <a:p>
-            <a:endParaRPr lang="en-US"/>
-          </a:p>
-        </p:txBody>
-      </p:sp>
-      <p:sp>
-        <p:nvSpPr>
-          <p:cNvPr id="7" name="Slide Number Placeholder 6"/>
-          <p:cNvSpPr>
-            <a:spLocks noGrp="1"/>
-          </p:cNvSpPr>
-          <p:nvPr>
-            <p:ph type="sldNum" sz="quarter" idx="5"/>
-          </p:nvPr>
-        </p:nvSpPr>
-        <p:spPr>
-          <a:xfrm>
-            <a:off x="3884613" y="8685213"/>
-            <a:ext cx="2971800" cy="458787"/>
-          </a:xfrm>
-          <a:prstGeom prst="rect">
-            <a:avLst/>
-          </a:prstGeom>
-        </p:spPr>
-        <p:txBody>
-          <a:bodyPr vert="horz" lIns="91440" tIns="45720" rIns="91440" bIns="45720" rtlCol="0" anchor="b"/>
-          <a:lstStyle>
-            <a:lvl1pPr algn="r">
-              <a:defRPr sz="1200"/>
-            </a:lvl1pPr>
-          </a:lstStyle>
-          <a:p>
-            <a:fld id="{CE5E9CC1-C706-0F49-92D6-E571CC5EEA8F}" type="slidenum">
-              <a:rPr lang="en-US"/>
-              <a:t>‹#›</a:t>
-            </a:fld>
-            <a:endParaRPr lang="en-US"/>
-          </a:p>
-        </p:txBody>
-      </p:sp>
     </p:spTree>
     <p:extLst>
       <p:ext uri="{BB962C8B-B14F-4D97-AF65-F5344CB8AC3E}">
-        <p14:creationId xmlns:p14="http://schemas.microsoft.com/office/powerpoint/2010/main" val="1024086991"/>
+        <p14:creationId xmlns:p14="http://schemas.microsoft.com/office/powerpoint/2010/main" val="1757255709"/>
       </p:ext>
     </p:extLst>
   </p:cSld>
@@ -514,10 +332,6 @@
           <a:bodyPr/>
           <a:lstStyle/>
           <a:p>
-            <a:r>
-              <a:rPr lang="en-US" dirty="0"/>
-              <a:t/>
-            </a:r>
             <a:endParaRPr lang="en-US" dirty="0"/>
           </a:p>
         </p:txBody>
@@ -602,10 +416,6 @@
           <a:bodyPr/>
           <a:lstStyle/>
           <a:p>
-            <a:r>
-              <a:rPr lang="en-US" dirty="0"/>
-              <a:t/>
-            </a:r>
             <a:endParaRPr lang="en-US" dirty="0"/>
           </a:p>
         </p:txBody>
@@ -690,10 +500,6 @@
           <a:bodyPr/>
           <a:lstStyle/>
           <a:p>
-            <a:r>
-              <a:rPr lang="en-US" dirty="0"/>
-              <a:t/>
-            </a:r>
             <a:endParaRPr lang="en-US" dirty="0"/>
           </a:p>
         </p:txBody>
@@ -778,10 +584,6 @@
           <a:bodyPr/>
           <a:lstStyle/>
           <a:p>
-            <a:r>
-              <a:rPr lang="en-US" dirty="0"/>
-              <a:t/>
-            </a:r>
             <a:endParaRPr lang="en-US" dirty="0"/>
           </a:p>
         </p:txBody>
@@ -866,10 +668,6 @@
           <a:bodyPr/>
           <a:lstStyle/>
           <a:p>
-            <a:r>
-              <a:rPr lang="en-US" dirty="0"/>
-              <a:t/>
-            </a:r>
             <a:endParaRPr lang="en-US" dirty="0"/>
           </a:p>
         </p:txBody>
@@ -954,10 +752,6 @@
           <a:bodyPr/>
           <a:lstStyle/>
           <a:p>
-            <a:r>
-              <a:rPr lang="en-US" dirty="0"/>
-              <a:t/>
-            </a:r>
             <a:endParaRPr lang="en-US" dirty="0"/>
           </a:p>
         </p:txBody>
@@ -1042,10 +836,6 @@
           <a:bodyPr/>
           <a:lstStyle/>
           <a:p>
-            <a:r>
-              <a:rPr lang="en-US" dirty="0"/>
-              <a:t/>
-            </a:r>
             <a:endParaRPr lang="en-US" dirty="0"/>
           </a:p>
         </p:txBody>
@@ -1130,10 +920,6 @@
           <a:bodyPr/>
           <a:lstStyle/>
           <a:p>
-            <a:r>
-              <a:rPr lang="en-US" dirty="0"/>
-              <a:t/>
-            </a:r>
             <a:endParaRPr lang="en-US" dirty="0"/>
           </a:p>
         </p:txBody>
@@ -1218,10 +1004,6 @@
           <a:bodyPr/>
           <a:lstStyle/>
           <a:p>
-            <a:r>
-              <a:rPr lang="en-US" dirty="0"/>
-              <a:t/>
-            </a:r>
             <a:endParaRPr lang="en-US" dirty="0"/>
           </a:p>
         </p:txBody>
@@ -1306,10 +1088,6 @@
           <a:bodyPr/>
           <a:lstStyle/>
           <a:p>
-            <a:r>
-              <a:rPr lang="en-US" dirty="0"/>
-              <a:t/>
-            </a:r>
             <a:endParaRPr lang="en-US" dirty="0"/>
           </a:p>
         </p:txBody>
@@ -1394,10 +1172,6 @@
           <a:bodyPr/>
           <a:lstStyle/>
           <a:p>
-            <a:r>
-              <a:rPr lang="en-US" dirty="0"/>
-              <a:t/>
-            </a:r>
             <a:endParaRPr lang="en-US" dirty="0"/>
           </a:p>
         </p:txBody>
@@ -1482,10 +1256,6 @@
           <a:bodyPr/>
           <a:lstStyle/>
           <a:p>
-            <a:r>
-              <a:rPr lang="en-US" dirty="0"/>
-              <a:t/>
-            </a:r>
             <a:endParaRPr lang="en-US" dirty="0"/>
           </a:p>
         </p:txBody>
@@ -1570,10 +1340,6 @@
           <a:bodyPr/>
           <a:lstStyle/>
           <a:p>
-            <a:r>
-              <a:rPr lang="en-US" dirty="0"/>
-              <a:t/>
-            </a:r>
             <a:endParaRPr lang="en-US" dirty="0"/>
           </a:p>
         </p:txBody>
@@ -1658,10 +1424,6 @@
           <a:bodyPr/>
           <a:lstStyle/>
           <a:p>
-            <a:r>
-              <a:rPr lang="en-US" dirty="0"/>
-              <a:t/>
-            </a:r>
             <a:endParaRPr lang="en-US" dirty="0"/>
           </a:p>
         </p:txBody>
@@ -1746,10 +1508,6 @@
           <a:bodyPr/>
           <a:lstStyle/>
           <a:p>
-            <a:r>
-              <a:rPr lang="en-US" dirty="0"/>
-              <a:t/>
-            </a:r>
             <a:endParaRPr lang="en-US" dirty="0"/>
           </a:p>
         </p:txBody>
@@ -1823,6 +1581,11 @@
 <file path=ppt/slideMasters/slideMaster1.xml><?xml version="1.0" encoding="utf-8"?>
 <p:sldMaster xmlns:a="http://schemas.openxmlformats.org/drawingml/2006/main" xmlns:r="http://schemas.openxmlformats.org/officeDocument/2006/relationships" xmlns:p="http://schemas.openxmlformats.org/presentationml/2006/main">
   <p:cSld>
+    <p:bg>
+      <p:bgRef idx="1001">
+        <a:schemeClr val="bg1"/>
+      </p:bgRef>
+    </p:bg>
     <p:spTree>
       <p:nvGrpSpPr>
         <p:cNvPr id="1" name=""/>
@@ -2105,6 +1868,7 @@
         <a:solidFill>
           <a:srgbClr val="080C10"/>
         </a:solidFill>
+        <a:effectLst/>
       </p:bgPr>
     </p:bg>
     <p:spTree>
@@ -2145,6 +1909,13 @@
             <a:prstDash val="solid"/>
           </a:ln>
         </p:spPr>
+        <p:txBody>
+          <a:bodyPr/>
+          <a:lstStyle/>
+          <a:p>
+            <a:endParaRPr lang="en-SG"/>
+          </a:p>
+        </p:txBody>
       </p:sp>
       <p:sp>
         <p:nvSpPr>
@@ -2170,6 +1941,13 @@
             <a:prstDash val="solid"/>
           </a:ln>
         </p:spPr>
+        <p:txBody>
+          <a:bodyPr/>
+          <a:lstStyle/>
+          <a:p>
+            <a:endParaRPr lang="en-SG"/>
+          </a:p>
+        </p:txBody>
       </p:sp>
       <p:sp>
         <p:nvSpPr>
@@ -2192,7 +1970,7 @@
           <a:bodyPr wrap="square" rtlCol="0" anchor="ctr"/>
           <a:lstStyle/>
           <a:p>
-            <a:pPr algn="ctr" indent="0" marL="0">
+            <a:pPr marL="0" indent="0" algn="ctr">
               <a:buNone/>
             </a:pPr>
             <a:r>
@@ -2214,14 +1992,14 @@
       </p:sp>
       <p:pic>
         <p:nvPicPr>
-          <p:cNvPr id="5" name="Image 0" descr="preencoded.png">    </p:cNvPr>
+          <p:cNvPr id="5" name="Image 0" descr="preencoded.png"/>
           <p:cNvPicPr>
             <a:picLocks noChangeAspect="1"/>
           </p:cNvPicPr>
           <p:nvPr/>
         </p:nvPicPr>
         <p:blipFill>
-          <a:blip r:embed="rId1"/>
+          <a:blip r:embed="rId3"/>
           <a:stretch>
             <a:fillRect/>
           </a:stretch>
@@ -2260,6 +2038,13 @@
             <a:prstDash val="solid"/>
           </a:ln>
         </p:spPr>
+        <p:txBody>
+          <a:bodyPr/>
+          <a:lstStyle/>
+          <a:p>
+            <a:endParaRPr lang="en-SG"/>
+          </a:p>
+        </p:txBody>
       </p:sp>
       <p:sp>
         <p:nvSpPr>
@@ -2282,7 +2067,7 @@
           <a:bodyPr wrap="square" lIns="0" tIns="0" rIns="0" bIns="0" rtlCol="0" anchor="ctr"/>
           <a:lstStyle/>
           <a:p>
-            <a:pPr algn="ctr" indent="0" marL="0">
+            <a:pPr marL="0" indent="0" algn="ctr">
               <a:buNone/>
             </a:pPr>
             <a:r>
@@ -2324,6 +2109,13 @@
             <a:prstDash val="solid"/>
           </a:ln>
         </p:spPr>
+        <p:txBody>
+          <a:bodyPr/>
+          <a:lstStyle/>
+          <a:p>
+            <a:endParaRPr lang="en-SG"/>
+          </a:p>
+        </p:txBody>
       </p:sp>
       <p:sp>
         <p:nvSpPr>
@@ -2346,7 +2138,7 @@
           <a:bodyPr wrap="square" lIns="0" tIns="0" rIns="0" bIns="0" rtlCol="0" anchor="ctr"/>
           <a:lstStyle/>
           <a:p>
-            <a:pPr algn="ctr" indent="0" marL="0">
+            <a:pPr marL="0" indent="0" algn="ctr">
               <a:buNone/>
             </a:pPr>
             <a:r>
@@ -2385,7 +2177,7 @@
           <a:bodyPr wrap="square" lIns="0" tIns="0" rIns="0" bIns="0" rtlCol="0" anchor="ctr"/>
           <a:lstStyle/>
           <a:p>
-            <a:pPr algn="l" indent="0" marL="0">
+            <a:pPr marL="0" indent="0" algn="l">
               <a:buNone/>
             </a:pPr>
             <a:r>
@@ -2424,7 +2216,7 @@
           <a:bodyPr wrap="square" lIns="0" tIns="0" rIns="0" bIns="0" rtlCol="0" anchor="ctr"/>
           <a:lstStyle/>
           <a:p>
-            <a:pPr algn="l" indent="0" marL="0">
+            <a:pPr marL="0" indent="0" algn="l">
               <a:buNone/>
             </a:pPr>
             <a:r>
@@ -2466,13 +2258,20 @@
             <a:prstDash val="solid"/>
           </a:ln>
           <a:effectLst>
-            <a:outerShdw sx="100000" sy="100000" kx="0" ky="0" algn="bl" rotWithShape="0" blurRad="127000" dist="38100" dir="8100000">
+            <a:outerShdw blurRad="127000" dist="38100" dir="8100000" algn="bl" rotWithShape="0">
               <a:srgbClr val="000000">
                 <a:alpha val="25000"/>
               </a:srgbClr>
             </a:outerShdw>
           </a:effectLst>
         </p:spPr>
+        <p:txBody>
+          <a:bodyPr/>
+          <a:lstStyle/>
+          <a:p>
+            <a:endParaRPr lang="en-SG"/>
+          </a:p>
+        </p:txBody>
       </p:sp>
       <p:sp>
         <p:nvSpPr>
@@ -2498,6 +2297,13 @@
             <a:prstDash val="solid"/>
           </a:ln>
         </p:spPr>
+        <p:txBody>
+          <a:bodyPr/>
+          <a:lstStyle/>
+          <a:p>
+            <a:endParaRPr lang="en-SG"/>
+          </a:p>
+        </p:txBody>
       </p:sp>
       <p:sp>
         <p:nvSpPr>
@@ -2520,7 +2326,7 @@
           <a:bodyPr wrap="square" lIns="0" tIns="0" rIns="0" bIns="0" rtlCol="0" anchor="ctr"/>
           <a:lstStyle/>
           <a:p>
-            <a:pPr indent="0" marL="0">
+            <a:pPr marL="0" indent="0">
               <a:buNone/>
             </a:pPr>
             <a:r>
@@ -2559,7 +2365,7 @@
           <a:bodyPr wrap="square" lIns="0" tIns="0" rIns="0" bIns="0" rtlCol="0" anchor="ctr"/>
           <a:lstStyle/>
           <a:p>
-            <a:pPr indent="0" marL="0">
+            <a:pPr marL="0" indent="0">
               <a:buNone/>
             </a:pPr>
             <a:r>
@@ -2598,7 +2404,7 @@
           <a:bodyPr wrap="square" lIns="0" tIns="0" rIns="0" bIns="0" rtlCol="0" anchor="ctr"/>
           <a:lstStyle/>
           <a:p>
-            <a:pPr indent="0" marL="0">
+            <a:pPr marL="0" indent="0">
               <a:buNone/>
             </a:pPr>
             <a:r>
@@ -2637,7 +2443,7 @@
           <a:bodyPr wrap="square" lIns="0" tIns="0" rIns="0" bIns="0" rtlCol="0" anchor="ctr"/>
           <a:lstStyle/>
           <a:p>
-            <a:pPr indent="0" marL="0">
+            <a:pPr marL="0" indent="0">
               <a:buNone/>
             </a:pPr>
             <a:r>
@@ -2679,6 +2485,13 @@
             <a:prstDash val="solid"/>
           </a:ln>
         </p:spPr>
+        <p:txBody>
+          <a:bodyPr/>
+          <a:lstStyle/>
+          <a:p>
+            <a:endParaRPr lang="en-SG"/>
+          </a:p>
+        </p:txBody>
       </p:sp>
       <p:sp>
         <p:nvSpPr>
@@ -2704,6 +2517,13 @@
             <a:prstDash val="solid"/>
           </a:ln>
         </p:spPr>
+        <p:txBody>
+          <a:bodyPr/>
+          <a:lstStyle/>
+          <a:p>
+            <a:endParaRPr lang="en-SG"/>
+          </a:p>
+        </p:txBody>
       </p:sp>
       <p:sp>
         <p:nvSpPr>
@@ -2726,7 +2546,7 @@
           <a:bodyPr wrap="square" lIns="0" tIns="0" rIns="0" bIns="0" rtlCol="0" anchor="ctr"/>
           <a:lstStyle/>
           <a:p>
-            <a:pPr indent="0" marL="0">
+            <a:pPr marL="0" indent="0">
               <a:buNone/>
             </a:pPr>
             <a:r>
@@ -2765,7 +2585,7 @@
           <a:bodyPr wrap="square" lIns="0" tIns="0" rIns="0" bIns="0" rtlCol="0" anchor="ctr"/>
           <a:lstStyle/>
           <a:p>
-            <a:pPr indent="0" marL="0">
+            <a:pPr marL="0" indent="0">
               <a:buNone/>
             </a:pPr>
             <a:r>
@@ -2807,6 +2627,13 @@
             <a:prstDash val="solid"/>
           </a:ln>
         </p:spPr>
+        <p:txBody>
+          <a:bodyPr/>
+          <a:lstStyle/>
+          <a:p>
+            <a:endParaRPr lang="en-SG"/>
+          </a:p>
+        </p:txBody>
       </p:sp>
       <p:sp>
         <p:nvSpPr>
@@ -2829,7 +2656,7 @@
           <a:bodyPr wrap="square" lIns="0" tIns="0" rIns="0" bIns="0" rtlCol="0" anchor="ctr"/>
           <a:lstStyle/>
           <a:p>
-            <a:pPr algn="ctr" indent="0" marL="0">
+            <a:pPr marL="0" indent="0" algn="ctr">
               <a:buNone/>
             </a:pPr>
             <a:r>
@@ -2871,6 +2698,13 @@
             <a:prstDash val="solid"/>
           </a:ln>
         </p:spPr>
+        <p:txBody>
+          <a:bodyPr/>
+          <a:lstStyle/>
+          <a:p>
+            <a:endParaRPr lang="en-SG"/>
+          </a:p>
+        </p:txBody>
       </p:sp>
       <p:sp>
         <p:nvSpPr>
@@ -2893,7 +2727,7 @@
           <a:bodyPr wrap="square" lIns="0" tIns="0" rIns="0" bIns="0" rtlCol="0" anchor="ctr"/>
           <a:lstStyle/>
           <a:p>
-            <a:pPr algn="ctr" indent="0" marL="0">
+            <a:pPr marL="0" indent="0" algn="ctr">
               <a:buNone/>
             </a:pPr>
             <a:r>
@@ -2927,6 +2761,7 @@
         <a:solidFill>
           <a:srgbClr val="080C10"/>
         </a:solidFill>
+        <a:effectLst/>
       </p:bgPr>
     </p:bg>
     <p:spTree>
@@ -2967,17 +2802,24 @@
             <a:prstDash val="solid"/>
           </a:ln>
         </p:spPr>
+        <p:txBody>
+          <a:bodyPr/>
+          <a:lstStyle/>
+          <a:p>
+            <a:endParaRPr lang="en-SG"/>
+          </a:p>
+        </p:txBody>
       </p:sp>
       <p:pic>
         <p:nvPicPr>
-          <p:cNvPr id="3" name="Image 0" descr="preencoded.png">    </p:cNvPr>
+          <p:cNvPr id="3" name="Image 0" descr="preencoded.png"/>
           <p:cNvPicPr>
             <a:picLocks noChangeAspect="1"/>
           </p:cNvPicPr>
           <p:nvPr/>
         </p:nvPicPr>
         <p:blipFill>
-          <a:blip r:embed="rId1"/>
+          <a:blip r:embed="rId3"/>
           <a:stretch>
             <a:fillRect/>
           </a:stretch>
@@ -3013,7 +2855,7 @@
           <a:bodyPr wrap="square" lIns="0" tIns="0" rIns="0" bIns="0" rtlCol="0" anchor="ctr"/>
           <a:lstStyle/>
           <a:p>
-            <a:pPr algn="l" indent="0" marL="0">
+            <a:pPr marL="0" indent="0" algn="l">
               <a:buNone/>
             </a:pPr>
             <a:r>
@@ -3055,13 +2897,20 @@
             <a:prstDash val="solid"/>
           </a:ln>
           <a:effectLst>
-            <a:outerShdw sx="100000" sy="100000" kx="0" ky="0" algn="bl" rotWithShape="0" blurRad="127000" dist="38100" dir="8100000">
+            <a:outerShdw blurRad="127000" dist="38100" dir="8100000" algn="bl" rotWithShape="0">
               <a:srgbClr val="000000">
                 <a:alpha val="25000"/>
               </a:srgbClr>
             </a:outerShdw>
           </a:effectLst>
         </p:spPr>
+        <p:txBody>
+          <a:bodyPr/>
+          <a:lstStyle/>
+          <a:p>
+            <a:endParaRPr lang="en-SG"/>
+          </a:p>
+        </p:txBody>
       </p:sp>
       <p:sp>
         <p:nvSpPr>
@@ -3087,6 +2936,13 @@
             <a:prstDash val="solid"/>
           </a:ln>
         </p:spPr>
+        <p:txBody>
+          <a:bodyPr/>
+          <a:lstStyle/>
+          <a:p>
+            <a:endParaRPr lang="en-SG"/>
+          </a:p>
+        </p:txBody>
       </p:sp>
       <p:sp>
         <p:nvSpPr>
@@ -3112,6 +2968,13 @@
             <a:prstDash val="solid"/>
           </a:ln>
         </p:spPr>
+        <p:txBody>
+          <a:bodyPr/>
+          <a:lstStyle/>
+          <a:p>
+            <a:endParaRPr lang="en-SG"/>
+          </a:p>
+        </p:txBody>
       </p:sp>
       <p:sp>
         <p:nvSpPr>
@@ -3137,6 +3000,13 @@
             <a:prstDash val="solid"/>
           </a:ln>
         </p:spPr>
+        <p:txBody>
+          <a:bodyPr/>
+          <a:lstStyle/>
+          <a:p>
+            <a:endParaRPr lang="en-SG"/>
+          </a:p>
+        </p:txBody>
       </p:sp>
       <p:sp>
         <p:nvSpPr>
@@ -3162,6 +3032,13 @@
             <a:prstDash val="solid"/>
           </a:ln>
         </p:spPr>
+        <p:txBody>
+          <a:bodyPr/>
+          <a:lstStyle/>
+          <a:p>
+            <a:endParaRPr lang="en-SG"/>
+          </a:p>
+        </p:txBody>
       </p:sp>
       <p:sp>
         <p:nvSpPr>
@@ -3184,7 +3061,7 @@
           <a:bodyPr wrap="square" lIns="0" tIns="0" rIns="0" bIns="0" rtlCol="0" anchor="ctr"/>
           <a:lstStyle/>
           <a:p>
-            <a:pPr algn="ctr" indent="0" marL="0">
+            <a:pPr marL="0" indent="0" algn="ctr">
               <a:buNone/>
             </a:pPr>
             <a:r>
@@ -3223,7 +3100,7 @@
           <a:bodyPr wrap="square" lIns="0" tIns="0" rIns="0" bIns="0" rtlCol="0" anchor="ctr"/>
           <a:lstStyle/>
           <a:p>
-            <a:pPr indent="0" marL="0">
+            <a:pPr marL="0" indent="0">
               <a:buNone/>
             </a:pPr>
             <a:r>
@@ -3240,7 +3117,7 @@
             <a:endParaRPr lang="en-US" sz="1250" dirty="0"/>
           </a:p>
           <a:p>
-            <a:pPr indent="0" marL="0">
+            <a:pPr marL="0" indent="0">
               <a:buNone/>
             </a:pPr>
             <a:r>
@@ -3257,7 +3134,7 @@
             <a:endParaRPr lang="en-US" sz="1250" dirty="0"/>
           </a:p>
           <a:p>
-            <a:pPr indent="0" marL="0">
+            <a:pPr marL="0" indent="0">
               <a:buNone/>
             </a:pPr>
             <a:r>
@@ -3274,13 +3151,13 @@
             <a:endParaRPr lang="en-US" sz="1250" dirty="0"/>
           </a:p>
           <a:p>
-            <a:pPr indent="0" marL="0">
+            <a:pPr marL="0" indent="0">
               <a:buNone/>
             </a:pPr>
             <a:endParaRPr lang="en-US" sz="1250" dirty="0"/>
           </a:p>
           <a:p>
-            <a:pPr indent="0" marL="0">
+            <a:pPr marL="0" indent="0">
               <a:buNone/>
             </a:pPr>
             <a:r>
@@ -3297,7 +3174,7 @@
             <a:endParaRPr lang="en-US" sz="1250" dirty="0"/>
           </a:p>
           <a:p>
-            <a:pPr indent="0" marL="0">
+            <a:pPr marL="0" indent="0">
               <a:buNone/>
             </a:pPr>
             <a:r>
@@ -3314,7 +3191,7 @@
             <a:endParaRPr lang="en-US" sz="1250" dirty="0"/>
           </a:p>
           <a:p>
-            <a:pPr indent="0" marL="0">
+            <a:pPr marL="0" indent="0">
               <a:buNone/>
             </a:pPr>
             <a:r>
@@ -3331,7 +3208,7 @@
             <a:endParaRPr lang="en-US" sz="1250" dirty="0"/>
           </a:p>
           <a:p>
-            <a:pPr indent="0" marL="0">
+            <a:pPr marL="0" indent="0">
               <a:buNone/>
             </a:pPr>
             <a:r>
@@ -3348,7 +3225,7 @@
             <a:endParaRPr lang="en-US" sz="1250" dirty="0"/>
           </a:p>
           <a:p>
-            <a:pPr indent="0" marL="0">
+            <a:pPr marL="0" indent="0">
               <a:buNone/>
             </a:pPr>
             <a:r>
@@ -3365,13 +3242,13 @@
             <a:endParaRPr lang="en-US" sz="1250" dirty="0"/>
           </a:p>
           <a:p>
-            <a:pPr indent="0" marL="0">
+            <a:pPr marL="0" indent="0">
               <a:buNone/>
             </a:pPr>
             <a:endParaRPr lang="en-US" sz="1250" dirty="0"/>
           </a:p>
           <a:p>
-            <a:pPr indent="0" marL="0">
+            <a:pPr marL="0" indent="0">
               <a:buNone/>
             </a:pPr>
             <a:r>
@@ -3388,7 +3265,7 @@
             <a:endParaRPr lang="en-US" sz="1250" dirty="0"/>
           </a:p>
           <a:p>
-            <a:pPr indent="0" marL="0">
+            <a:pPr marL="0" indent="0">
               <a:buNone/>
             </a:pPr>
             <a:r>
@@ -3405,7 +3282,7 @@
             <a:endParaRPr lang="en-US" sz="1250" dirty="0"/>
           </a:p>
           <a:p>
-            <a:pPr indent="0" marL="0">
+            <a:pPr marL="0" indent="0">
               <a:buNone/>
             </a:pPr>
             <a:r>
@@ -3422,7 +3299,7 @@
             <a:endParaRPr lang="en-US" sz="1250" dirty="0"/>
           </a:p>
           <a:p>
-            <a:pPr indent="0" marL="0">
+            <a:pPr marL="0" indent="0">
               <a:buNone/>
             </a:pPr>
             <a:r>
@@ -3439,7 +3316,7 @@
             <a:endParaRPr lang="en-US" sz="1250" dirty="0"/>
           </a:p>
           <a:p>
-            <a:pPr indent="0" marL="0">
+            <a:pPr marL="0" indent="0">
               <a:buNone/>
             </a:pPr>
             <a:r>
@@ -3456,7 +3333,7 @@
             <a:endParaRPr lang="en-US" sz="1250" dirty="0"/>
           </a:p>
           <a:p>
-            <a:pPr indent="0" marL="0">
+            <a:pPr marL="0" indent="0">
               <a:buNone/>
             </a:pPr>
             <a:r>
@@ -3473,7 +3350,7 @@
             <a:endParaRPr lang="en-US" sz="1250" dirty="0"/>
           </a:p>
           <a:p>
-            <a:pPr indent="0" marL="0">
+            <a:pPr marL="0" indent="0">
               <a:buNone/>
             </a:pPr>
             <a:r>
@@ -3490,13 +3367,13 @@
             <a:endParaRPr lang="en-US" sz="1250" dirty="0"/>
           </a:p>
           <a:p>
-            <a:pPr indent="0" marL="0">
+            <a:pPr marL="0" indent="0">
               <a:buNone/>
             </a:pPr>
             <a:endParaRPr lang="en-US" sz="1250" dirty="0"/>
           </a:p>
           <a:p>
-            <a:pPr indent="0" marL="0">
+            <a:pPr marL="0" indent="0">
               <a:buNone/>
             </a:pPr>
             <a:r>
@@ -3513,13 +3390,13 @@
             <a:endParaRPr lang="en-US" sz="1250" dirty="0"/>
           </a:p>
           <a:p>
-            <a:pPr indent="0" marL="0">
+            <a:pPr marL="0" indent="0">
               <a:buNone/>
             </a:pPr>
             <a:endParaRPr lang="en-US" sz="1250" dirty="0"/>
           </a:p>
           <a:p>
-            <a:pPr indent="0" marL="0">
+            <a:pPr marL="0" indent="0">
               <a:buNone/>
             </a:pPr>
             <a:r>
@@ -3536,7 +3413,7 @@
             <a:endParaRPr lang="en-US" sz="1250" dirty="0"/>
           </a:p>
           <a:p>
-            <a:pPr indent="0" marL="0">
+            <a:pPr marL="0" indent="0">
               <a:buNone/>
             </a:pPr>
             <a:r>
@@ -3578,6 +3455,13 @@
             <a:prstDash val="solid"/>
           </a:ln>
         </p:spPr>
+        <p:txBody>
+          <a:bodyPr/>
+          <a:lstStyle/>
+          <a:p>
+            <a:endParaRPr lang="en-SG"/>
+          </a:p>
+        </p:txBody>
       </p:sp>
       <p:sp>
         <p:nvSpPr>
@@ -3600,7 +3484,7 @@
           <a:bodyPr wrap="square" lIns="0" tIns="0" rIns="0" bIns="0" rtlCol="0" anchor="ctr"/>
           <a:lstStyle/>
           <a:p>
-            <a:pPr indent="0" marL="0">
+            <a:pPr marL="0" indent="0">
               <a:buNone/>
             </a:pPr>
             <a:r>
@@ -3639,7 +3523,7 @@
           <a:bodyPr wrap="square" lIns="0" tIns="0" rIns="0" bIns="0" rtlCol="0" anchor="ctr"/>
           <a:lstStyle/>
           <a:p>
-            <a:pPr indent="0" marL="0">
+            <a:pPr marL="0" indent="0">
               <a:buNone/>
             </a:pPr>
             <a:r>
@@ -3681,6 +3565,13 @@
             <a:prstDash val="solid"/>
           </a:ln>
         </p:spPr>
+        <p:txBody>
+          <a:bodyPr/>
+          <a:lstStyle/>
+          <a:p>
+            <a:endParaRPr lang="en-SG"/>
+          </a:p>
+        </p:txBody>
       </p:sp>
       <p:sp>
         <p:nvSpPr>
@@ -3706,6 +3597,13 @@
             <a:prstDash val="solid"/>
           </a:ln>
         </p:spPr>
+        <p:txBody>
+          <a:bodyPr/>
+          <a:lstStyle/>
+          <a:p>
+            <a:endParaRPr lang="en-SG"/>
+          </a:p>
+        </p:txBody>
       </p:sp>
       <p:sp>
         <p:nvSpPr>
@@ -3728,7 +3626,7 @@
           <a:bodyPr wrap="square" lIns="0" tIns="0" rIns="0" bIns="0" rtlCol="0" anchor="ctr"/>
           <a:lstStyle/>
           <a:p>
-            <a:pPr indent="0" marL="0">
+            <a:pPr marL="0" indent="0">
               <a:buNone/>
             </a:pPr>
             <a:r>
@@ -3767,7 +3665,7 @@
           <a:bodyPr wrap="square" lIns="0" tIns="0" rIns="0" bIns="0" rtlCol="0" anchor="ctr"/>
           <a:lstStyle/>
           <a:p>
-            <a:pPr indent="0" marL="0">
+            <a:pPr marL="0" indent="0">
               <a:buNone/>
             </a:pPr>
             <a:r>
@@ -3809,6 +3707,13 @@
             <a:prstDash val="solid"/>
           </a:ln>
         </p:spPr>
+        <p:txBody>
+          <a:bodyPr/>
+          <a:lstStyle/>
+          <a:p>
+            <a:endParaRPr lang="en-SG"/>
+          </a:p>
+        </p:txBody>
       </p:sp>
       <p:sp>
         <p:nvSpPr>
@@ -3831,7 +3736,7 @@
           <a:bodyPr wrap="square" lIns="0" tIns="0" rIns="0" bIns="0" rtlCol="0" anchor="ctr"/>
           <a:lstStyle/>
           <a:p>
-            <a:pPr algn="ctr" indent="0" marL="0">
+            <a:pPr marL="0" indent="0" algn="ctr">
               <a:buNone/>
             </a:pPr>
             <a:r>
@@ -3873,6 +3778,13 @@
             <a:prstDash val="solid"/>
           </a:ln>
         </p:spPr>
+        <p:txBody>
+          <a:bodyPr/>
+          <a:lstStyle/>
+          <a:p>
+            <a:endParaRPr lang="en-SG"/>
+          </a:p>
+        </p:txBody>
       </p:sp>
       <p:sp>
         <p:nvSpPr>
@@ -3895,7 +3807,7 @@
           <a:bodyPr wrap="square" lIns="0" tIns="0" rIns="0" bIns="0" rtlCol="0" anchor="ctr"/>
           <a:lstStyle/>
           <a:p>
-            <a:pPr algn="ctr" indent="0" marL="0">
+            <a:pPr marL="0" indent="0" algn="ctr">
               <a:buNone/>
             </a:pPr>
             <a:r>
@@ -3929,6 +3841,7 @@
         <a:solidFill>
           <a:srgbClr val="080C10"/>
         </a:solidFill>
+        <a:effectLst/>
       </p:bgPr>
     </p:bg>
     <p:spTree>
@@ -3969,17 +3882,24 @@
             <a:prstDash val="solid"/>
           </a:ln>
         </p:spPr>
+        <p:txBody>
+          <a:bodyPr/>
+          <a:lstStyle/>
+          <a:p>
+            <a:endParaRPr lang="en-SG"/>
+          </a:p>
+        </p:txBody>
       </p:sp>
       <p:pic>
         <p:nvPicPr>
-          <p:cNvPr id="3" name="Image 0" descr="preencoded.png">    </p:cNvPr>
+          <p:cNvPr id="3" name="Image 0" descr="preencoded.png"/>
           <p:cNvPicPr>
             <a:picLocks noChangeAspect="1"/>
           </p:cNvPicPr>
           <p:nvPr/>
         </p:nvPicPr>
         <p:blipFill>
-          <a:blip r:embed="rId1"/>
+          <a:blip r:embed="rId3"/>
           <a:stretch>
             <a:fillRect/>
           </a:stretch>
@@ -4015,7 +3935,7 @@
           <a:bodyPr wrap="square" lIns="0" tIns="0" rIns="0" bIns="0" rtlCol="0" anchor="ctr"/>
           <a:lstStyle/>
           <a:p>
-            <a:pPr algn="l" indent="0" marL="0">
+            <a:pPr marL="0" indent="0" algn="l">
               <a:buNone/>
             </a:pPr>
             <a:r>
@@ -4057,13 +3977,20 @@
             <a:prstDash val="solid"/>
           </a:ln>
           <a:effectLst>
-            <a:outerShdw sx="100000" sy="100000" kx="0" ky="0" algn="bl" rotWithShape="0" blurRad="127000" dist="38100" dir="8100000">
+            <a:outerShdw blurRad="127000" dist="38100" dir="8100000" algn="bl" rotWithShape="0">
               <a:srgbClr val="000000">
                 <a:alpha val="25000"/>
               </a:srgbClr>
             </a:outerShdw>
           </a:effectLst>
         </p:spPr>
+        <p:txBody>
+          <a:bodyPr/>
+          <a:lstStyle/>
+          <a:p>
+            <a:endParaRPr lang="en-SG"/>
+          </a:p>
+        </p:txBody>
       </p:sp>
       <p:sp>
         <p:nvSpPr>
@@ -4089,6 +4016,13 @@
             <a:prstDash val="solid"/>
           </a:ln>
         </p:spPr>
+        <p:txBody>
+          <a:bodyPr/>
+          <a:lstStyle/>
+          <a:p>
+            <a:endParaRPr lang="en-SG"/>
+          </a:p>
+        </p:txBody>
       </p:sp>
       <p:sp>
         <p:nvSpPr>
@@ -4114,6 +4048,13 @@
             <a:prstDash val="solid"/>
           </a:ln>
         </p:spPr>
+        <p:txBody>
+          <a:bodyPr/>
+          <a:lstStyle/>
+          <a:p>
+            <a:endParaRPr lang="en-SG"/>
+          </a:p>
+        </p:txBody>
       </p:sp>
       <p:sp>
         <p:nvSpPr>
@@ -4139,6 +4080,13 @@
             <a:prstDash val="solid"/>
           </a:ln>
         </p:spPr>
+        <p:txBody>
+          <a:bodyPr/>
+          <a:lstStyle/>
+          <a:p>
+            <a:endParaRPr lang="en-SG"/>
+          </a:p>
+        </p:txBody>
       </p:sp>
       <p:sp>
         <p:nvSpPr>
@@ -4164,6 +4112,13 @@
             <a:prstDash val="solid"/>
           </a:ln>
         </p:spPr>
+        <p:txBody>
+          <a:bodyPr/>
+          <a:lstStyle/>
+          <a:p>
+            <a:endParaRPr lang="en-SG"/>
+          </a:p>
+        </p:txBody>
       </p:sp>
       <p:sp>
         <p:nvSpPr>
@@ -4186,7 +4141,7 @@
           <a:bodyPr wrap="square" lIns="0" tIns="0" rIns="0" bIns="0" rtlCol="0" anchor="ctr"/>
           <a:lstStyle/>
           <a:p>
-            <a:pPr algn="ctr" indent="0" marL="0">
+            <a:pPr marL="0" indent="0" algn="ctr">
               <a:buNone/>
             </a:pPr>
             <a:r>
@@ -4225,7 +4180,7 @@
           <a:bodyPr wrap="square" lIns="0" tIns="0" rIns="0" bIns="0" rtlCol="0" anchor="ctr"/>
           <a:lstStyle/>
           <a:p>
-            <a:pPr indent="0" marL="0">
+            <a:pPr marL="0" indent="0">
               <a:buNone/>
             </a:pPr>
             <a:r>
@@ -4242,7 +4197,7 @@
             <a:endParaRPr lang="en-US" sz="1250" dirty="0"/>
           </a:p>
           <a:p>
-            <a:pPr indent="0" marL="0">
+            <a:pPr marL="0" indent="0">
               <a:buNone/>
             </a:pPr>
             <a:r>
@@ -4259,7 +4214,7 @@
             <a:endParaRPr lang="en-US" sz="1250" dirty="0"/>
           </a:p>
           <a:p>
-            <a:pPr indent="0" marL="0">
+            <a:pPr marL="0" indent="0">
               <a:buNone/>
             </a:pPr>
             <a:r>
@@ -4276,7 +4231,7 @@
             <a:endParaRPr lang="en-US" sz="1250" dirty="0"/>
           </a:p>
           <a:p>
-            <a:pPr indent="0" marL="0">
+            <a:pPr marL="0" indent="0">
               <a:buNone/>
             </a:pPr>
             <a:r>
@@ -4293,13 +4248,13 @@
             <a:endParaRPr lang="en-US" sz="1250" dirty="0"/>
           </a:p>
           <a:p>
-            <a:pPr indent="0" marL="0">
+            <a:pPr marL="0" indent="0">
               <a:buNone/>
             </a:pPr>
             <a:endParaRPr lang="en-US" sz="1250" dirty="0"/>
           </a:p>
           <a:p>
-            <a:pPr indent="0" marL="0">
+            <a:pPr marL="0" indent="0">
               <a:buNone/>
             </a:pPr>
             <a:r>
@@ -4316,7 +4271,7 @@
             <a:endParaRPr lang="en-US" sz="1250" dirty="0"/>
           </a:p>
           <a:p>
-            <a:pPr indent="0" marL="0">
+            <a:pPr marL="0" indent="0">
               <a:buNone/>
             </a:pPr>
             <a:r>
@@ -4333,7 +4288,7 @@
             <a:endParaRPr lang="en-US" sz="1250" dirty="0"/>
           </a:p>
           <a:p>
-            <a:pPr indent="0" marL="0">
+            <a:pPr marL="0" indent="0">
               <a:buNone/>
             </a:pPr>
             <a:r>
@@ -4350,7 +4305,7 @@
             <a:endParaRPr lang="en-US" sz="1250" dirty="0"/>
           </a:p>
           <a:p>
-            <a:pPr indent="0" marL="0">
+            <a:pPr marL="0" indent="0">
               <a:buNone/>
             </a:pPr>
             <a:r>
@@ -4367,7 +4322,7 @@
             <a:endParaRPr lang="en-US" sz="1250" dirty="0"/>
           </a:p>
           <a:p>
-            <a:pPr indent="0" marL="0">
+            <a:pPr marL="0" indent="0">
               <a:buNone/>
             </a:pPr>
             <a:r>
@@ -4384,13 +4339,13 @@
             <a:endParaRPr lang="en-US" sz="1250" dirty="0"/>
           </a:p>
           <a:p>
-            <a:pPr indent="0" marL="0">
+            <a:pPr marL="0" indent="0">
               <a:buNone/>
             </a:pPr>
             <a:endParaRPr lang="en-US" sz="1250" dirty="0"/>
           </a:p>
           <a:p>
-            <a:pPr indent="0" marL="0">
+            <a:pPr marL="0" indent="0">
               <a:buNone/>
             </a:pPr>
             <a:r>
@@ -4407,7 +4362,7 @@
             <a:endParaRPr lang="en-US" sz="1250" dirty="0"/>
           </a:p>
           <a:p>
-            <a:pPr indent="0" marL="0">
+            <a:pPr marL="0" indent="0">
               <a:buNone/>
             </a:pPr>
             <a:r>
@@ -4424,7 +4379,7 @@
             <a:endParaRPr lang="en-US" sz="1250" dirty="0"/>
           </a:p>
           <a:p>
-            <a:pPr indent="0" marL="0">
+            <a:pPr marL="0" indent="0">
               <a:buNone/>
             </a:pPr>
             <a:r>
@@ -4441,7 +4396,7 @@
             <a:endParaRPr lang="en-US" sz="1250" dirty="0"/>
           </a:p>
           <a:p>
-            <a:pPr indent="0" marL="0">
+            <a:pPr marL="0" indent="0">
               <a:buNone/>
             </a:pPr>
             <a:r>
@@ -4458,7 +4413,7 @@
             <a:endParaRPr lang="en-US" sz="1250" dirty="0"/>
           </a:p>
           <a:p>
-            <a:pPr indent="0" marL="0">
+            <a:pPr marL="0" indent="0">
               <a:buNone/>
             </a:pPr>
             <a:r>
@@ -4475,7 +4430,7 @@
             <a:endParaRPr lang="en-US" sz="1250" dirty="0"/>
           </a:p>
           <a:p>
-            <a:pPr indent="0" marL="0">
+            <a:pPr marL="0" indent="0">
               <a:buNone/>
             </a:pPr>
             <a:r>
@@ -4492,7 +4447,7 @@
             <a:endParaRPr lang="en-US" sz="1250" dirty="0"/>
           </a:p>
           <a:p>
-            <a:pPr indent="0" marL="0">
+            <a:pPr marL="0" indent="0">
               <a:buNone/>
             </a:pPr>
             <a:r>
@@ -4509,13 +4464,13 @@
             <a:endParaRPr lang="en-US" sz="1250" dirty="0"/>
           </a:p>
           <a:p>
-            <a:pPr indent="0" marL="0">
+            <a:pPr marL="0" indent="0">
               <a:buNone/>
             </a:pPr>
             <a:endParaRPr lang="en-US" sz="1250" dirty="0"/>
           </a:p>
           <a:p>
-            <a:pPr indent="0" marL="0">
+            <a:pPr marL="0" indent="0">
               <a:buNone/>
             </a:pPr>
             <a:r>
@@ -4532,7 +4487,7 @@
             <a:endParaRPr lang="en-US" sz="1250" dirty="0"/>
           </a:p>
           <a:p>
-            <a:pPr indent="0" marL="0">
+            <a:pPr marL="0" indent="0">
               <a:buNone/>
             </a:pPr>
             <a:r>
@@ -4549,7 +4504,7 @@
             <a:endParaRPr lang="en-US" sz="1250" dirty="0"/>
           </a:p>
           <a:p>
-            <a:pPr indent="0" marL="0">
+            <a:pPr marL="0" indent="0">
               <a:buNone/>
             </a:pPr>
             <a:r>
@@ -4566,7 +4521,7 @@
             <a:endParaRPr lang="en-US" sz="1250" dirty="0"/>
           </a:p>
           <a:p>
-            <a:pPr indent="0" marL="0">
+            <a:pPr marL="0" indent="0">
               <a:buNone/>
             </a:pPr>
             <a:r>
@@ -4583,7 +4538,7 @@
             <a:endParaRPr lang="en-US" sz="1250" dirty="0"/>
           </a:p>
           <a:p>
-            <a:pPr indent="0" marL="0">
+            <a:pPr marL="0" indent="0">
               <a:buNone/>
             </a:pPr>
             <a:r>
@@ -4600,7 +4555,7 @@
             <a:endParaRPr lang="en-US" sz="1250" dirty="0"/>
           </a:p>
           <a:p>
-            <a:pPr indent="0" marL="0">
+            <a:pPr marL="0" indent="0">
               <a:buNone/>
             </a:pPr>
             <a:r>
@@ -4642,6 +4597,13 @@
             <a:prstDash val="solid"/>
           </a:ln>
         </p:spPr>
+        <p:txBody>
+          <a:bodyPr/>
+          <a:lstStyle/>
+          <a:p>
+            <a:endParaRPr lang="en-SG"/>
+          </a:p>
+        </p:txBody>
       </p:sp>
       <p:sp>
         <p:nvSpPr>
@@ -4664,7 +4626,7 @@
           <a:bodyPr wrap="square" lIns="0" tIns="0" rIns="0" bIns="0" rtlCol="0" anchor="ctr"/>
           <a:lstStyle/>
           <a:p>
-            <a:pPr indent="0" marL="0">
+            <a:pPr marL="0" indent="0">
               <a:buNone/>
             </a:pPr>
             <a:r>
@@ -4703,7 +4665,7 @@
           <a:bodyPr wrap="square" lIns="0" tIns="0" rIns="0" bIns="0" rtlCol="0" anchor="ctr"/>
           <a:lstStyle/>
           <a:p>
-            <a:pPr indent="0" marL="0">
+            <a:pPr marL="0" indent="0">
               <a:buNone/>
             </a:pPr>
             <a:r>
@@ -4745,6 +4707,13 @@
             <a:prstDash val="solid"/>
           </a:ln>
         </p:spPr>
+        <p:txBody>
+          <a:bodyPr/>
+          <a:lstStyle/>
+          <a:p>
+            <a:endParaRPr lang="en-SG"/>
+          </a:p>
+        </p:txBody>
       </p:sp>
       <p:sp>
         <p:nvSpPr>
@@ -4770,6 +4739,13 @@
             <a:prstDash val="solid"/>
           </a:ln>
         </p:spPr>
+        <p:txBody>
+          <a:bodyPr/>
+          <a:lstStyle/>
+          <a:p>
+            <a:endParaRPr lang="en-SG"/>
+          </a:p>
+        </p:txBody>
       </p:sp>
       <p:sp>
         <p:nvSpPr>
@@ -4792,7 +4768,7 @@
           <a:bodyPr wrap="square" lIns="0" tIns="0" rIns="0" bIns="0" rtlCol="0" anchor="ctr"/>
           <a:lstStyle/>
           <a:p>
-            <a:pPr indent="0" marL="0">
+            <a:pPr marL="0" indent="0">
               <a:buNone/>
             </a:pPr>
             <a:r>
@@ -4831,7 +4807,7 @@
           <a:bodyPr wrap="square" lIns="0" tIns="0" rIns="0" bIns="0" rtlCol="0" anchor="ctr"/>
           <a:lstStyle/>
           <a:p>
-            <a:pPr indent="0" marL="0">
+            <a:pPr marL="0" indent="0">
               <a:buNone/>
             </a:pPr>
             <a:r>
@@ -4873,6 +4849,13 @@
             <a:prstDash val="solid"/>
           </a:ln>
         </p:spPr>
+        <p:txBody>
+          <a:bodyPr/>
+          <a:lstStyle/>
+          <a:p>
+            <a:endParaRPr lang="en-SG"/>
+          </a:p>
+        </p:txBody>
       </p:sp>
       <p:sp>
         <p:nvSpPr>
@@ -4895,7 +4878,7 @@
           <a:bodyPr wrap="square" lIns="0" tIns="0" rIns="0" bIns="0" rtlCol="0" anchor="ctr"/>
           <a:lstStyle/>
           <a:p>
-            <a:pPr algn="ctr" indent="0" marL="0">
+            <a:pPr marL="0" indent="0" algn="ctr">
               <a:buNone/>
             </a:pPr>
             <a:r>
@@ -4937,6 +4920,13 @@
             <a:prstDash val="solid"/>
           </a:ln>
         </p:spPr>
+        <p:txBody>
+          <a:bodyPr/>
+          <a:lstStyle/>
+          <a:p>
+            <a:endParaRPr lang="en-SG"/>
+          </a:p>
+        </p:txBody>
       </p:sp>
       <p:sp>
         <p:nvSpPr>
@@ -4959,7 +4949,7 @@
           <a:bodyPr wrap="square" lIns="0" tIns="0" rIns="0" bIns="0" rtlCol="0" anchor="ctr"/>
           <a:lstStyle/>
           <a:p>
-            <a:pPr algn="ctr" indent="0" marL="0">
+            <a:pPr marL="0" indent="0" algn="ctr">
               <a:buNone/>
             </a:pPr>
             <a:r>
@@ -4993,6 +4983,7 @@
         <a:solidFill>
           <a:srgbClr val="080C10"/>
         </a:solidFill>
+        <a:effectLst/>
       </p:bgPr>
     </p:bg>
     <p:spTree>
@@ -5033,17 +5024,24 @@
             <a:prstDash val="solid"/>
           </a:ln>
         </p:spPr>
+        <p:txBody>
+          <a:bodyPr/>
+          <a:lstStyle/>
+          <a:p>
+            <a:endParaRPr lang="en-SG"/>
+          </a:p>
+        </p:txBody>
       </p:sp>
       <p:pic>
         <p:nvPicPr>
-          <p:cNvPr id="3" name="Image 0" descr="preencoded.png">    </p:cNvPr>
+          <p:cNvPr id="3" name="Image 0" descr="preencoded.png"/>
           <p:cNvPicPr>
             <a:picLocks noChangeAspect="1"/>
           </p:cNvPicPr>
           <p:nvPr/>
         </p:nvPicPr>
         <p:blipFill>
-          <a:blip r:embed="rId1"/>
+          <a:blip r:embed="rId3"/>
           <a:stretch>
             <a:fillRect/>
           </a:stretch>
@@ -5079,7 +5077,7 @@
           <a:bodyPr wrap="square" lIns="0" tIns="0" rIns="0" bIns="0" rtlCol="0" anchor="ctr"/>
           <a:lstStyle/>
           <a:p>
-            <a:pPr algn="l" indent="0" marL="0">
+            <a:pPr marL="0" indent="0" algn="l">
               <a:buNone/>
             </a:pPr>
             <a:r>
@@ -5121,13 +5119,20 @@
             <a:prstDash val="solid"/>
           </a:ln>
           <a:effectLst>
-            <a:outerShdw sx="100000" sy="100000" kx="0" ky="0" algn="bl" rotWithShape="0" blurRad="127000" dist="38100" dir="8100000">
+            <a:outerShdw blurRad="127000" dist="38100" dir="8100000" algn="bl" rotWithShape="0">
               <a:srgbClr val="000000">
                 <a:alpha val="25000"/>
               </a:srgbClr>
             </a:outerShdw>
           </a:effectLst>
         </p:spPr>
+        <p:txBody>
+          <a:bodyPr/>
+          <a:lstStyle/>
+          <a:p>
+            <a:endParaRPr lang="en-SG"/>
+          </a:p>
+        </p:txBody>
       </p:sp>
       <p:sp>
         <p:nvSpPr>
@@ -5153,6 +5158,13 @@
             <a:prstDash val="solid"/>
           </a:ln>
         </p:spPr>
+        <p:txBody>
+          <a:bodyPr/>
+          <a:lstStyle/>
+          <a:p>
+            <a:endParaRPr lang="en-SG"/>
+          </a:p>
+        </p:txBody>
       </p:sp>
       <p:sp>
         <p:nvSpPr>
@@ -5175,7 +5187,7 @@
           <a:bodyPr wrap="square" lIns="0" tIns="0" rIns="0" bIns="0" rtlCol="0" anchor="ctr"/>
           <a:lstStyle/>
           <a:p>
-            <a:pPr indent="0" marL="0">
+            <a:pPr marL="0" indent="0">
               <a:buNone/>
             </a:pPr>
             <a:r>
@@ -5214,7 +5226,7 @@
           <a:bodyPr wrap="square" lIns="0" tIns="0" rIns="0" bIns="0" rtlCol="0" anchor="ctr"/>
           <a:lstStyle/>
           <a:p>
-            <a:pPr indent="0" marL="0">
+            <a:pPr marL="0" indent="0">
               <a:buNone/>
             </a:pPr>
             <a:r>
@@ -5231,13 +5243,13 @@
             <a:endParaRPr lang="en-US" sz="1200" dirty="0"/>
           </a:p>
           <a:p>
-            <a:pPr indent="0" marL="0">
-              <a:buNone/>
-            </a:pPr>
-            <a:endParaRPr lang="en-US" sz="1200" dirty="0"/>
-          </a:p>
-          <a:p>
-            <a:pPr indent="0" marL="0">
+            <a:pPr marL="0" indent="0">
+              <a:buNone/>
+            </a:pPr>
+            <a:endParaRPr lang="en-US" sz="1200" dirty="0"/>
+          </a:p>
+          <a:p>
+            <a:pPr marL="0" indent="0">
               <a:buNone/>
             </a:pPr>
             <a:r>
@@ -5254,13 +5266,13 @@
             <a:endParaRPr lang="en-US" sz="1200" dirty="0"/>
           </a:p>
           <a:p>
-            <a:pPr indent="0" marL="0">
-              <a:buNone/>
-            </a:pPr>
-            <a:endParaRPr lang="en-US" sz="1200" dirty="0"/>
-          </a:p>
-          <a:p>
-            <a:pPr indent="0" marL="0">
+            <a:pPr marL="0" indent="0">
+              <a:buNone/>
+            </a:pPr>
+            <a:endParaRPr lang="en-US" sz="1200" dirty="0"/>
+          </a:p>
+          <a:p>
+            <a:pPr marL="0" indent="0">
               <a:buNone/>
             </a:pPr>
             <a:r>
@@ -5277,7 +5289,7 @@
             <a:endParaRPr lang="en-US" sz="1200" dirty="0"/>
           </a:p>
           <a:p>
-            <a:pPr indent="0" marL="0">
+            <a:pPr marL="0" indent="0">
               <a:buNone/>
             </a:pPr>
             <a:r>
@@ -5294,7 +5306,7 @@
             <a:endParaRPr lang="en-US" sz="1200" dirty="0"/>
           </a:p>
           <a:p>
-            <a:pPr indent="0" marL="0">
+            <a:pPr marL="0" indent="0">
               <a:buNone/>
             </a:pPr>
             <a:r>
@@ -5311,13 +5323,13 @@
             <a:endParaRPr lang="en-US" sz="1200" dirty="0"/>
           </a:p>
           <a:p>
-            <a:pPr indent="0" marL="0">
-              <a:buNone/>
-            </a:pPr>
-            <a:endParaRPr lang="en-US" sz="1200" dirty="0"/>
-          </a:p>
-          <a:p>
-            <a:pPr indent="0" marL="0">
+            <a:pPr marL="0" indent="0">
+              <a:buNone/>
+            </a:pPr>
+            <a:endParaRPr lang="en-US" sz="1200" dirty="0"/>
+          </a:p>
+          <a:p>
+            <a:pPr marL="0" indent="0">
               <a:buNone/>
             </a:pPr>
             <a:r>
@@ -5334,7 +5346,7 @@
             <a:endParaRPr lang="en-US" sz="1200" dirty="0"/>
           </a:p>
           <a:p>
-            <a:pPr indent="0" marL="0">
+            <a:pPr marL="0" indent="0">
               <a:buNone/>
             </a:pPr>
             <a:r>
@@ -5351,7 +5363,7 @@
             <a:endParaRPr lang="en-US" sz="1200" dirty="0"/>
           </a:p>
           <a:p>
-            <a:pPr indent="0" marL="0">
+            <a:pPr marL="0" indent="0">
               <a:buNone/>
             </a:pPr>
             <a:r>
@@ -5368,13 +5380,13 @@
             <a:endParaRPr lang="en-US" sz="1200" dirty="0"/>
           </a:p>
           <a:p>
-            <a:pPr indent="0" marL="0">
-              <a:buNone/>
-            </a:pPr>
-            <a:endParaRPr lang="en-US" sz="1200" dirty="0"/>
-          </a:p>
-          <a:p>
-            <a:pPr indent="0" marL="0">
+            <a:pPr marL="0" indent="0">
+              <a:buNone/>
+            </a:pPr>
+            <a:endParaRPr lang="en-US" sz="1200" dirty="0"/>
+          </a:p>
+          <a:p>
+            <a:pPr marL="0" indent="0">
               <a:buNone/>
             </a:pPr>
             <a:r>
@@ -5391,7 +5403,7 @@
             <a:endParaRPr lang="en-US" sz="1200" dirty="0"/>
           </a:p>
           <a:p>
-            <a:pPr indent="0" marL="0">
+            <a:pPr marL="0" indent="0">
               <a:buNone/>
             </a:pPr>
             <a:r>
@@ -5408,13 +5420,13 @@
             <a:endParaRPr lang="en-US" sz="1200" dirty="0"/>
           </a:p>
           <a:p>
-            <a:pPr indent="0" marL="0">
-              <a:buNone/>
-            </a:pPr>
-            <a:endParaRPr lang="en-US" sz="1200" dirty="0"/>
-          </a:p>
-          <a:p>
-            <a:pPr indent="0" marL="0">
+            <a:pPr marL="0" indent="0">
+              <a:buNone/>
+            </a:pPr>
+            <a:endParaRPr lang="en-US" sz="1200" dirty="0"/>
+          </a:p>
+          <a:p>
+            <a:pPr marL="0" indent="0">
               <a:buNone/>
             </a:pPr>
             <a:r>
@@ -5431,7 +5443,7 @@
             <a:endParaRPr lang="en-US" sz="1200" dirty="0"/>
           </a:p>
           <a:p>
-            <a:pPr indent="0" marL="0">
+            <a:pPr marL="0" indent="0">
               <a:buNone/>
             </a:pPr>
             <a:r>
@@ -5473,13 +5485,20 @@
             <a:prstDash val="solid"/>
           </a:ln>
           <a:effectLst>
-            <a:outerShdw sx="100000" sy="100000" kx="0" ky="0" algn="bl" rotWithShape="0" blurRad="127000" dist="38100" dir="8100000">
+            <a:outerShdw blurRad="127000" dist="38100" dir="8100000" algn="bl" rotWithShape="0">
               <a:srgbClr val="000000">
                 <a:alpha val="25000"/>
               </a:srgbClr>
             </a:outerShdw>
           </a:effectLst>
         </p:spPr>
+        <p:txBody>
+          <a:bodyPr/>
+          <a:lstStyle/>
+          <a:p>
+            <a:endParaRPr lang="en-SG"/>
+          </a:p>
+        </p:txBody>
       </p:sp>
       <p:sp>
         <p:nvSpPr>
@@ -5505,6 +5524,13 @@
             <a:prstDash val="solid"/>
           </a:ln>
         </p:spPr>
+        <p:txBody>
+          <a:bodyPr/>
+          <a:lstStyle/>
+          <a:p>
+            <a:endParaRPr lang="en-SG"/>
+          </a:p>
+        </p:txBody>
       </p:sp>
       <p:sp>
         <p:nvSpPr>
@@ -5530,6 +5556,13 @@
             <a:prstDash val="solid"/>
           </a:ln>
         </p:spPr>
+        <p:txBody>
+          <a:bodyPr/>
+          <a:lstStyle/>
+          <a:p>
+            <a:endParaRPr lang="en-SG"/>
+          </a:p>
+        </p:txBody>
       </p:sp>
       <p:sp>
         <p:nvSpPr>
@@ -5555,6 +5588,13 @@
             <a:prstDash val="solid"/>
           </a:ln>
         </p:spPr>
+        <p:txBody>
+          <a:bodyPr/>
+          <a:lstStyle/>
+          <a:p>
+            <a:endParaRPr lang="en-SG"/>
+          </a:p>
+        </p:txBody>
       </p:sp>
       <p:sp>
         <p:nvSpPr>
@@ -5580,6 +5620,13 @@
             <a:prstDash val="solid"/>
           </a:ln>
         </p:spPr>
+        <p:txBody>
+          <a:bodyPr/>
+          <a:lstStyle/>
+          <a:p>
+            <a:endParaRPr lang="en-SG"/>
+          </a:p>
+        </p:txBody>
       </p:sp>
       <p:sp>
         <p:nvSpPr>
@@ -5602,7 +5649,7 @@
           <a:bodyPr wrap="square" lIns="0" tIns="0" rIns="0" bIns="0" rtlCol="0" anchor="ctr"/>
           <a:lstStyle/>
           <a:p>
-            <a:pPr algn="ctr" indent="0" marL="0">
+            <a:pPr marL="0" indent="0" algn="ctr">
               <a:buNone/>
             </a:pPr>
             <a:r>
@@ -5641,7 +5688,7 @@
           <a:bodyPr wrap="square" lIns="0" tIns="0" rIns="0" bIns="0" rtlCol="0" anchor="ctr"/>
           <a:lstStyle/>
           <a:p>
-            <a:pPr indent="0" marL="0">
+            <a:pPr marL="0" indent="0">
               <a:buNone/>
             </a:pPr>
             <a:r>
@@ -5658,7 +5705,7 @@
             <a:endParaRPr lang="en-US" sz="1200" dirty="0"/>
           </a:p>
           <a:p>
-            <a:pPr indent="0" marL="0">
+            <a:pPr marL="0" indent="0">
               <a:buNone/>
             </a:pPr>
             <a:r>
@@ -5675,7 +5722,7 @@
             <a:endParaRPr lang="en-US" sz="1200" dirty="0"/>
           </a:p>
           <a:p>
-            <a:pPr indent="0" marL="0">
+            <a:pPr marL="0" indent="0">
               <a:buNone/>
             </a:pPr>
             <a:r>
@@ -5692,7 +5739,7 @@
             <a:endParaRPr lang="en-US" sz="1200" dirty="0"/>
           </a:p>
           <a:p>
-            <a:pPr indent="0" marL="0">
+            <a:pPr marL="0" indent="0">
               <a:buNone/>
             </a:pPr>
             <a:r>
@@ -5709,13 +5756,13 @@
             <a:endParaRPr lang="en-US" sz="1200" dirty="0"/>
           </a:p>
           <a:p>
-            <a:pPr indent="0" marL="0">
-              <a:buNone/>
-            </a:pPr>
-            <a:endParaRPr lang="en-US" sz="1200" dirty="0"/>
-          </a:p>
-          <a:p>
-            <a:pPr indent="0" marL="0">
+            <a:pPr marL="0" indent="0">
+              <a:buNone/>
+            </a:pPr>
+            <a:endParaRPr lang="en-US" sz="1200" dirty="0"/>
+          </a:p>
+          <a:p>
+            <a:pPr marL="0" indent="0">
               <a:buNone/>
             </a:pPr>
             <a:r>
@@ -5732,7 +5779,7 @@
             <a:endParaRPr lang="en-US" sz="1200" dirty="0"/>
           </a:p>
           <a:p>
-            <a:pPr indent="0" marL="0">
+            <a:pPr marL="0" indent="0">
               <a:buNone/>
             </a:pPr>
             <a:r>
@@ -5749,7 +5796,7 @@
             <a:endParaRPr lang="en-US" sz="1200" dirty="0"/>
           </a:p>
           <a:p>
-            <a:pPr indent="0" marL="0">
+            <a:pPr marL="0" indent="0">
               <a:buNone/>
             </a:pPr>
             <a:r>
@@ -5766,13 +5813,13 @@
             <a:endParaRPr lang="en-US" sz="1200" dirty="0"/>
           </a:p>
           <a:p>
-            <a:pPr indent="0" marL="0">
-              <a:buNone/>
-            </a:pPr>
-            <a:endParaRPr lang="en-US" sz="1200" dirty="0"/>
-          </a:p>
-          <a:p>
-            <a:pPr indent="0" marL="0">
+            <a:pPr marL="0" indent="0">
+              <a:buNone/>
+            </a:pPr>
+            <a:endParaRPr lang="en-US" sz="1200" dirty="0"/>
+          </a:p>
+          <a:p>
+            <a:pPr marL="0" indent="0">
               <a:buNone/>
             </a:pPr>
             <a:r>
@@ -5789,7 +5836,7 @@
             <a:endParaRPr lang="en-US" sz="1200" dirty="0"/>
           </a:p>
           <a:p>
-            <a:pPr indent="0" marL="0">
+            <a:pPr marL="0" indent="0">
               <a:buNone/>
             </a:pPr>
             <a:r>
@@ -5806,7 +5853,7 @@
             <a:endParaRPr lang="en-US" sz="1200" dirty="0"/>
           </a:p>
           <a:p>
-            <a:pPr indent="0" marL="0">
+            <a:pPr marL="0" indent="0">
               <a:buNone/>
             </a:pPr>
             <a:r>
@@ -5823,13 +5870,13 @@
             <a:endParaRPr lang="en-US" sz="1200" dirty="0"/>
           </a:p>
           <a:p>
-            <a:pPr indent="0" marL="0">
-              <a:buNone/>
-            </a:pPr>
-            <a:endParaRPr lang="en-US" sz="1200" dirty="0"/>
-          </a:p>
-          <a:p>
-            <a:pPr indent="0" marL="0">
+            <a:pPr marL="0" indent="0">
+              <a:buNone/>
+            </a:pPr>
+            <a:endParaRPr lang="en-US" sz="1200" dirty="0"/>
+          </a:p>
+          <a:p>
+            <a:pPr marL="0" indent="0">
               <a:buNone/>
             </a:pPr>
             <a:r>
@@ -5846,7 +5893,7 @@
             <a:endParaRPr lang="en-US" sz="1200" dirty="0"/>
           </a:p>
           <a:p>
-            <a:pPr indent="0" marL="0">
+            <a:pPr marL="0" indent="0">
               <a:buNone/>
             </a:pPr>
             <a:r>
@@ -5863,7 +5910,7 @@
             <a:endParaRPr lang="en-US" sz="1200" dirty="0"/>
           </a:p>
           <a:p>
-            <a:pPr indent="0" marL="0">
+            <a:pPr marL="0" indent="0">
               <a:buNone/>
             </a:pPr>
             <a:r>
@@ -5880,13 +5927,13 @@
             <a:endParaRPr lang="en-US" sz="1200" dirty="0"/>
           </a:p>
           <a:p>
-            <a:pPr indent="0" marL="0">
-              <a:buNone/>
-            </a:pPr>
-            <a:endParaRPr lang="en-US" sz="1200" dirty="0"/>
-          </a:p>
-          <a:p>
-            <a:pPr indent="0" marL="0">
+            <a:pPr marL="0" indent="0">
+              <a:buNone/>
+            </a:pPr>
+            <a:endParaRPr lang="en-US" sz="1200" dirty="0"/>
+          </a:p>
+          <a:p>
+            <a:pPr marL="0" indent="0">
               <a:buNone/>
             </a:pPr>
             <a:r>
@@ -5903,7 +5950,7 @@
             <a:endParaRPr lang="en-US" sz="1200" dirty="0"/>
           </a:p>
           <a:p>
-            <a:pPr indent="0" marL="0">
+            <a:pPr marL="0" indent="0">
               <a:buNone/>
             </a:pPr>
             <a:r>
@@ -5920,7 +5967,7 @@
             <a:endParaRPr lang="en-US" sz="1200" dirty="0"/>
           </a:p>
           <a:p>
-            <a:pPr indent="0" marL="0">
+            <a:pPr marL="0" indent="0">
               <a:buNone/>
             </a:pPr>
             <a:r>
@@ -5962,6 +6009,13 @@
             <a:prstDash val="solid"/>
           </a:ln>
         </p:spPr>
+        <p:txBody>
+          <a:bodyPr/>
+          <a:lstStyle/>
+          <a:p>
+            <a:endParaRPr lang="en-SG"/>
+          </a:p>
+        </p:txBody>
       </p:sp>
       <p:sp>
         <p:nvSpPr>
@@ -5987,6 +6041,13 @@
             <a:prstDash val="solid"/>
           </a:ln>
         </p:spPr>
+        <p:txBody>
+          <a:bodyPr/>
+          <a:lstStyle/>
+          <a:p>
+            <a:endParaRPr lang="en-SG"/>
+          </a:p>
+        </p:txBody>
       </p:sp>
       <p:sp>
         <p:nvSpPr>
@@ -6009,7 +6070,7 @@
           <a:bodyPr wrap="square" lIns="0" tIns="0" rIns="0" bIns="0" rtlCol="0" anchor="ctr"/>
           <a:lstStyle/>
           <a:p>
-            <a:pPr indent="0" marL="0">
+            <a:pPr marL="0" indent="0">
               <a:buNone/>
             </a:pPr>
             <a:r>
@@ -6048,7 +6109,7 @@
           <a:bodyPr wrap="square" lIns="0" tIns="0" rIns="0" bIns="0" rtlCol="0" anchor="ctr"/>
           <a:lstStyle/>
           <a:p>
-            <a:pPr indent="0" marL="0">
+            <a:pPr marL="0" indent="0">
               <a:buNone/>
             </a:pPr>
             <a:r>
@@ -6090,6 +6151,13 @@
             <a:prstDash val="solid"/>
           </a:ln>
         </p:spPr>
+        <p:txBody>
+          <a:bodyPr/>
+          <a:lstStyle/>
+          <a:p>
+            <a:endParaRPr lang="en-SG"/>
+          </a:p>
+        </p:txBody>
       </p:sp>
       <p:sp>
         <p:nvSpPr>
@@ -6112,7 +6180,7 @@
           <a:bodyPr wrap="square" lIns="0" tIns="0" rIns="0" bIns="0" rtlCol="0" anchor="ctr"/>
           <a:lstStyle/>
           <a:p>
-            <a:pPr algn="ctr" indent="0" marL="0">
+            <a:pPr marL="0" indent="0" algn="ctr">
               <a:buNone/>
             </a:pPr>
             <a:r>
@@ -6154,6 +6222,13 @@
             <a:prstDash val="solid"/>
           </a:ln>
         </p:spPr>
+        <p:txBody>
+          <a:bodyPr/>
+          <a:lstStyle/>
+          <a:p>
+            <a:endParaRPr lang="en-SG"/>
+          </a:p>
+        </p:txBody>
       </p:sp>
       <p:sp>
         <p:nvSpPr>
@@ -6176,7 +6251,7 @@
           <a:bodyPr wrap="square" lIns="0" tIns="0" rIns="0" bIns="0" rtlCol="0" anchor="ctr"/>
           <a:lstStyle/>
           <a:p>
-            <a:pPr algn="ctr" indent="0" marL="0">
+            <a:pPr marL="0" indent="0" algn="ctr">
               <a:buNone/>
             </a:pPr>
             <a:r>
@@ -6210,6 +6285,7 @@
         <a:solidFill>
           <a:srgbClr val="080C10"/>
         </a:solidFill>
+        <a:effectLst/>
       </p:bgPr>
     </p:bg>
     <p:spTree>
@@ -6250,17 +6326,24 @@
             <a:prstDash val="solid"/>
           </a:ln>
         </p:spPr>
+        <p:txBody>
+          <a:bodyPr/>
+          <a:lstStyle/>
+          <a:p>
+            <a:endParaRPr lang="en-SG"/>
+          </a:p>
+        </p:txBody>
       </p:sp>
       <p:pic>
         <p:nvPicPr>
-          <p:cNvPr id="3" name="Image 0" descr="preencoded.png">    </p:cNvPr>
+          <p:cNvPr id="3" name="Image 0" descr="preencoded.png"/>
           <p:cNvPicPr>
             <a:picLocks noChangeAspect="1"/>
           </p:cNvPicPr>
           <p:nvPr/>
         </p:nvPicPr>
         <p:blipFill>
-          <a:blip r:embed="rId1"/>
+          <a:blip r:embed="rId3"/>
           <a:stretch>
             <a:fillRect/>
           </a:stretch>
@@ -6296,7 +6379,7 @@
           <a:bodyPr wrap="square" lIns="0" tIns="0" rIns="0" bIns="0" rtlCol="0" anchor="ctr"/>
           <a:lstStyle/>
           <a:p>
-            <a:pPr algn="l" indent="0" marL="0">
+            <a:pPr marL="0" indent="0" algn="l">
               <a:buNone/>
             </a:pPr>
             <a:r>
@@ -6338,13 +6421,20 @@
             <a:prstDash val="solid"/>
           </a:ln>
           <a:effectLst>
-            <a:outerShdw sx="100000" sy="100000" kx="0" ky="0" algn="bl" rotWithShape="0" blurRad="127000" dist="38100" dir="8100000">
+            <a:outerShdw blurRad="127000" dist="38100" dir="8100000" algn="bl" rotWithShape="0">
               <a:srgbClr val="000000">
                 <a:alpha val="25000"/>
               </a:srgbClr>
             </a:outerShdw>
           </a:effectLst>
         </p:spPr>
+        <p:txBody>
+          <a:bodyPr/>
+          <a:lstStyle/>
+          <a:p>
+            <a:endParaRPr lang="en-SG"/>
+          </a:p>
+        </p:txBody>
       </p:sp>
       <p:sp>
         <p:nvSpPr>
@@ -6370,6 +6460,13 @@
             <a:prstDash val="solid"/>
           </a:ln>
         </p:spPr>
+        <p:txBody>
+          <a:bodyPr/>
+          <a:lstStyle/>
+          <a:p>
+            <a:endParaRPr lang="en-SG"/>
+          </a:p>
+        </p:txBody>
       </p:sp>
       <p:sp>
         <p:nvSpPr>
@@ -6392,7 +6489,7 @@
           <a:bodyPr wrap="square" lIns="0" tIns="0" rIns="0" bIns="0" rtlCol="0" anchor="ctr"/>
           <a:lstStyle/>
           <a:p>
-            <a:pPr algn="ctr" indent="0" marL="0">
+            <a:pPr marL="0" indent="0" algn="ctr">
               <a:buNone/>
             </a:pPr>
             <a:r>
@@ -6431,7 +6528,7 @@
           <a:bodyPr wrap="square" lIns="0" tIns="0" rIns="0" bIns="0" rtlCol="0" anchor="ctr"/>
           <a:lstStyle/>
           <a:p>
-            <a:pPr indent="0" marL="0">
+            <a:pPr marL="0" indent="0">
               <a:buNone/>
             </a:pPr>
             <a:r>
@@ -6473,13 +6570,20 @@
             <a:prstDash val="solid"/>
           </a:ln>
           <a:effectLst>
-            <a:outerShdw sx="100000" sy="100000" kx="0" ky="0" algn="bl" rotWithShape="0" blurRad="127000" dist="38100" dir="8100000">
+            <a:outerShdw blurRad="127000" dist="38100" dir="8100000" algn="bl" rotWithShape="0">
               <a:srgbClr val="000000">
                 <a:alpha val="25000"/>
               </a:srgbClr>
             </a:outerShdw>
           </a:effectLst>
         </p:spPr>
+        <p:txBody>
+          <a:bodyPr/>
+          <a:lstStyle/>
+          <a:p>
+            <a:endParaRPr lang="en-SG"/>
+          </a:p>
+        </p:txBody>
       </p:sp>
       <p:sp>
         <p:nvSpPr>
@@ -6509,6 +6613,13 @@
             <a:prstDash val="solid"/>
           </a:ln>
         </p:spPr>
+        <p:txBody>
+          <a:bodyPr/>
+          <a:lstStyle/>
+          <a:p>
+            <a:endParaRPr lang="en-SG"/>
+          </a:p>
+        </p:txBody>
       </p:sp>
       <p:sp>
         <p:nvSpPr>
@@ -6531,7 +6642,7 @@
           <a:bodyPr wrap="square" lIns="0" tIns="0" rIns="0" bIns="0" rtlCol="0" anchor="ctr"/>
           <a:lstStyle/>
           <a:p>
-            <a:pPr algn="ctr" indent="0" marL="0">
+            <a:pPr marL="0" indent="0" algn="ctr">
               <a:buNone/>
             </a:pPr>
             <a:r>
@@ -6570,7 +6681,7 @@
           <a:bodyPr wrap="square" lIns="0" tIns="0" rIns="0" bIns="0" rtlCol="0" anchor="ctr"/>
           <a:lstStyle/>
           <a:p>
-            <a:pPr indent="0" marL="0">
+            <a:pPr marL="0" indent="0">
               <a:buNone/>
             </a:pPr>
             <a:r>
@@ -6612,13 +6723,20 @@
             <a:prstDash val="solid"/>
           </a:ln>
           <a:effectLst>
-            <a:outerShdw sx="100000" sy="100000" kx="0" ky="0" algn="bl" rotWithShape="0" blurRad="127000" dist="38100" dir="8100000">
+            <a:outerShdw blurRad="127000" dist="38100" dir="8100000" algn="bl" rotWithShape="0">
               <a:srgbClr val="000000">
                 <a:alpha val="25000"/>
               </a:srgbClr>
             </a:outerShdw>
           </a:effectLst>
         </p:spPr>
+        <p:txBody>
+          <a:bodyPr/>
+          <a:lstStyle/>
+          <a:p>
+            <a:endParaRPr lang="en-SG"/>
+          </a:p>
+        </p:txBody>
       </p:sp>
       <p:sp>
         <p:nvSpPr>
@@ -6648,6 +6766,13 @@
             <a:prstDash val="solid"/>
           </a:ln>
         </p:spPr>
+        <p:txBody>
+          <a:bodyPr/>
+          <a:lstStyle/>
+          <a:p>
+            <a:endParaRPr lang="en-SG"/>
+          </a:p>
+        </p:txBody>
       </p:sp>
       <p:sp>
         <p:nvSpPr>
@@ -6670,7 +6795,7 @@
           <a:bodyPr wrap="square" lIns="0" tIns="0" rIns="0" bIns="0" rtlCol="0" anchor="ctr"/>
           <a:lstStyle/>
           <a:p>
-            <a:pPr algn="ctr" indent="0" marL="0">
+            <a:pPr marL="0" indent="0" algn="ctr">
               <a:buNone/>
             </a:pPr>
             <a:r>
@@ -6709,7 +6834,7 @@
           <a:bodyPr wrap="square" lIns="0" tIns="0" rIns="0" bIns="0" rtlCol="0" anchor="ctr"/>
           <a:lstStyle/>
           <a:p>
-            <a:pPr indent="0" marL="0">
+            <a:pPr marL="0" indent="0">
               <a:buNone/>
             </a:pPr>
             <a:r>
@@ -6751,13 +6876,20 @@
             <a:prstDash val="solid"/>
           </a:ln>
           <a:effectLst>
-            <a:outerShdw sx="100000" sy="100000" kx="0" ky="0" algn="bl" rotWithShape="0" blurRad="127000" dist="38100" dir="8100000">
+            <a:outerShdw blurRad="127000" dist="38100" dir="8100000" algn="bl" rotWithShape="0">
               <a:srgbClr val="000000">
                 <a:alpha val="25000"/>
               </a:srgbClr>
             </a:outerShdw>
           </a:effectLst>
         </p:spPr>
+        <p:txBody>
+          <a:bodyPr/>
+          <a:lstStyle/>
+          <a:p>
+            <a:endParaRPr lang="en-SG"/>
+          </a:p>
+        </p:txBody>
       </p:sp>
       <p:sp>
         <p:nvSpPr>
@@ -6787,6 +6919,13 @@
             <a:prstDash val="solid"/>
           </a:ln>
         </p:spPr>
+        <p:txBody>
+          <a:bodyPr/>
+          <a:lstStyle/>
+          <a:p>
+            <a:endParaRPr lang="en-SG"/>
+          </a:p>
+        </p:txBody>
       </p:sp>
       <p:sp>
         <p:nvSpPr>
@@ -6809,7 +6948,7 @@
           <a:bodyPr wrap="square" lIns="0" tIns="0" rIns="0" bIns="0" rtlCol="0" anchor="ctr"/>
           <a:lstStyle/>
           <a:p>
-            <a:pPr algn="ctr" indent="0" marL="0">
+            <a:pPr marL="0" indent="0" algn="ctr">
               <a:buNone/>
             </a:pPr>
             <a:r>
@@ -6848,7 +6987,7 @@
           <a:bodyPr wrap="square" lIns="0" tIns="0" rIns="0" bIns="0" rtlCol="0" anchor="ctr"/>
           <a:lstStyle/>
           <a:p>
-            <a:pPr indent="0" marL="0">
+            <a:pPr marL="0" indent="0">
               <a:buNone/>
             </a:pPr>
             <a:r>
@@ -6890,13 +7029,20 @@
             <a:prstDash val="solid"/>
           </a:ln>
           <a:effectLst>
-            <a:outerShdw sx="100000" sy="100000" kx="0" ky="0" algn="bl" rotWithShape="0" blurRad="127000" dist="38100" dir="8100000">
+            <a:outerShdw blurRad="127000" dist="38100" dir="8100000" algn="bl" rotWithShape="0">
               <a:srgbClr val="000000">
                 <a:alpha val="25000"/>
               </a:srgbClr>
             </a:outerShdw>
           </a:effectLst>
         </p:spPr>
+        <p:txBody>
+          <a:bodyPr/>
+          <a:lstStyle/>
+          <a:p>
+            <a:endParaRPr lang="en-SG"/>
+          </a:p>
+        </p:txBody>
       </p:sp>
       <p:sp>
         <p:nvSpPr>
@@ -6926,6 +7072,13 @@
             <a:prstDash val="solid"/>
           </a:ln>
         </p:spPr>
+        <p:txBody>
+          <a:bodyPr/>
+          <a:lstStyle/>
+          <a:p>
+            <a:endParaRPr lang="en-SG"/>
+          </a:p>
+        </p:txBody>
       </p:sp>
       <p:sp>
         <p:nvSpPr>
@@ -6948,7 +7101,7 @@
           <a:bodyPr wrap="square" lIns="0" tIns="0" rIns="0" bIns="0" rtlCol="0" anchor="ctr"/>
           <a:lstStyle/>
           <a:p>
-            <a:pPr algn="ctr" indent="0" marL="0">
+            <a:pPr marL="0" indent="0" algn="ctr">
               <a:buNone/>
             </a:pPr>
             <a:r>
@@ -6987,7 +7140,7 @@
           <a:bodyPr wrap="square" lIns="0" tIns="0" rIns="0" bIns="0" rtlCol="0" anchor="ctr"/>
           <a:lstStyle/>
           <a:p>
-            <a:pPr indent="0" marL="0">
+            <a:pPr marL="0" indent="0">
               <a:buNone/>
             </a:pPr>
             <a:r>
@@ -7029,6 +7182,13 @@
             <a:prstDash val="solid"/>
           </a:ln>
         </p:spPr>
+        <p:txBody>
+          <a:bodyPr/>
+          <a:lstStyle/>
+          <a:p>
+            <a:endParaRPr lang="en-SG"/>
+          </a:p>
+        </p:txBody>
       </p:sp>
       <p:sp>
         <p:nvSpPr>
@@ -7054,6 +7214,13 @@
             <a:prstDash val="solid"/>
           </a:ln>
         </p:spPr>
+        <p:txBody>
+          <a:bodyPr/>
+          <a:lstStyle/>
+          <a:p>
+            <a:endParaRPr lang="en-SG"/>
+          </a:p>
+        </p:txBody>
       </p:sp>
       <p:sp>
         <p:nvSpPr>
@@ -7076,7 +7243,7 @@
           <a:bodyPr wrap="square" lIns="0" tIns="0" rIns="0" bIns="0" rtlCol="0" anchor="ctr"/>
           <a:lstStyle/>
           <a:p>
-            <a:pPr indent="0" marL="0">
+            <a:pPr marL="0" indent="0">
               <a:buNone/>
             </a:pPr>
             <a:r>
@@ -7115,7 +7282,7 @@
           <a:bodyPr wrap="square" lIns="0" tIns="0" rIns="0" bIns="0" rtlCol="0" anchor="ctr"/>
           <a:lstStyle/>
           <a:p>
-            <a:pPr indent="0" marL="0">
+            <a:pPr marL="0" indent="0">
               <a:buNone/>
             </a:pPr>
             <a:r>
@@ -7157,6 +7324,13 @@
             <a:prstDash val="solid"/>
           </a:ln>
         </p:spPr>
+        <p:txBody>
+          <a:bodyPr/>
+          <a:lstStyle/>
+          <a:p>
+            <a:endParaRPr lang="en-SG"/>
+          </a:p>
+        </p:txBody>
       </p:sp>
       <p:sp>
         <p:nvSpPr>
@@ -7179,7 +7353,7 @@
           <a:bodyPr wrap="square" lIns="0" tIns="0" rIns="0" bIns="0" rtlCol="0" anchor="ctr"/>
           <a:lstStyle/>
           <a:p>
-            <a:pPr algn="ctr" indent="0" marL="0">
+            <a:pPr marL="0" indent="0" algn="ctr">
               <a:buNone/>
             </a:pPr>
             <a:r>
@@ -7221,6 +7395,13 @@
             <a:prstDash val="solid"/>
           </a:ln>
         </p:spPr>
+        <p:txBody>
+          <a:bodyPr/>
+          <a:lstStyle/>
+          <a:p>
+            <a:endParaRPr lang="en-SG"/>
+          </a:p>
+        </p:txBody>
       </p:sp>
       <p:sp>
         <p:nvSpPr>
@@ -7243,7 +7424,7 @@
           <a:bodyPr wrap="square" lIns="0" tIns="0" rIns="0" bIns="0" rtlCol="0" anchor="ctr"/>
           <a:lstStyle/>
           <a:p>
-            <a:pPr algn="ctr" indent="0" marL="0">
+            <a:pPr marL="0" indent="0" algn="ctr">
               <a:buNone/>
             </a:pPr>
             <a:r>
@@ -7277,6 +7458,7 @@
         <a:solidFill>
           <a:srgbClr val="080C10"/>
         </a:solidFill>
+        <a:effectLst/>
       </p:bgPr>
     </p:bg>
     <p:spTree>
@@ -7317,17 +7499,24 @@
             <a:prstDash val="solid"/>
           </a:ln>
         </p:spPr>
+        <p:txBody>
+          <a:bodyPr/>
+          <a:lstStyle/>
+          <a:p>
+            <a:endParaRPr lang="en-SG"/>
+          </a:p>
+        </p:txBody>
       </p:sp>
       <p:pic>
         <p:nvPicPr>
-          <p:cNvPr id="3" name="Image 0" descr="preencoded.png">    </p:cNvPr>
+          <p:cNvPr id="3" name="Image 0" descr="preencoded.png"/>
           <p:cNvPicPr>
             <a:picLocks noChangeAspect="1"/>
           </p:cNvPicPr>
           <p:nvPr/>
         </p:nvPicPr>
         <p:blipFill>
-          <a:blip r:embed="rId1"/>
+          <a:blip r:embed="rId3"/>
           <a:stretch>
             <a:fillRect/>
           </a:stretch>
@@ -7363,7 +7552,7 @@
           <a:bodyPr wrap="square" lIns="0" tIns="0" rIns="0" bIns="0" rtlCol="0" anchor="ctr"/>
           <a:lstStyle/>
           <a:p>
-            <a:pPr algn="l" indent="0" marL="0">
+            <a:pPr marL="0" indent="0" algn="l">
               <a:buNone/>
             </a:pPr>
             <a:r>
@@ -7405,13 +7594,20 @@
             <a:prstDash val="solid"/>
           </a:ln>
           <a:effectLst>
-            <a:outerShdw sx="100000" sy="100000" kx="0" ky="0" algn="bl" rotWithShape="0" blurRad="127000" dist="38100" dir="8100000">
+            <a:outerShdw blurRad="127000" dist="38100" dir="8100000" algn="bl" rotWithShape="0">
               <a:srgbClr val="000000">
                 <a:alpha val="25000"/>
               </a:srgbClr>
             </a:outerShdw>
           </a:effectLst>
         </p:spPr>
+        <p:txBody>
+          <a:bodyPr/>
+          <a:lstStyle/>
+          <a:p>
+            <a:endParaRPr lang="en-SG"/>
+          </a:p>
+        </p:txBody>
       </p:sp>
       <p:sp>
         <p:nvSpPr>
@@ -7437,6 +7633,13 @@
             <a:prstDash val="solid"/>
           </a:ln>
         </p:spPr>
+        <p:txBody>
+          <a:bodyPr/>
+          <a:lstStyle/>
+          <a:p>
+            <a:endParaRPr lang="en-SG"/>
+          </a:p>
+        </p:txBody>
       </p:sp>
       <p:sp>
         <p:nvSpPr>
@@ -7459,7 +7662,7 @@
           <a:bodyPr wrap="square" lIns="0" tIns="0" rIns="0" bIns="0" rtlCol="0" anchor="ctr"/>
           <a:lstStyle/>
           <a:p>
-            <a:pPr indent="0" marL="0">
+            <a:pPr marL="0" indent="0">
               <a:buNone/>
             </a:pPr>
             <a:r>
@@ -7498,7 +7701,7 @@
           <a:bodyPr wrap="square" lIns="0" tIns="0" rIns="0" bIns="0" rtlCol="0" anchor="ctr"/>
           <a:lstStyle/>
           <a:p>
-            <a:pPr indent="0" marL="0">
+            <a:pPr marL="0" indent="0">
               <a:buNone/>
             </a:pPr>
             <a:r>
@@ -7515,13 +7718,13 @@
             <a:endParaRPr lang="en-US" sz="1200" dirty="0"/>
           </a:p>
           <a:p>
-            <a:pPr indent="0" marL="0">
-              <a:buNone/>
-            </a:pPr>
-            <a:endParaRPr lang="en-US" sz="1200" dirty="0"/>
-          </a:p>
-          <a:p>
-            <a:pPr indent="0" marL="0">
+            <a:pPr marL="0" indent="0">
+              <a:buNone/>
+            </a:pPr>
+            <a:endParaRPr lang="en-US" sz="1200" dirty="0"/>
+          </a:p>
+          <a:p>
+            <a:pPr marL="0" indent="0">
               <a:buNone/>
             </a:pPr>
             <a:r>
@@ -7538,13 +7741,13 @@
             <a:endParaRPr lang="en-US" sz="1200" dirty="0"/>
           </a:p>
           <a:p>
-            <a:pPr indent="0" marL="0">
-              <a:buNone/>
-            </a:pPr>
-            <a:endParaRPr lang="en-US" sz="1200" dirty="0"/>
-          </a:p>
-          <a:p>
-            <a:pPr indent="0" marL="0">
+            <a:pPr marL="0" indent="0">
+              <a:buNone/>
+            </a:pPr>
+            <a:endParaRPr lang="en-US" sz="1200" dirty="0"/>
+          </a:p>
+          <a:p>
+            <a:pPr marL="0" indent="0">
               <a:buNone/>
             </a:pPr>
             <a:r>
@@ -7561,13 +7764,13 @@
             <a:endParaRPr lang="en-US" sz="1200" dirty="0"/>
           </a:p>
           <a:p>
-            <a:pPr indent="0" marL="0">
-              <a:buNone/>
-            </a:pPr>
-            <a:endParaRPr lang="en-US" sz="1200" dirty="0"/>
-          </a:p>
-          <a:p>
-            <a:pPr indent="0" marL="0">
+            <a:pPr marL="0" indent="0">
+              <a:buNone/>
+            </a:pPr>
+            <a:endParaRPr lang="en-US" sz="1200" dirty="0"/>
+          </a:p>
+          <a:p>
+            <a:pPr marL="0" indent="0">
               <a:buNone/>
             </a:pPr>
             <a:r>
@@ -7584,13 +7787,13 @@
             <a:endParaRPr lang="en-US" sz="1200" dirty="0"/>
           </a:p>
           <a:p>
-            <a:pPr indent="0" marL="0">
-              <a:buNone/>
-            </a:pPr>
-            <a:endParaRPr lang="en-US" sz="1200" dirty="0"/>
-          </a:p>
-          <a:p>
-            <a:pPr indent="0" marL="0">
+            <a:pPr marL="0" indent="0">
+              <a:buNone/>
+            </a:pPr>
+            <a:endParaRPr lang="en-US" sz="1200" dirty="0"/>
+          </a:p>
+          <a:p>
+            <a:pPr marL="0" indent="0">
               <a:buNone/>
             </a:pPr>
             <a:r>
@@ -7632,13 +7835,20 @@
             <a:prstDash val="solid"/>
           </a:ln>
           <a:effectLst>
-            <a:outerShdw sx="100000" sy="100000" kx="0" ky="0" algn="bl" rotWithShape="0" blurRad="127000" dist="38100" dir="8100000">
+            <a:outerShdw blurRad="127000" dist="38100" dir="8100000" algn="bl" rotWithShape="0">
               <a:srgbClr val="000000">
                 <a:alpha val="25000"/>
               </a:srgbClr>
             </a:outerShdw>
           </a:effectLst>
         </p:spPr>
+        <p:txBody>
+          <a:bodyPr/>
+          <a:lstStyle/>
+          <a:p>
+            <a:endParaRPr lang="en-SG"/>
+          </a:p>
+        </p:txBody>
       </p:sp>
       <p:sp>
         <p:nvSpPr>
@@ -7661,7 +7871,7 @@
           <a:bodyPr wrap="square" lIns="0" tIns="0" rIns="0" bIns="0" rtlCol="0" anchor="ctr"/>
           <a:lstStyle/>
           <a:p>
-            <a:pPr indent="0" marL="0">
+            <a:pPr marL="0" indent="0">
               <a:buNone/>
             </a:pPr>
             <a:r>
@@ -7700,7 +7910,7 @@
           <a:bodyPr wrap="square" lIns="0" tIns="0" rIns="0" bIns="0" rtlCol="0" anchor="ctr"/>
           <a:lstStyle/>
           <a:p>
-            <a:pPr algn="ctr" indent="0" marL="0">
+            <a:pPr marL="0" indent="0" algn="ctr">
               <a:buNone/>
             </a:pPr>
             <a:r>
@@ -7742,6 +7952,13 @@
             <a:prstDash val="solid"/>
           </a:ln>
         </p:spPr>
+        <p:txBody>
+          <a:bodyPr/>
+          <a:lstStyle/>
+          <a:p>
+            <a:endParaRPr lang="en-SG"/>
+          </a:p>
+        </p:txBody>
       </p:sp>
       <p:sp>
         <p:nvSpPr>
@@ -7764,7 +7981,7 @@
           <a:bodyPr wrap="square" lIns="0" tIns="0" rIns="0" bIns="0" rtlCol="0" anchor="ctr"/>
           <a:lstStyle/>
           <a:p>
-            <a:pPr indent="0" marL="0">
+            <a:pPr marL="0" indent="0">
               <a:buNone/>
             </a:pPr>
             <a:r>
@@ -7803,7 +8020,7 @@
           <a:bodyPr wrap="square" lIns="0" tIns="0" rIns="0" bIns="0" rtlCol="0" anchor="ctr"/>
           <a:lstStyle/>
           <a:p>
-            <a:pPr algn="ctr" indent="0" marL="0">
+            <a:pPr marL="0" indent="0" algn="ctr">
               <a:buNone/>
             </a:pPr>
             <a:r>
@@ -7845,6 +8062,13 @@
             <a:prstDash val="solid"/>
           </a:ln>
         </p:spPr>
+        <p:txBody>
+          <a:bodyPr/>
+          <a:lstStyle/>
+          <a:p>
+            <a:endParaRPr lang="en-SG"/>
+          </a:p>
+        </p:txBody>
       </p:sp>
       <p:sp>
         <p:nvSpPr>
@@ -7867,7 +8091,7 @@
           <a:bodyPr wrap="square" lIns="0" tIns="0" rIns="0" bIns="0" rtlCol="0" anchor="ctr"/>
           <a:lstStyle/>
           <a:p>
-            <a:pPr indent="0" marL="0">
+            <a:pPr marL="0" indent="0">
               <a:buNone/>
             </a:pPr>
             <a:r>
@@ -7906,7 +8130,7 @@
           <a:bodyPr wrap="square" lIns="0" tIns="0" rIns="0" bIns="0" rtlCol="0" anchor="ctr"/>
           <a:lstStyle/>
           <a:p>
-            <a:pPr indent="0" marL="0">
+            <a:pPr marL="0" indent="0">
               <a:buNone/>
             </a:pPr>
             <a:r>
@@ -7923,7 +8147,7 @@
             <a:endParaRPr lang="en-US" sz="1150" dirty="0"/>
           </a:p>
           <a:p>
-            <a:pPr indent="0" marL="0">
+            <a:pPr marL="0" indent="0">
               <a:buNone/>
             </a:pPr>
             <a:r>
@@ -7940,7 +8164,7 @@
             <a:endParaRPr lang="en-US" sz="1150" dirty="0"/>
           </a:p>
           <a:p>
-            <a:pPr indent="0" marL="0">
+            <a:pPr marL="0" indent="0">
               <a:buNone/>
             </a:pPr>
             <a:r>
@@ -7957,7 +8181,7 @@
             <a:endParaRPr lang="en-US" sz="1150" dirty="0"/>
           </a:p>
           <a:p>
-            <a:pPr indent="0" marL="0">
+            <a:pPr marL="0" indent="0">
               <a:buNone/>
             </a:pPr>
             <a:r>
@@ -7974,7 +8198,7 @@
             <a:endParaRPr lang="en-US" sz="1150" dirty="0"/>
           </a:p>
           <a:p>
-            <a:pPr indent="0" marL="0">
+            <a:pPr marL="0" indent="0">
               <a:buNone/>
             </a:pPr>
             <a:r>
@@ -7991,7 +8215,7 @@
             <a:endParaRPr lang="en-US" sz="1150" dirty="0"/>
           </a:p>
           <a:p>
-            <a:pPr indent="0" marL="0">
+            <a:pPr marL="0" indent="0">
               <a:buNone/>
             </a:pPr>
             <a:r>
@@ -8033,6 +8257,13 @@
             <a:prstDash val="solid"/>
           </a:ln>
         </p:spPr>
+        <p:txBody>
+          <a:bodyPr/>
+          <a:lstStyle/>
+          <a:p>
+            <a:endParaRPr lang="en-SG"/>
+          </a:p>
+        </p:txBody>
       </p:sp>
       <p:sp>
         <p:nvSpPr>
@@ -8058,6 +8289,13 @@
             <a:prstDash val="solid"/>
           </a:ln>
         </p:spPr>
+        <p:txBody>
+          <a:bodyPr/>
+          <a:lstStyle/>
+          <a:p>
+            <a:endParaRPr lang="en-SG"/>
+          </a:p>
+        </p:txBody>
       </p:sp>
       <p:sp>
         <p:nvSpPr>
@@ -8080,7 +8318,7 @@
           <a:bodyPr wrap="square" lIns="0" tIns="0" rIns="0" bIns="0" rtlCol="0" anchor="ctr"/>
           <a:lstStyle/>
           <a:p>
-            <a:pPr indent="0" marL="0">
+            <a:pPr marL="0" indent="0">
               <a:buNone/>
             </a:pPr>
             <a:r>
@@ -8119,7 +8357,7 @@
           <a:bodyPr wrap="square" lIns="0" tIns="0" rIns="0" bIns="0" rtlCol="0" anchor="ctr"/>
           <a:lstStyle/>
           <a:p>
-            <a:pPr indent="0" marL="0">
+            <a:pPr marL="0" indent="0">
               <a:buNone/>
             </a:pPr>
             <a:r>
@@ -8161,6 +8399,13 @@
             <a:prstDash val="solid"/>
           </a:ln>
         </p:spPr>
+        <p:txBody>
+          <a:bodyPr/>
+          <a:lstStyle/>
+          <a:p>
+            <a:endParaRPr lang="en-SG"/>
+          </a:p>
+        </p:txBody>
       </p:sp>
       <p:sp>
         <p:nvSpPr>
@@ -8183,7 +8428,7 @@
           <a:bodyPr wrap="square" lIns="0" tIns="0" rIns="0" bIns="0" rtlCol="0" anchor="ctr"/>
           <a:lstStyle/>
           <a:p>
-            <a:pPr algn="ctr" indent="0" marL="0">
+            <a:pPr marL="0" indent="0" algn="ctr">
               <a:buNone/>
             </a:pPr>
             <a:r>
@@ -8225,6 +8470,13 @@
             <a:prstDash val="solid"/>
           </a:ln>
         </p:spPr>
+        <p:txBody>
+          <a:bodyPr/>
+          <a:lstStyle/>
+          <a:p>
+            <a:endParaRPr lang="en-SG"/>
+          </a:p>
+        </p:txBody>
       </p:sp>
       <p:sp>
         <p:nvSpPr>
@@ -8247,7 +8499,7 @@
           <a:bodyPr wrap="square" lIns="0" tIns="0" rIns="0" bIns="0" rtlCol="0" anchor="ctr"/>
           <a:lstStyle/>
           <a:p>
-            <a:pPr algn="ctr" indent="0" marL="0">
+            <a:pPr marL="0" indent="0" algn="ctr">
               <a:buNone/>
             </a:pPr>
             <a:r>
@@ -8281,6 +8533,7 @@
         <a:solidFill>
           <a:srgbClr val="080C10"/>
         </a:solidFill>
+        <a:effectLst/>
       </p:bgPr>
     </p:bg>
     <p:spTree>
@@ -8321,17 +8574,24 @@
             <a:prstDash val="solid"/>
           </a:ln>
         </p:spPr>
+        <p:txBody>
+          <a:bodyPr/>
+          <a:lstStyle/>
+          <a:p>
+            <a:endParaRPr lang="en-SG"/>
+          </a:p>
+        </p:txBody>
       </p:sp>
       <p:pic>
         <p:nvPicPr>
-          <p:cNvPr id="3" name="Image 0" descr="preencoded.png">    </p:cNvPr>
+          <p:cNvPr id="3" name="Image 0" descr="preencoded.png"/>
           <p:cNvPicPr>
             <a:picLocks noChangeAspect="1"/>
           </p:cNvPicPr>
           <p:nvPr/>
         </p:nvPicPr>
         <p:blipFill>
-          <a:blip r:embed="rId1"/>
+          <a:blip r:embed="rId3"/>
           <a:stretch>
             <a:fillRect/>
           </a:stretch>
@@ -8367,7 +8627,7 @@
           <a:bodyPr wrap="square" lIns="0" tIns="0" rIns="0" bIns="0" rtlCol="0" anchor="ctr"/>
           <a:lstStyle/>
           <a:p>
-            <a:pPr algn="l" indent="0" marL="0">
+            <a:pPr marL="0" indent="0" algn="l">
               <a:buNone/>
             </a:pPr>
             <a:r>
@@ -8409,13 +8669,20 @@
             <a:prstDash val="solid"/>
           </a:ln>
           <a:effectLst>
-            <a:outerShdw sx="100000" sy="100000" kx="0" ky="0" algn="bl" rotWithShape="0" blurRad="127000" dist="38100" dir="8100000">
+            <a:outerShdw blurRad="127000" dist="38100" dir="8100000" algn="bl" rotWithShape="0">
               <a:srgbClr val="000000">
                 <a:alpha val="25000"/>
               </a:srgbClr>
             </a:outerShdw>
           </a:effectLst>
         </p:spPr>
+        <p:txBody>
+          <a:bodyPr/>
+          <a:lstStyle/>
+          <a:p>
+            <a:endParaRPr lang="en-SG"/>
+          </a:p>
+        </p:txBody>
       </p:sp>
       <p:sp>
         <p:nvSpPr>
@@ -8441,6 +8708,13 @@
             <a:prstDash val="solid"/>
           </a:ln>
         </p:spPr>
+        <p:txBody>
+          <a:bodyPr/>
+          <a:lstStyle/>
+          <a:p>
+            <a:endParaRPr lang="en-SG"/>
+          </a:p>
+        </p:txBody>
       </p:sp>
       <p:sp>
         <p:nvSpPr>
@@ -8463,7 +8737,7 @@
           <a:bodyPr wrap="square" lIns="0" tIns="0" rIns="0" bIns="0" rtlCol="0" anchor="ctr"/>
           <a:lstStyle/>
           <a:p>
-            <a:pPr indent="0" marL="0">
+            <a:pPr marL="0" indent="0">
               <a:buNone/>
             </a:pPr>
             <a:r>
@@ -8502,7 +8776,7 @@
           <a:bodyPr wrap="square" lIns="0" tIns="0" rIns="0" bIns="0" rtlCol="0" anchor="ctr"/>
           <a:lstStyle/>
           <a:p>
-            <a:pPr indent="0" marL="0">
+            <a:pPr marL="0" indent="0">
               <a:buNone/>
             </a:pPr>
             <a:r>
@@ -8541,7 +8815,7 @@
           <a:bodyPr wrap="square" lIns="0" tIns="0" rIns="0" bIns="0" rtlCol="0" anchor="ctr"/>
           <a:lstStyle/>
           <a:p>
-            <a:pPr indent="0" marL="0">
+            <a:pPr marL="0" indent="0">
               <a:buNone/>
             </a:pPr>
             <a:r>
@@ -8580,7 +8854,7 @@
           <a:bodyPr wrap="square" lIns="0" tIns="0" rIns="0" bIns="0" rtlCol="0" anchor="ctr"/>
           <a:lstStyle/>
           <a:p>
-            <a:pPr indent="0" marL="0">
+            <a:pPr marL="0" indent="0">
               <a:buNone/>
             </a:pPr>
             <a:r>
@@ -8619,7 +8893,7 @@
           <a:bodyPr wrap="square" lIns="0" tIns="0" rIns="0" bIns="0" rtlCol="0" anchor="ctr"/>
           <a:lstStyle/>
           <a:p>
-            <a:pPr indent="0" marL="0">
+            <a:pPr marL="0" indent="0">
               <a:buNone/>
             </a:pPr>
             <a:r>
@@ -8658,7 +8932,7 @@
           <a:bodyPr wrap="square" lIns="0" tIns="0" rIns="0" bIns="0" rtlCol="0" anchor="ctr"/>
           <a:lstStyle/>
           <a:p>
-            <a:pPr indent="0" marL="0">
+            <a:pPr marL="0" indent="0">
               <a:buNone/>
             </a:pPr>
             <a:r>
@@ -8700,13 +8974,20 @@
             <a:prstDash val="solid"/>
           </a:ln>
           <a:effectLst>
-            <a:outerShdw sx="100000" sy="100000" kx="0" ky="0" algn="bl" rotWithShape="0" blurRad="127000" dist="38100" dir="8100000">
+            <a:outerShdw blurRad="127000" dist="38100" dir="8100000" algn="bl" rotWithShape="0">
               <a:srgbClr val="000000">
                 <a:alpha val="25000"/>
               </a:srgbClr>
             </a:outerShdw>
           </a:effectLst>
         </p:spPr>
+        <p:txBody>
+          <a:bodyPr/>
+          <a:lstStyle/>
+          <a:p>
+            <a:endParaRPr lang="en-SG"/>
+          </a:p>
+        </p:txBody>
       </p:sp>
       <p:sp>
         <p:nvSpPr>
@@ -8729,7 +9010,7 @@
           <a:bodyPr wrap="square" lIns="0" tIns="0" rIns="0" bIns="0" rtlCol="0" anchor="ctr"/>
           <a:lstStyle/>
           <a:p>
-            <a:pPr indent="0" marL="0">
+            <a:pPr marL="0" indent="0">
               <a:buNone/>
             </a:pPr>
             <a:r>
@@ -8768,7 +9049,7 @@
           <a:bodyPr wrap="square" lIns="0" tIns="0" rIns="0" bIns="0" rtlCol="0" anchor="ctr"/>
           <a:lstStyle/>
           <a:p>
-            <a:pPr indent="0" marL="0">
+            <a:pPr marL="0" indent="0">
               <a:buNone/>
             </a:pPr>
             <a:r>
@@ -8785,13 +9066,13 @@
             <a:endParaRPr lang="en-US" sz="1150" dirty="0"/>
           </a:p>
           <a:p>
-            <a:pPr indent="0" marL="0">
+            <a:pPr marL="0" indent="0">
               <a:buNone/>
             </a:pPr>
             <a:endParaRPr lang="en-US" sz="1150" dirty="0"/>
           </a:p>
           <a:p>
-            <a:pPr indent="0" marL="0">
+            <a:pPr marL="0" indent="0">
               <a:buNone/>
             </a:pPr>
             <a:r>
@@ -8833,13 +9114,20 @@
             <a:prstDash val="solid"/>
           </a:ln>
           <a:effectLst>
-            <a:outerShdw sx="100000" sy="100000" kx="0" ky="0" algn="bl" rotWithShape="0" blurRad="127000" dist="38100" dir="8100000">
+            <a:outerShdw blurRad="127000" dist="38100" dir="8100000" algn="bl" rotWithShape="0">
               <a:srgbClr val="000000">
                 <a:alpha val="25000"/>
               </a:srgbClr>
             </a:outerShdw>
           </a:effectLst>
         </p:spPr>
+        <p:txBody>
+          <a:bodyPr/>
+          <a:lstStyle/>
+          <a:p>
+            <a:endParaRPr lang="en-SG"/>
+          </a:p>
+        </p:txBody>
       </p:sp>
       <p:sp>
         <p:nvSpPr>
@@ -8865,6 +9153,13 @@
             <a:prstDash val="solid"/>
           </a:ln>
         </p:spPr>
+        <p:txBody>
+          <a:bodyPr/>
+          <a:lstStyle/>
+          <a:p>
+            <a:endParaRPr lang="en-SG"/>
+          </a:p>
+        </p:txBody>
       </p:sp>
       <p:sp>
         <p:nvSpPr>
@@ -8887,7 +9182,7 @@
           <a:bodyPr wrap="square" lIns="0" tIns="0" rIns="0" bIns="0" rtlCol="0" anchor="ctr"/>
           <a:lstStyle/>
           <a:p>
-            <a:pPr indent="0" marL="0">
+            <a:pPr marL="0" indent="0">
               <a:buNone/>
             </a:pPr>
             <a:r>
@@ -8926,7 +9221,7 @@
           <a:bodyPr wrap="square" lIns="0" tIns="0" rIns="0" bIns="0" rtlCol="0" anchor="ctr"/>
           <a:lstStyle/>
           <a:p>
-            <a:pPr indent="0" marL="0">
+            <a:pPr marL="0" indent="0">
               <a:buNone/>
             </a:pPr>
             <a:r>
@@ -8968,6 +9263,13 @@
             <a:prstDash val="solid"/>
           </a:ln>
         </p:spPr>
+        <p:txBody>
+          <a:bodyPr/>
+          <a:lstStyle/>
+          <a:p>
+            <a:endParaRPr lang="en-SG"/>
+          </a:p>
+        </p:txBody>
       </p:sp>
       <p:sp>
         <p:nvSpPr>
@@ -8990,7 +9292,7 @@
           <a:bodyPr wrap="square" lIns="0" tIns="0" rIns="0" bIns="0" rtlCol="0" anchor="ctr"/>
           <a:lstStyle/>
           <a:p>
-            <a:pPr algn="ctr" indent="0" marL="0">
+            <a:pPr marL="0" indent="0" algn="ctr">
               <a:buNone/>
             </a:pPr>
             <a:r>
@@ -9032,6 +9334,13 @@
             <a:prstDash val="solid"/>
           </a:ln>
         </p:spPr>
+        <p:txBody>
+          <a:bodyPr/>
+          <a:lstStyle/>
+          <a:p>
+            <a:endParaRPr lang="en-SG"/>
+          </a:p>
+        </p:txBody>
       </p:sp>
       <p:sp>
         <p:nvSpPr>
@@ -9057,6 +9366,13 @@
             <a:prstDash val="solid"/>
           </a:ln>
         </p:spPr>
+        <p:txBody>
+          <a:bodyPr/>
+          <a:lstStyle/>
+          <a:p>
+            <a:endParaRPr lang="en-SG"/>
+          </a:p>
+        </p:txBody>
       </p:sp>
       <p:sp>
         <p:nvSpPr>
@@ -9079,7 +9395,7 @@
           <a:bodyPr wrap="square" lIns="0" tIns="0" rIns="0" bIns="0" rtlCol="0" anchor="ctr"/>
           <a:lstStyle/>
           <a:p>
-            <a:pPr indent="0" marL="0">
+            <a:pPr marL="0" indent="0">
               <a:buNone/>
             </a:pPr>
             <a:r>
@@ -9118,7 +9434,7 @@
           <a:bodyPr wrap="square" lIns="0" tIns="0" rIns="0" bIns="0" rtlCol="0" anchor="ctr"/>
           <a:lstStyle/>
           <a:p>
-            <a:pPr indent="0" marL="0">
+            <a:pPr marL="0" indent="0">
               <a:buNone/>
             </a:pPr>
             <a:r>
@@ -9160,6 +9476,13 @@
             <a:prstDash val="solid"/>
           </a:ln>
         </p:spPr>
+        <p:txBody>
+          <a:bodyPr/>
+          <a:lstStyle/>
+          <a:p>
+            <a:endParaRPr lang="en-SG"/>
+          </a:p>
+        </p:txBody>
       </p:sp>
       <p:sp>
         <p:nvSpPr>
@@ -9182,7 +9505,7 @@
           <a:bodyPr wrap="square" lIns="0" tIns="0" rIns="0" bIns="0" rtlCol="0" anchor="ctr"/>
           <a:lstStyle/>
           <a:p>
-            <a:pPr algn="ctr" indent="0" marL="0">
+            <a:pPr marL="0" indent="0" algn="ctr">
               <a:buNone/>
             </a:pPr>
             <a:r>
@@ -9224,6 +9547,13 @@
             <a:prstDash val="solid"/>
           </a:ln>
         </p:spPr>
+        <p:txBody>
+          <a:bodyPr/>
+          <a:lstStyle/>
+          <a:p>
+            <a:endParaRPr lang="en-SG"/>
+          </a:p>
+        </p:txBody>
       </p:sp>
       <p:sp>
         <p:nvSpPr>
@@ -9246,7 +9576,7 @@
           <a:bodyPr wrap="square" lIns="0" tIns="0" rIns="0" bIns="0" rtlCol="0" anchor="ctr"/>
           <a:lstStyle/>
           <a:p>
-            <a:pPr algn="ctr" indent="0" marL="0">
+            <a:pPr marL="0" indent="0" algn="ctr">
               <a:buNone/>
             </a:pPr>
             <a:r>
@@ -9280,6 +9610,7 @@
         <a:solidFill>
           <a:srgbClr val="080C10"/>
         </a:solidFill>
+        <a:effectLst/>
       </p:bgPr>
     </p:bg>
     <p:spTree>
@@ -9320,17 +9651,24 @@
             <a:prstDash val="solid"/>
           </a:ln>
         </p:spPr>
+        <p:txBody>
+          <a:bodyPr/>
+          <a:lstStyle/>
+          <a:p>
+            <a:endParaRPr lang="en-SG"/>
+          </a:p>
+        </p:txBody>
       </p:sp>
       <p:pic>
         <p:nvPicPr>
-          <p:cNvPr id="3" name="Image 0" descr="preencoded.png">    </p:cNvPr>
+          <p:cNvPr id="3" name="Image 0" descr="preencoded.png"/>
           <p:cNvPicPr>
             <a:picLocks noChangeAspect="1"/>
           </p:cNvPicPr>
           <p:nvPr/>
         </p:nvPicPr>
         <p:blipFill>
-          <a:blip r:embed="rId1"/>
+          <a:blip r:embed="rId3"/>
           <a:stretch>
             <a:fillRect/>
           </a:stretch>
@@ -9366,7 +9704,7 @@
           <a:bodyPr wrap="square" lIns="0" tIns="0" rIns="0" bIns="0" rtlCol="0" anchor="ctr"/>
           <a:lstStyle/>
           <a:p>
-            <a:pPr algn="l" indent="0" marL="0">
+            <a:pPr marL="0" indent="0" algn="l">
               <a:buNone/>
             </a:pPr>
             <a:r>
@@ -9408,13 +9746,20 @@
             <a:prstDash val="solid"/>
           </a:ln>
           <a:effectLst>
-            <a:outerShdw sx="100000" sy="100000" kx="0" ky="0" algn="bl" rotWithShape="0" blurRad="127000" dist="38100" dir="8100000">
+            <a:outerShdw blurRad="127000" dist="38100" dir="8100000" algn="bl" rotWithShape="0">
               <a:srgbClr val="000000">
                 <a:alpha val="25000"/>
               </a:srgbClr>
             </a:outerShdw>
           </a:effectLst>
         </p:spPr>
+        <p:txBody>
+          <a:bodyPr/>
+          <a:lstStyle/>
+          <a:p>
+            <a:endParaRPr lang="en-SG"/>
+          </a:p>
+        </p:txBody>
       </p:sp>
       <p:sp>
         <p:nvSpPr>
@@ -9440,6 +9785,13 @@
             <a:prstDash val="solid"/>
           </a:ln>
         </p:spPr>
+        <p:txBody>
+          <a:bodyPr/>
+          <a:lstStyle/>
+          <a:p>
+            <a:endParaRPr lang="en-SG"/>
+          </a:p>
+        </p:txBody>
       </p:sp>
       <p:sp>
         <p:nvSpPr>
@@ -9462,7 +9814,7 @@
           <a:bodyPr wrap="square" lIns="0" tIns="0" rIns="0" bIns="0" rtlCol="0" anchor="ctr"/>
           <a:lstStyle/>
           <a:p>
-            <a:pPr indent="0" marL="0">
+            <a:pPr marL="0" indent="0">
               <a:buNone/>
             </a:pPr>
             <a:r>
@@ -9501,7 +9853,7 @@
           <a:bodyPr wrap="square" lIns="0" tIns="0" rIns="0" bIns="0" rtlCol="0" anchor="ctr"/>
           <a:lstStyle/>
           <a:p>
-            <a:pPr indent="0" marL="0">
+            <a:pPr marL="0" indent="0">
               <a:buNone/>
             </a:pPr>
             <a:r>
@@ -9518,13 +9870,13 @@
             <a:endParaRPr lang="en-US" sz="1200" dirty="0"/>
           </a:p>
           <a:p>
-            <a:pPr indent="0" marL="0">
-              <a:buNone/>
-            </a:pPr>
-            <a:endParaRPr lang="en-US" sz="1200" dirty="0"/>
-          </a:p>
-          <a:p>
-            <a:pPr indent="0" marL="0">
+            <a:pPr marL="0" indent="0">
+              <a:buNone/>
+            </a:pPr>
+            <a:endParaRPr lang="en-US" sz="1200" dirty="0"/>
+          </a:p>
+          <a:p>
+            <a:pPr marL="0" indent="0">
               <a:buNone/>
             </a:pPr>
             <a:r>
@@ -9541,7 +9893,7 @@
             <a:endParaRPr lang="en-US" sz="1200" dirty="0"/>
           </a:p>
           <a:p>
-            <a:pPr indent="0" marL="0">
+            <a:pPr marL="0" indent="0">
               <a:buNone/>
             </a:pPr>
             <a:r>
@@ -9558,7 +9910,7 @@
             <a:endParaRPr lang="en-US" sz="1200" dirty="0"/>
           </a:p>
           <a:p>
-            <a:pPr indent="0" marL="0">
+            <a:pPr marL="0" indent="0">
               <a:buNone/>
             </a:pPr>
             <a:r>
@@ -9575,7 +9927,7 @@
             <a:endParaRPr lang="en-US" sz="1200" dirty="0"/>
           </a:p>
           <a:p>
-            <a:pPr indent="0" marL="0">
+            <a:pPr marL="0" indent="0">
               <a:buNone/>
             </a:pPr>
             <a:r>
@@ -9592,7 +9944,7 @@
             <a:endParaRPr lang="en-US" sz="1200" dirty="0"/>
           </a:p>
           <a:p>
-            <a:pPr indent="0" marL="0">
+            <a:pPr marL="0" indent="0">
               <a:buNone/>
             </a:pPr>
             <a:r>
@@ -9609,13 +9961,13 @@
             <a:endParaRPr lang="en-US" sz="1200" dirty="0"/>
           </a:p>
           <a:p>
-            <a:pPr indent="0" marL="0">
-              <a:buNone/>
-            </a:pPr>
-            <a:endParaRPr lang="en-US" sz="1200" dirty="0"/>
-          </a:p>
-          <a:p>
-            <a:pPr indent="0" marL="0">
+            <a:pPr marL="0" indent="0">
+              <a:buNone/>
+            </a:pPr>
+            <a:endParaRPr lang="en-US" sz="1200" dirty="0"/>
+          </a:p>
+          <a:p>
+            <a:pPr marL="0" indent="0">
               <a:buNone/>
             </a:pPr>
             <a:r>
@@ -9632,7 +9984,7 @@
             <a:endParaRPr lang="en-US" sz="1200" dirty="0"/>
           </a:p>
           <a:p>
-            <a:pPr indent="0" marL="0">
+            <a:pPr marL="0" indent="0">
               <a:buNone/>
             </a:pPr>
             <a:r>
@@ -9674,13 +10026,20 @@
             <a:prstDash val="solid"/>
           </a:ln>
           <a:effectLst>
-            <a:outerShdw sx="100000" sy="100000" kx="0" ky="0" algn="bl" rotWithShape="0" blurRad="127000" dist="38100" dir="8100000">
+            <a:outerShdw blurRad="127000" dist="38100" dir="8100000" algn="bl" rotWithShape="0">
               <a:srgbClr val="000000">
                 <a:alpha val="25000"/>
               </a:srgbClr>
             </a:outerShdw>
           </a:effectLst>
         </p:spPr>
+        <p:txBody>
+          <a:bodyPr/>
+          <a:lstStyle/>
+          <a:p>
+            <a:endParaRPr lang="en-SG"/>
+          </a:p>
+        </p:txBody>
       </p:sp>
       <p:sp>
         <p:nvSpPr>
@@ -9706,6 +10065,13 @@
             <a:prstDash val="solid"/>
           </a:ln>
         </p:spPr>
+        <p:txBody>
+          <a:bodyPr/>
+          <a:lstStyle/>
+          <a:p>
+            <a:endParaRPr lang="en-SG"/>
+          </a:p>
+        </p:txBody>
       </p:sp>
       <p:sp>
         <p:nvSpPr>
@@ -9731,6 +10097,13 @@
             <a:prstDash val="solid"/>
           </a:ln>
         </p:spPr>
+        <p:txBody>
+          <a:bodyPr/>
+          <a:lstStyle/>
+          <a:p>
+            <a:endParaRPr lang="en-SG"/>
+          </a:p>
+        </p:txBody>
       </p:sp>
       <p:sp>
         <p:nvSpPr>
@@ -9756,6 +10129,13 @@
             <a:prstDash val="solid"/>
           </a:ln>
         </p:spPr>
+        <p:txBody>
+          <a:bodyPr/>
+          <a:lstStyle/>
+          <a:p>
+            <a:endParaRPr lang="en-SG"/>
+          </a:p>
+        </p:txBody>
       </p:sp>
       <p:sp>
         <p:nvSpPr>
@@ -9781,6 +10161,13 @@
             <a:prstDash val="solid"/>
           </a:ln>
         </p:spPr>
+        <p:txBody>
+          <a:bodyPr/>
+          <a:lstStyle/>
+          <a:p>
+            <a:endParaRPr lang="en-SG"/>
+          </a:p>
+        </p:txBody>
       </p:sp>
       <p:sp>
         <p:nvSpPr>
@@ -9803,7 +10190,7 @@
           <a:bodyPr wrap="square" lIns="0" tIns="0" rIns="0" bIns="0" rtlCol="0" anchor="ctr"/>
           <a:lstStyle/>
           <a:p>
-            <a:pPr algn="ctr" indent="0" marL="0">
+            <a:pPr marL="0" indent="0" algn="ctr">
               <a:buNone/>
             </a:pPr>
             <a:r>
@@ -9842,7 +10229,7 @@
           <a:bodyPr wrap="square" lIns="0" tIns="0" rIns="0" bIns="0" rtlCol="0" anchor="ctr"/>
           <a:lstStyle/>
           <a:p>
-            <a:pPr indent="0" marL="0">
+            <a:pPr marL="0" indent="0">
               <a:buNone/>
             </a:pPr>
             <a:r>
@@ -9859,7 +10246,7 @@
             <a:endParaRPr lang="en-US" sz="1200" dirty="0"/>
           </a:p>
           <a:p>
-            <a:pPr indent="0" marL="0">
+            <a:pPr marL="0" indent="0">
               <a:buNone/>
             </a:pPr>
             <a:r>
@@ -9876,7 +10263,7 @@
             <a:endParaRPr lang="en-US" sz="1200" dirty="0"/>
           </a:p>
           <a:p>
-            <a:pPr indent="0" marL="0">
+            <a:pPr marL="0" indent="0">
               <a:buNone/>
             </a:pPr>
             <a:r>
@@ -9893,7 +10280,7 @@
             <a:endParaRPr lang="en-US" sz="1200" dirty="0"/>
           </a:p>
           <a:p>
-            <a:pPr indent="0" marL="0">
+            <a:pPr marL="0" indent="0">
               <a:buNone/>
             </a:pPr>
             <a:r>
@@ -9910,13 +10297,13 @@
             <a:endParaRPr lang="en-US" sz="1200" dirty="0"/>
           </a:p>
           <a:p>
-            <a:pPr indent="0" marL="0">
-              <a:buNone/>
-            </a:pPr>
-            <a:endParaRPr lang="en-US" sz="1200" dirty="0"/>
-          </a:p>
-          <a:p>
-            <a:pPr indent="0" marL="0">
+            <a:pPr marL="0" indent="0">
+              <a:buNone/>
+            </a:pPr>
+            <a:endParaRPr lang="en-US" sz="1200" dirty="0"/>
+          </a:p>
+          <a:p>
+            <a:pPr marL="0" indent="0">
               <a:buNone/>
             </a:pPr>
             <a:r>
@@ -9933,7 +10320,7 @@
             <a:endParaRPr lang="en-US" sz="1200" dirty="0"/>
           </a:p>
           <a:p>
-            <a:pPr indent="0" marL="0">
+            <a:pPr marL="0" indent="0">
               <a:buNone/>
             </a:pPr>
             <a:r>
@@ -9950,7 +10337,7 @@
             <a:endParaRPr lang="en-US" sz="1200" dirty="0"/>
           </a:p>
           <a:p>
-            <a:pPr indent="0" marL="0">
+            <a:pPr marL="0" indent="0">
               <a:buNone/>
             </a:pPr>
             <a:r>
@@ -9967,7 +10354,7 @@
             <a:endParaRPr lang="en-US" sz="1200" dirty="0"/>
           </a:p>
           <a:p>
-            <a:pPr indent="0" marL="0">
+            <a:pPr marL="0" indent="0">
               <a:buNone/>
             </a:pPr>
             <a:r>
@@ -9984,13 +10371,13 @@
             <a:endParaRPr lang="en-US" sz="1200" dirty="0"/>
           </a:p>
           <a:p>
-            <a:pPr indent="0" marL="0">
-              <a:buNone/>
-            </a:pPr>
-            <a:endParaRPr lang="en-US" sz="1200" dirty="0"/>
-          </a:p>
-          <a:p>
-            <a:pPr indent="0" marL="0">
+            <a:pPr marL="0" indent="0">
+              <a:buNone/>
+            </a:pPr>
+            <a:endParaRPr lang="en-US" sz="1200" dirty="0"/>
+          </a:p>
+          <a:p>
+            <a:pPr marL="0" indent="0">
               <a:buNone/>
             </a:pPr>
             <a:r>
@@ -10007,7 +10394,7 @@
             <a:endParaRPr lang="en-US" sz="1200" dirty="0"/>
           </a:p>
           <a:p>
-            <a:pPr indent="0" marL="0">
+            <a:pPr marL="0" indent="0">
               <a:buNone/>
             </a:pPr>
             <a:r>
@@ -10049,6 +10436,13 @@
             <a:prstDash val="solid"/>
           </a:ln>
         </p:spPr>
+        <p:txBody>
+          <a:bodyPr/>
+          <a:lstStyle/>
+          <a:p>
+            <a:endParaRPr lang="en-SG"/>
+          </a:p>
+        </p:txBody>
       </p:sp>
       <p:sp>
         <p:nvSpPr>
@@ -10074,6 +10468,13 @@
             <a:prstDash val="solid"/>
           </a:ln>
         </p:spPr>
+        <p:txBody>
+          <a:bodyPr/>
+          <a:lstStyle/>
+          <a:p>
+            <a:endParaRPr lang="en-SG"/>
+          </a:p>
+        </p:txBody>
       </p:sp>
       <p:sp>
         <p:nvSpPr>
@@ -10096,7 +10497,7 @@
           <a:bodyPr wrap="square" lIns="0" tIns="0" rIns="0" bIns="0" rtlCol="0" anchor="ctr"/>
           <a:lstStyle/>
           <a:p>
-            <a:pPr indent="0" marL="0">
+            <a:pPr marL="0" indent="0">
               <a:buNone/>
             </a:pPr>
             <a:r>
@@ -10135,7 +10536,7 @@
           <a:bodyPr wrap="square" lIns="0" tIns="0" rIns="0" bIns="0" rtlCol="0" anchor="ctr"/>
           <a:lstStyle/>
           <a:p>
-            <a:pPr indent="0" marL="0">
+            <a:pPr marL="0" indent="0">
               <a:buNone/>
             </a:pPr>
             <a:r>
@@ -10177,6 +10578,13 @@
             <a:prstDash val="solid"/>
           </a:ln>
         </p:spPr>
+        <p:txBody>
+          <a:bodyPr/>
+          <a:lstStyle/>
+          <a:p>
+            <a:endParaRPr lang="en-SG"/>
+          </a:p>
+        </p:txBody>
       </p:sp>
       <p:sp>
         <p:nvSpPr>
@@ -10199,7 +10607,7 @@
           <a:bodyPr wrap="square" lIns="0" tIns="0" rIns="0" bIns="0" rtlCol="0" anchor="ctr"/>
           <a:lstStyle/>
           <a:p>
-            <a:pPr algn="ctr" indent="0" marL="0">
+            <a:pPr marL="0" indent="0" algn="ctr">
               <a:buNone/>
             </a:pPr>
             <a:r>
@@ -10241,6 +10649,13 @@
             <a:prstDash val="solid"/>
           </a:ln>
         </p:spPr>
+        <p:txBody>
+          <a:bodyPr/>
+          <a:lstStyle/>
+          <a:p>
+            <a:endParaRPr lang="en-SG"/>
+          </a:p>
+        </p:txBody>
       </p:sp>
       <p:sp>
         <p:nvSpPr>
@@ -10263,7 +10678,7 @@
           <a:bodyPr wrap="square" lIns="0" tIns="0" rIns="0" bIns="0" rtlCol="0" anchor="ctr"/>
           <a:lstStyle/>
           <a:p>
-            <a:pPr algn="ctr" indent="0" marL="0">
+            <a:pPr marL="0" indent="0" algn="ctr">
               <a:buNone/>
             </a:pPr>
             <a:r>
@@ -10297,6 +10712,7 @@
         <a:solidFill>
           <a:srgbClr val="080C10"/>
         </a:solidFill>
+        <a:effectLst/>
       </p:bgPr>
     </p:bg>
     <p:spTree>
@@ -10337,17 +10753,24 @@
             <a:prstDash val="solid"/>
           </a:ln>
         </p:spPr>
+        <p:txBody>
+          <a:bodyPr/>
+          <a:lstStyle/>
+          <a:p>
+            <a:endParaRPr lang="en-SG"/>
+          </a:p>
+        </p:txBody>
       </p:sp>
       <p:pic>
         <p:nvPicPr>
-          <p:cNvPr id="3" name="Image 0" descr="preencoded.png">    </p:cNvPr>
+          <p:cNvPr id="3" name="Image 0" descr="preencoded.png"/>
           <p:cNvPicPr>
             <a:picLocks noChangeAspect="1"/>
           </p:cNvPicPr>
           <p:nvPr/>
         </p:nvPicPr>
         <p:blipFill>
-          <a:blip r:embed="rId1"/>
+          <a:blip r:embed="rId3"/>
           <a:stretch>
             <a:fillRect/>
           </a:stretch>
@@ -10383,7 +10806,7 @@
           <a:bodyPr wrap="square" lIns="0" tIns="0" rIns="0" bIns="0" rtlCol="0" anchor="ctr"/>
           <a:lstStyle/>
           <a:p>
-            <a:pPr algn="l" indent="0" marL="0">
+            <a:pPr marL="0" indent="0" algn="l">
               <a:buNone/>
             </a:pPr>
             <a:r>
@@ -10425,13 +10848,20 @@
             <a:prstDash val="solid"/>
           </a:ln>
           <a:effectLst>
-            <a:outerShdw sx="100000" sy="100000" kx="0" ky="0" algn="bl" rotWithShape="0" blurRad="127000" dist="38100" dir="8100000">
+            <a:outerShdw blurRad="127000" dist="38100" dir="8100000" algn="bl" rotWithShape="0">
               <a:srgbClr val="000000">
                 <a:alpha val="25000"/>
               </a:srgbClr>
             </a:outerShdw>
           </a:effectLst>
         </p:spPr>
+        <p:txBody>
+          <a:bodyPr/>
+          <a:lstStyle/>
+          <a:p>
+            <a:endParaRPr lang="en-SG"/>
+          </a:p>
+        </p:txBody>
       </p:sp>
       <p:sp>
         <p:nvSpPr>
@@ -10457,6 +10887,13 @@
             <a:prstDash val="solid"/>
           </a:ln>
         </p:spPr>
+        <p:txBody>
+          <a:bodyPr/>
+          <a:lstStyle/>
+          <a:p>
+            <a:endParaRPr lang="en-SG"/>
+          </a:p>
+        </p:txBody>
       </p:sp>
       <p:sp>
         <p:nvSpPr>
@@ -10479,7 +10916,7 @@
           <a:bodyPr wrap="square" lIns="0" tIns="0" rIns="0" bIns="0" rtlCol="0" anchor="ctr"/>
           <a:lstStyle/>
           <a:p>
-            <a:pPr indent="0" marL="0">
+            <a:pPr marL="0" indent="0">
               <a:buNone/>
             </a:pPr>
             <a:r>
@@ -10518,7 +10955,7 @@
           <a:bodyPr wrap="square" lIns="0" tIns="0" rIns="0" bIns="0" rtlCol="0" anchor="ctr"/>
           <a:lstStyle/>
           <a:p>
-            <a:pPr indent="0" marL="0">
+            <a:pPr marL="0" indent="0">
               <a:buNone/>
             </a:pPr>
             <a:r>
@@ -10535,13 +10972,13 @@
             <a:endParaRPr lang="en-US" sz="1200" dirty="0"/>
           </a:p>
           <a:p>
-            <a:pPr indent="0" marL="0">
-              <a:buNone/>
-            </a:pPr>
-            <a:endParaRPr lang="en-US" sz="1200" dirty="0"/>
-          </a:p>
-          <a:p>
-            <a:pPr indent="0" marL="0">
+            <a:pPr marL="0" indent="0">
+              <a:buNone/>
+            </a:pPr>
+            <a:endParaRPr lang="en-US" sz="1200" dirty="0"/>
+          </a:p>
+          <a:p>
+            <a:pPr marL="0" indent="0">
               <a:buNone/>
             </a:pPr>
             <a:r>
@@ -10558,13 +10995,13 @@
             <a:endParaRPr lang="en-US" sz="1200" dirty="0"/>
           </a:p>
           <a:p>
-            <a:pPr indent="0" marL="0">
-              <a:buNone/>
-            </a:pPr>
-            <a:endParaRPr lang="en-US" sz="1200" dirty="0"/>
-          </a:p>
-          <a:p>
-            <a:pPr indent="0" marL="0">
+            <a:pPr marL="0" indent="0">
+              <a:buNone/>
+            </a:pPr>
+            <a:endParaRPr lang="en-US" sz="1200" dirty="0"/>
+          </a:p>
+          <a:p>
+            <a:pPr marL="0" indent="0">
               <a:buNone/>
             </a:pPr>
             <a:r>
@@ -10581,7 +11018,7 @@
             <a:endParaRPr lang="en-US" sz="1200" dirty="0"/>
           </a:p>
           <a:p>
-            <a:pPr indent="0" marL="0">
+            <a:pPr marL="0" indent="0">
               <a:buNone/>
             </a:pPr>
             <a:r>
@@ -10598,7 +11035,7 @@
             <a:endParaRPr lang="en-US" sz="1200" dirty="0"/>
           </a:p>
           <a:p>
-            <a:pPr indent="0" marL="0">
+            <a:pPr marL="0" indent="0">
               <a:buNone/>
             </a:pPr>
             <a:r>
@@ -10615,7 +11052,7 @@
             <a:endParaRPr lang="en-US" sz="1200" dirty="0"/>
           </a:p>
           <a:p>
-            <a:pPr indent="0" marL="0">
+            <a:pPr marL="0" indent="0">
               <a:buNone/>
             </a:pPr>
             <a:r>
@@ -10632,7 +11069,7 @@
             <a:endParaRPr lang="en-US" sz="1200" dirty="0"/>
           </a:p>
           <a:p>
-            <a:pPr indent="0" marL="0">
+            <a:pPr marL="0" indent="0">
               <a:buNone/>
             </a:pPr>
             <a:r>
@@ -10649,7 +11086,7 @@
             <a:endParaRPr lang="en-US" sz="1200" dirty="0"/>
           </a:p>
           <a:p>
-            <a:pPr indent="0" marL="0">
+            <a:pPr marL="0" indent="0">
               <a:buNone/>
             </a:pPr>
             <a:r>
@@ -10691,13 +11128,20 @@
             <a:prstDash val="solid"/>
           </a:ln>
           <a:effectLst>
-            <a:outerShdw sx="100000" sy="100000" kx="0" ky="0" algn="bl" rotWithShape="0" blurRad="127000" dist="38100" dir="8100000">
+            <a:outerShdw blurRad="127000" dist="38100" dir="8100000" algn="bl" rotWithShape="0">
               <a:srgbClr val="000000">
                 <a:alpha val="25000"/>
               </a:srgbClr>
             </a:outerShdw>
           </a:effectLst>
         </p:spPr>
+        <p:txBody>
+          <a:bodyPr/>
+          <a:lstStyle/>
+          <a:p>
+            <a:endParaRPr lang="en-SG"/>
+          </a:p>
+        </p:txBody>
       </p:sp>
       <p:sp>
         <p:nvSpPr>
@@ -10723,6 +11167,13 @@
             <a:prstDash val="solid"/>
           </a:ln>
         </p:spPr>
+        <p:txBody>
+          <a:bodyPr/>
+          <a:lstStyle/>
+          <a:p>
+            <a:endParaRPr lang="en-SG"/>
+          </a:p>
+        </p:txBody>
       </p:sp>
       <p:sp>
         <p:nvSpPr>
@@ -10748,6 +11199,13 @@
             <a:prstDash val="solid"/>
           </a:ln>
         </p:spPr>
+        <p:txBody>
+          <a:bodyPr/>
+          <a:lstStyle/>
+          <a:p>
+            <a:endParaRPr lang="en-SG"/>
+          </a:p>
+        </p:txBody>
       </p:sp>
       <p:sp>
         <p:nvSpPr>
@@ -10773,6 +11231,13 @@
             <a:prstDash val="solid"/>
           </a:ln>
         </p:spPr>
+        <p:txBody>
+          <a:bodyPr/>
+          <a:lstStyle/>
+          <a:p>
+            <a:endParaRPr lang="en-SG"/>
+          </a:p>
+        </p:txBody>
       </p:sp>
       <p:sp>
         <p:nvSpPr>
@@ -10798,6 +11263,13 @@
             <a:prstDash val="solid"/>
           </a:ln>
         </p:spPr>
+        <p:txBody>
+          <a:bodyPr/>
+          <a:lstStyle/>
+          <a:p>
+            <a:endParaRPr lang="en-SG"/>
+          </a:p>
+        </p:txBody>
       </p:sp>
       <p:sp>
         <p:nvSpPr>
@@ -10820,7 +11292,7 @@
           <a:bodyPr wrap="square" lIns="0" tIns="0" rIns="0" bIns="0" rtlCol="0" anchor="ctr"/>
           <a:lstStyle/>
           <a:p>
-            <a:pPr algn="ctr" indent="0" marL="0">
+            <a:pPr marL="0" indent="0" algn="ctr">
               <a:buNone/>
             </a:pPr>
             <a:r>
@@ -10859,7 +11331,7 @@
           <a:bodyPr wrap="square" lIns="0" tIns="0" rIns="0" bIns="0" rtlCol="0" anchor="ctr"/>
           <a:lstStyle/>
           <a:p>
-            <a:pPr indent="0" marL="0">
+            <a:pPr marL="0" indent="0">
               <a:buNone/>
             </a:pPr>
             <a:r>
@@ -10876,7 +11348,7 @@
             <a:endParaRPr lang="en-US" sz="1200" dirty="0"/>
           </a:p>
           <a:p>
-            <a:pPr indent="0" marL="0">
+            <a:pPr marL="0" indent="0">
               <a:buNone/>
             </a:pPr>
             <a:r>
@@ -10893,7 +11365,7 @@
             <a:endParaRPr lang="en-US" sz="1200" dirty="0"/>
           </a:p>
           <a:p>
-            <a:pPr indent="0" marL="0">
+            <a:pPr marL="0" indent="0">
               <a:buNone/>
             </a:pPr>
             <a:r>
@@ -10910,7 +11382,7 @@
             <a:endParaRPr lang="en-US" sz="1200" dirty="0"/>
           </a:p>
           <a:p>
-            <a:pPr indent="0" marL="0">
+            <a:pPr marL="0" indent="0">
               <a:buNone/>
             </a:pPr>
             <a:r>
@@ -10927,7 +11399,7 @@
             <a:endParaRPr lang="en-US" sz="1200" dirty="0"/>
           </a:p>
           <a:p>
-            <a:pPr indent="0" marL="0">
+            <a:pPr marL="0" indent="0">
               <a:buNone/>
             </a:pPr>
             <a:r>
@@ -10944,13 +11416,13 @@
             <a:endParaRPr lang="en-US" sz="1200" dirty="0"/>
           </a:p>
           <a:p>
-            <a:pPr indent="0" marL="0">
-              <a:buNone/>
-            </a:pPr>
-            <a:endParaRPr lang="en-US" sz="1200" dirty="0"/>
-          </a:p>
-          <a:p>
-            <a:pPr indent="0" marL="0">
+            <a:pPr marL="0" indent="0">
+              <a:buNone/>
+            </a:pPr>
+            <a:endParaRPr lang="en-US" sz="1200" dirty="0"/>
+          </a:p>
+          <a:p>
+            <a:pPr marL="0" indent="0">
               <a:buNone/>
             </a:pPr>
             <a:r>
@@ -10967,7 +11439,7 @@
             <a:endParaRPr lang="en-US" sz="1200" dirty="0"/>
           </a:p>
           <a:p>
-            <a:pPr indent="0" marL="0">
+            <a:pPr marL="0" indent="0">
               <a:buNone/>
             </a:pPr>
             <a:r>
@@ -10984,7 +11456,7 @@
             <a:endParaRPr lang="en-US" sz="1200" dirty="0"/>
           </a:p>
           <a:p>
-            <a:pPr indent="0" marL="0">
+            <a:pPr marL="0" indent="0">
               <a:buNone/>
             </a:pPr>
             <a:r>
@@ -11001,7 +11473,7 @@
             <a:endParaRPr lang="en-US" sz="1200" dirty="0"/>
           </a:p>
           <a:p>
-            <a:pPr indent="0" marL="0">
+            <a:pPr marL="0" indent="0">
               <a:buNone/>
             </a:pPr>
             <a:r>
@@ -11018,7 +11490,7 @@
             <a:endParaRPr lang="en-US" sz="1200" dirty="0"/>
           </a:p>
           <a:p>
-            <a:pPr indent="0" marL="0">
+            <a:pPr marL="0" indent="0">
               <a:buNone/>
             </a:pPr>
             <a:r>
@@ -11035,13 +11507,13 @@
             <a:endParaRPr lang="en-US" sz="1200" dirty="0"/>
           </a:p>
           <a:p>
-            <a:pPr indent="0" marL="0">
-              <a:buNone/>
-            </a:pPr>
-            <a:endParaRPr lang="en-US" sz="1200" dirty="0"/>
-          </a:p>
-          <a:p>
-            <a:pPr indent="0" marL="0">
+            <a:pPr marL="0" indent="0">
+              <a:buNone/>
+            </a:pPr>
+            <a:endParaRPr lang="en-US" sz="1200" dirty="0"/>
+          </a:p>
+          <a:p>
+            <a:pPr marL="0" indent="0">
               <a:buNone/>
             </a:pPr>
             <a:r>
@@ -11058,7 +11530,7 @@
             <a:endParaRPr lang="en-US" sz="1200" dirty="0"/>
           </a:p>
           <a:p>
-            <a:pPr indent="0" marL="0">
+            <a:pPr marL="0" indent="0">
               <a:buNone/>
             </a:pPr>
             <a:r>
@@ -11075,7 +11547,7 @@
             <a:endParaRPr lang="en-US" sz="1200" dirty="0"/>
           </a:p>
           <a:p>
-            <a:pPr indent="0" marL="0">
+            <a:pPr marL="0" indent="0">
               <a:buNone/>
             </a:pPr>
             <a:r>
@@ -11117,6 +11589,13 @@
             <a:prstDash val="solid"/>
           </a:ln>
         </p:spPr>
+        <p:txBody>
+          <a:bodyPr/>
+          <a:lstStyle/>
+          <a:p>
+            <a:endParaRPr lang="en-SG"/>
+          </a:p>
+        </p:txBody>
       </p:sp>
       <p:sp>
         <p:nvSpPr>
@@ -11142,6 +11621,13 @@
             <a:prstDash val="solid"/>
           </a:ln>
         </p:spPr>
+        <p:txBody>
+          <a:bodyPr/>
+          <a:lstStyle/>
+          <a:p>
+            <a:endParaRPr lang="en-SG"/>
+          </a:p>
+        </p:txBody>
       </p:sp>
       <p:sp>
         <p:nvSpPr>
@@ -11164,7 +11650,7 @@
           <a:bodyPr wrap="square" lIns="0" tIns="0" rIns="0" bIns="0" rtlCol="0" anchor="ctr"/>
           <a:lstStyle/>
           <a:p>
-            <a:pPr indent="0" marL="0">
+            <a:pPr marL="0" indent="0">
               <a:buNone/>
             </a:pPr>
             <a:r>
@@ -11203,7 +11689,7 @@
           <a:bodyPr wrap="square" lIns="0" tIns="0" rIns="0" bIns="0" rtlCol="0" anchor="ctr"/>
           <a:lstStyle/>
           <a:p>
-            <a:pPr indent="0" marL="0">
+            <a:pPr marL="0" indent="0">
               <a:buNone/>
             </a:pPr>
             <a:r>
@@ -11245,6 +11731,13 @@
             <a:prstDash val="solid"/>
           </a:ln>
         </p:spPr>
+        <p:txBody>
+          <a:bodyPr/>
+          <a:lstStyle/>
+          <a:p>
+            <a:endParaRPr lang="en-SG"/>
+          </a:p>
+        </p:txBody>
       </p:sp>
       <p:sp>
         <p:nvSpPr>
@@ -11267,7 +11760,7 @@
           <a:bodyPr wrap="square" lIns="0" tIns="0" rIns="0" bIns="0" rtlCol="0" anchor="ctr"/>
           <a:lstStyle/>
           <a:p>
-            <a:pPr algn="ctr" indent="0" marL="0">
+            <a:pPr marL="0" indent="0" algn="ctr">
               <a:buNone/>
             </a:pPr>
             <a:r>
@@ -11309,6 +11802,13 @@
             <a:prstDash val="solid"/>
           </a:ln>
         </p:spPr>
+        <p:txBody>
+          <a:bodyPr/>
+          <a:lstStyle/>
+          <a:p>
+            <a:endParaRPr lang="en-SG"/>
+          </a:p>
+        </p:txBody>
       </p:sp>
       <p:sp>
         <p:nvSpPr>
@@ -11331,7 +11831,7 @@
           <a:bodyPr wrap="square" lIns="0" tIns="0" rIns="0" bIns="0" rtlCol="0" anchor="ctr"/>
           <a:lstStyle/>
           <a:p>
-            <a:pPr algn="ctr" indent="0" marL="0">
+            <a:pPr marL="0" indent="0" algn="ctr">
               <a:buNone/>
             </a:pPr>
             <a:r>
@@ -11365,6 +11865,7 @@
         <a:solidFill>
           <a:srgbClr val="080C10"/>
         </a:solidFill>
+        <a:effectLst/>
       </p:bgPr>
     </p:bg>
     <p:spTree>
@@ -11405,17 +11906,24 @@
             <a:prstDash val="solid"/>
           </a:ln>
         </p:spPr>
+        <p:txBody>
+          <a:bodyPr/>
+          <a:lstStyle/>
+          <a:p>
+            <a:endParaRPr lang="en-SG"/>
+          </a:p>
+        </p:txBody>
       </p:sp>
       <p:pic>
         <p:nvPicPr>
-          <p:cNvPr id="3" name="Image 0" descr="preencoded.png">    </p:cNvPr>
+          <p:cNvPr id="3" name="Image 0" descr="preencoded.png"/>
           <p:cNvPicPr>
             <a:picLocks noChangeAspect="1"/>
           </p:cNvPicPr>
           <p:nvPr/>
         </p:nvPicPr>
         <p:blipFill>
-          <a:blip r:embed="rId1"/>
+          <a:blip r:embed="rId3"/>
           <a:stretch>
             <a:fillRect/>
           </a:stretch>
@@ -11451,7 +11959,7 @@
           <a:bodyPr wrap="square" lIns="0" tIns="0" rIns="0" bIns="0" rtlCol="0" anchor="ctr"/>
           <a:lstStyle/>
           <a:p>
-            <a:pPr algn="l" indent="0" marL="0">
+            <a:pPr marL="0" indent="0" algn="l">
               <a:buNone/>
             </a:pPr>
             <a:r>
@@ -11493,13 +12001,20 @@
             <a:prstDash val="solid"/>
           </a:ln>
           <a:effectLst>
-            <a:outerShdw sx="100000" sy="100000" kx="0" ky="0" algn="bl" rotWithShape="0" blurRad="127000" dist="38100" dir="8100000">
+            <a:outerShdw blurRad="127000" dist="38100" dir="8100000" algn="bl" rotWithShape="0">
               <a:srgbClr val="000000">
                 <a:alpha val="25000"/>
               </a:srgbClr>
             </a:outerShdw>
           </a:effectLst>
         </p:spPr>
+        <p:txBody>
+          <a:bodyPr/>
+          <a:lstStyle/>
+          <a:p>
+            <a:endParaRPr lang="en-SG"/>
+          </a:p>
+        </p:txBody>
       </p:sp>
       <p:sp>
         <p:nvSpPr>
@@ -11525,6 +12040,13 @@
             <a:prstDash val="solid"/>
           </a:ln>
         </p:spPr>
+        <p:txBody>
+          <a:bodyPr/>
+          <a:lstStyle/>
+          <a:p>
+            <a:endParaRPr lang="en-SG"/>
+          </a:p>
+        </p:txBody>
       </p:sp>
       <p:sp>
         <p:nvSpPr>
@@ -11554,6 +12076,13 @@
             <a:prstDash val="solid"/>
           </a:ln>
         </p:spPr>
+        <p:txBody>
+          <a:bodyPr/>
+          <a:lstStyle/>
+          <a:p>
+            <a:endParaRPr lang="en-SG"/>
+          </a:p>
+        </p:txBody>
       </p:sp>
       <p:sp>
         <p:nvSpPr>
@@ -11576,7 +12105,7 @@
           <a:bodyPr wrap="square" lIns="0" tIns="0" rIns="0" bIns="0" rtlCol="0" anchor="ctr"/>
           <a:lstStyle/>
           <a:p>
-            <a:pPr algn="ctr" indent="0" marL="0">
+            <a:pPr marL="0" indent="0" algn="ctr">
               <a:buNone/>
             </a:pPr>
             <a:r>
@@ -11615,7 +12144,7 @@
           <a:bodyPr wrap="square" lIns="0" tIns="0" rIns="0" bIns="0" rtlCol="0" anchor="ctr"/>
           <a:lstStyle/>
           <a:p>
-            <a:pPr indent="0" marL="0">
+            <a:pPr marL="0" indent="0">
               <a:buNone/>
             </a:pPr>
             <a:r>
@@ -11654,7 +12183,7 @@
           <a:bodyPr wrap="square" lIns="0" tIns="0" rIns="0" bIns="0" rtlCol="0" anchor="ctr"/>
           <a:lstStyle/>
           <a:p>
-            <a:pPr indent="0" marL="0">
+            <a:pPr marL="0" indent="0">
               <a:buNone/>
             </a:pPr>
             <a:r>
@@ -11671,13 +12200,13 @@
             <a:endParaRPr lang="en-US" sz="1100" dirty="0"/>
           </a:p>
           <a:p>
-            <a:pPr indent="0" marL="0">
+            <a:pPr marL="0" indent="0">
               <a:buNone/>
             </a:pPr>
             <a:endParaRPr lang="en-US" sz="1100" dirty="0"/>
           </a:p>
           <a:p>
-            <a:pPr indent="0" marL="0">
+            <a:pPr marL="0" indent="0">
               <a:buNone/>
             </a:pPr>
             <a:r>
@@ -11694,13 +12223,13 @@
             <a:endParaRPr lang="en-US" sz="1100" dirty="0"/>
           </a:p>
           <a:p>
-            <a:pPr indent="0" marL="0">
+            <a:pPr marL="0" indent="0">
               <a:buNone/>
             </a:pPr>
             <a:endParaRPr lang="en-US" sz="1100" dirty="0"/>
           </a:p>
           <a:p>
-            <a:pPr indent="0" marL="0">
+            <a:pPr marL="0" indent="0">
               <a:buNone/>
             </a:pPr>
             <a:r>
@@ -11742,13 +12271,20 @@
             <a:prstDash val="solid"/>
           </a:ln>
           <a:effectLst>
-            <a:outerShdw sx="100000" sy="100000" kx="0" ky="0" algn="bl" rotWithShape="0" blurRad="127000" dist="38100" dir="8100000">
+            <a:outerShdw blurRad="127000" dist="38100" dir="8100000" algn="bl" rotWithShape="0">
               <a:srgbClr val="000000">
                 <a:alpha val="25000"/>
               </a:srgbClr>
             </a:outerShdw>
           </a:effectLst>
         </p:spPr>
+        <p:txBody>
+          <a:bodyPr/>
+          <a:lstStyle/>
+          <a:p>
+            <a:endParaRPr lang="en-SG"/>
+          </a:p>
+        </p:txBody>
       </p:sp>
       <p:sp>
         <p:nvSpPr>
@@ -11774,6 +12310,13 @@
             <a:prstDash val="solid"/>
           </a:ln>
         </p:spPr>
+        <p:txBody>
+          <a:bodyPr/>
+          <a:lstStyle/>
+          <a:p>
+            <a:endParaRPr lang="en-SG"/>
+          </a:p>
+        </p:txBody>
       </p:sp>
       <p:sp>
         <p:nvSpPr>
@@ -11803,6 +12346,13 @@
             <a:prstDash val="solid"/>
           </a:ln>
         </p:spPr>
+        <p:txBody>
+          <a:bodyPr/>
+          <a:lstStyle/>
+          <a:p>
+            <a:endParaRPr lang="en-SG"/>
+          </a:p>
+        </p:txBody>
       </p:sp>
       <p:sp>
         <p:nvSpPr>
@@ -11825,7 +12375,7 @@
           <a:bodyPr wrap="square" lIns="0" tIns="0" rIns="0" bIns="0" rtlCol="0" anchor="ctr"/>
           <a:lstStyle/>
           <a:p>
-            <a:pPr algn="ctr" indent="0" marL="0">
+            <a:pPr marL="0" indent="0" algn="ctr">
               <a:buNone/>
             </a:pPr>
             <a:r>
@@ -11864,7 +12414,7 @@
           <a:bodyPr wrap="square" lIns="0" tIns="0" rIns="0" bIns="0" rtlCol="0" anchor="ctr"/>
           <a:lstStyle/>
           <a:p>
-            <a:pPr indent="0" marL="0">
+            <a:pPr marL="0" indent="0">
               <a:buNone/>
             </a:pPr>
             <a:r>
@@ -11903,7 +12453,7 @@
           <a:bodyPr wrap="square" lIns="0" tIns="0" rIns="0" bIns="0" rtlCol="0" anchor="ctr"/>
           <a:lstStyle/>
           <a:p>
-            <a:pPr indent="0" marL="0">
+            <a:pPr marL="0" indent="0">
               <a:buNone/>
             </a:pPr>
             <a:r>
@@ -11920,13 +12470,13 @@
             <a:endParaRPr lang="en-US" sz="1100" dirty="0"/>
           </a:p>
           <a:p>
-            <a:pPr indent="0" marL="0">
+            <a:pPr marL="0" indent="0">
               <a:buNone/>
             </a:pPr>
             <a:endParaRPr lang="en-US" sz="1100" dirty="0"/>
           </a:p>
           <a:p>
-            <a:pPr indent="0" marL="0">
+            <a:pPr marL="0" indent="0">
               <a:buNone/>
             </a:pPr>
             <a:r>
@@ -11943,13 +12493,13 @@
             <a:endParaRPr lang="en-US" sz="1100" dirty="0"/>
           </a:p>
           <a:p>
-            <a:pPr indent="0" marL="0">
+            <a:pPr marL="0" indent="0">
               <a:buNone/>
             </a:pPr>
             <a:endParaRPr lang="en-US" sz="1100" dirty="0"/>
           </a:p>
           <a:p>
-            <a:pPr indent="0" marL="0">
+            <a:pPr marL="0" indent="0">
               <a:buNone/>
             </a:pPr>
             <a:r>
@@ -11991,13 +12541,20 @@
             <a:prstDash val="solid"/>
           </a:ln>
           <a:effectLst>
-            <a:outerShdw sx="100000" sy="100000" kx="0" ky="0" algn="bl" rotWithShape="0" blurRad="127000" dist="38100" dir="8100000">
+            <a:outerShdw blurRad="127000" dist="38100" dir="8100000" algn="bl" rotWithShape="0">
               <a:srgbClr val="000000">
                 <a:alpha val="25000"/>
               </a:srgbClr>
             </a:outerShdw>
           </a:effectLst>
         </p:spPr>
+        <p:txBody>
+          <a:bodyPr/>
+          <a:lstStyle/>
+          <a:p>
+            <a:endParaRPr lang="en-SG"/>
+          </a:p>
+        </p:txBody>
       </p:sp>
       <p:sp>
         <p:nvSpPr>
@@ -12023,6 +12580,13 @@
             <a:prstDash val="solid"/>
           </a:ln>
         </p:spPr>
+        <p:txBody>
+          <a:bodyPr/>
+          <a:lstStyle/>
+          <a:p>
+            <a:endParaRPr lang="en-SG"/>
+          </a:p>
+        </p:txBody>
       </p:sp>
       <p:sp>
         <p:nvSpPr>
@@ -12052,6 +12616,13 @@
             <a:prstDash val="solid"/>
           </a:ln>
         </p:spPr>
+        <p:txBody>
+          <a:bodyPr/>
+          <a:lstStyle/>
+          <a:p>
+            <a:endParaRPr lang="en-SG"/>
+          </a:p>
+        </p:txBody>
       </p:sp>
       <p:sp>
         <p:nvSpPr>
@@ -12074,7 +12645,7 @@
           <a:bodyPr wrap="square" lIns="0" tIns="0" rIns="0" bIns="0" rtlCol="0" anchor="ctr"/>
           <a:lstStyle/>
           <a:p>
-            <a:pPr algn="ctr" indent="0" marL="0">
+            <a:pPr marL="0" indent="0" algn="ctr">
               <a:buNone/>
             </a:pPr>
             <a:r>
@@ -12113,7 +12684,7 @@
           <a:bodyPr wrap="square" lIns="0" tIns="0" rIns="0" bIns="0" rtlCol="0" anchor="ctr"/>
           <a:lstStyle/>
           <a:p>
-            <a:pPr indent="0" marL="0">
+            <a:pPr marL="0" indent="0">
               <a:buNone/>
             </a:pPr>
             <a:r>
@@ -12152,7 +12723,7 @@
           <a:bodyPr wrap="square" lIns="0" tIns="0" rIns="0" bIns="0" rtlCol="0" anchor="ctr"/>
           <a:lstStyle/>
           <a:p>
-            <a:pPr indent="0" marL="0">
+            <a:pPr marL="0" indent="0">
               <a:buNone/>
             </a:pPr>
             <a:r>
@@ -12169,13 +12740,13 @@
             <a:endParaRPr lang="en-US" sz="1100" dirty="0"/>
           </a:p>
           <a:p>
-            <a:pPr indent="0" marL="0">
+            <a:pPr marL="0" indent="0">
               <a:buNone/>
             </a:pPr>
             <a:endParaRPr lang="en-US" sz="1100" dirty="0"/>
           </a:p>
           <a:p>
-            <a:pPr indent="0" marL="0">
+            <a:pPr marL="0" indent="0">
               <a:buNone/>
             </a:pPr>
             <a:r>
@@ -12192,13 +12763,13 @@
             <a:endParaRPr lang="en-US" sz="1100" dirty="0"/>
           </a:p>
           <a:p>
-            <a:pPr indent="0" marL="0">
+            <a:pPr marL="0" indent="0">
               <a:buNone/>
             </a:pPr>
             <a:endParaRPr lang="en-US" sz="1100" dirty="0"/>
           </a:p>
           <a:p>
-            <a:pPr indent="0" marL="0">
+            <a:pPr marL="0" indent="0">
               <a:buNone/>
             </a:pPr>
             <a:r>
@@ -12240,13 +12811,20 @@
             <a:prstDash val="solid"/>
           </a:ln>
           <a:effectLst>
-            <a:outerShdw sx="100000" sy="100000" kx="0" ky="0" algn="bl" rotWithShape="0" blurRad="127000" dist="38100" dir="8100000">
+            <a:outerShdw blurRad="127000" dist="38100" dir="8100000" algn="bl" rotWithShape="0">
               <a:srgbClr val="000000">
                 <a:alpha val="25000"/>
               </a:srgbClr>
             </a:outerShdw>
           </a:effectLst>
         </p:spPr>
+        <p:txBody>
+          <a:bodyPr/>
+          <a:lstStyle/>
+          <a:p>
+            <a:endParaRPr lang="en-SG"/>
+          </a:p>
+        </p:txBody>
       </p:sp>
       <p:sp>
         <p:nvSpPr>
@@ -12272,6 +12850,13 @@
             <a:prstDash val="solid"/>
           </a:ln>
         </p:spPr>
+        <p:txBody>
+          <a:bodyPr/>
+          <a:lstStyle/>
+          <a:p>
+            <a:endParaRPr lang="en-SG"/>
+          </a:p>
+        </p:txBody>
       </p:sp>
       <p:sp>
         <p:nvSpPr>
@@ -12301,6 +12886,13 @@
             <a:prstDash val="solid"/>
           </a:ln>
         </p:spPr>
+        <p:txBody>
+          <a:bodyPr/>
+          <a:lstStyle/>
+          <a:p>
+            <a:endParaRPr lang="en-SG"/>
+          </a:p>
+        </p:txBody>
       </p:sp>
       <p:sp>
         <p:nvSpPr>
@@ -12323,7 +12915,7 @@
           <a:bodyPr wrap="square" lIns="0" tIns="0" rIns="0" bIns="0" rtlCol="0" anchor="ctr"/>
           <a:lstStyle/>
           <a:p>
-            <a:pPr algn="ctr" indent="0" marL="0">
+            <a:pPr marL="0" indent="0" algn="ctr">
               <a:buNone/>
             </a:pPr>
             <a:r>
@@ -12362,7 +12954,7 @@
           <a:bodyPr wrap="square" lIns="0" tIns="0" rIns="0" bIns="0" rtlCol="0" anchor="ctr"/>
           <a:lstStyle/>
           <a:p>
-            <a:pPr indent="0" marL="0">
+            <a:pPr marL="0" indent="0">
               <a:buNone/>
             </a:pPr>
             <a:r>
@@ -12401,7 +12993,7 @@
           <a:bodyPr wrap="square" lIns="0" tIns="0" rIns="0" bIns="0" rtlCol="0" anchor="ctr"/>
           <a:lstStyle/>
           <a:p>
-            <a:pPr indent="0" marL="0">
+            <a:pPr marL="0" indent="0">
               <a:buNone/>
             </a:pPr>
             <a:r>
@@ -12418,13 +13010,13 @@
             <a:endParaRPr lang="en-US" sz="1100" dirty="0"/>
           </a:p>
           <a:p>
-            <a:pPr indent="0" marL="0">
+            <a:pPr marL="0" indent="0">
               <a:buNone/>
             </a:pPr>
             <a:endParaRPr lang="en-US" sz="1100" dirty="0"/>
           </a:p>
           <a:p>
-            <a:pPr indent="0" marL="0">
+            <a:pPr marL="0" indent="0">
               <a:buNone/>
             </a:pPr>
             <a:r>
@@ -12441,13 +13033,13 @@
             <a:endParaRPr lang="en-US" sz="1100" dirty="0"/>
           </a:p>
           <a:p>
-            <a:pPr indent="0" marL="0">
+            <a:pPr marL="0" indent="0">
               <a:buNone/>
             </a:pPr>
             <a:endParaRPr lang="en-US" sz="1100" dirty="0"/>
           </a:p>
           <a:p>
-            <a:pPr indent="0" marL="0">
+            <a:pPr marL="0" indent="0">
               <a:buNone/>
             </a:pPr>
             <a:r>
@@ -12489,6 +13081,13 @@
             <a:prstDash val="solid"/>
           </a:ln>
         </p:spPr>
+        <p:txBody>
+          <a:bodyPr/>
+          <a:lstStyle/>
+          <a:p>
+            <a:endParaRPr lang="en-SG"/>
+          </a:p>
+        </p:txBody>
       </p:sp>
       <p:sp>
         <p:nvSpPr>
@@ -12514,6 +13113,13 @@
             <a:prstDash val="solid"/>
           </a:ln>
         </p:spPr>
+        <p:txBody>
+          <a:bodyPr/>
+          <a:lstStyle/>
+          <a:p>
+            <a:endParaRPr lang="en-SG"/>
+          </a:p>
+        </p:txBody>
       </p:sp>
       <p:sp>
         <p:nvSpPr>
@@ -12536,7 +13142,7 @@
           <a:bodyPr wrap="square" lIns="0" tIns="0" rIns="0" bIns="0" rtlCol="0" anchor="ctr"/>
           <a:lstStyle/>
           <a:p>
-            <a:pPr indent="0" marL="0">
+            <a:pPr marL="0" indent="0">
               <a:buNone/>
             </a:pPr>
             <a:r>
@@ -12575,7 +13181,7 @@
           <a:bodyPr wrap="square" lIns="0" tIns="0" rIns="0" bIns="0" rtlCol="0" anchor="ctr"/>
           <a:lstStyle/>
           <a:p>
-            <a:pPr indent="0" marL="0">
+            <a:pPr marL="0" indent="0">
               <a:buNone/>
             </a:pPr>
             <a:r>
@@ -12617,6 +13223,13 @@
             <a:prstDash val="solid"/>
           </a:ln>
         </p:spPr>
+        <p:txBody>
+          <a:bodyPr/>
+          <a:lstStyle/>
+          <a:p>
+            <a:endParaRPr lang="en-SG"/>
+          </a:p>
+        </p:txBody>
       </p:sp>
       <p:sp>
         <p:nvSpPr>
@@ -12639,7 +13252,7 @@
           <a:bodyPr wrap="square" lIns="0" tIns="0" rIns="0" bIns="0" rtlCol="0" anchor="ctr"/>
           <a:lstStyle/>
           <a:p>
-            <a:pPr algn="ctr" indent="0" marL="0">
+            <a:pPr marL="0" indent="0" algn="ctr">
               <a:buNone/>
             </a:pPr>
             <a:r>
@@ -12681,6 +13294,13 @@
             <a:prstDash val="solid"/>
           </a:ln>
         </p:spPr>
+        <p:txBody>
+          <a:bodyPr/>
+          <a:lstStyle/>
+          <a:p>
+            <a:endParaRPr lang="en-SG"/>
+          </a:p>
+        </p:txBody>
       </p:sp>
       <p:sp>
         <p:nvSpPr>
@@ -12703,7 +13323,7 @@
           <a:bodyPr wrap="square" lIns="0" tIns="0" rIns="0" bIns="0" rtlCol="0" anchor="ctr"/>
           <a:lstStyle/>
           <a:p>
-            <a:pPr algn="ctr" indent="0" marL="0">
+            <a:pPr marL="0" indent="0" algn="ctr">
               <a:buNone/>
             </a:pPr>
             <a:r>
@@ -12737,6 +13357,7 @@
         <a:solidFill>
           <a:srgbClr val="080C10"/>
         </a:solidFill>
+        <a:effectLst/>
       </p:bgPr>
     </p:bg>
     <p:spTree>
@@ -12777,17 +13398,24 @@
             <a:prstDash val="solid"/>
           </a:ln>
         </p:spPr>
+        <p:txBody>
+          <a:bodyPr/>
+          <a:lstStyle/>
+          <a:p>
+            <a:endParaRPr lang="en-SG"/>
+          </a:p>
+        </p:txBody>
       </p:sp>
       <p:pic>
         <p:nvPicPr>
-          <p:cNvPr id="3" name="Image 0" descr="preencoded.png">    </p:cNvPr>
+          <p:cNvPr id="3" name="Image 0" descr="preencoded.png"/>
           <p:cNvPicPr>
             <a:picLocks noChangeAspect="1"/>
           </p:cNvPicPr>
           <p:nvPr/>
         </p:nvPicPr>
         <p:blipFill>
-          <a:blip r:embed="rId1"/>
+          <a:blip r:embed="rId3"/>
           <a:stretch>
             <a:fillRect/>
           </a:stretch>
@@ -12823,7 +13451,7 @@
           <a:bodyPr wrap="square" lIns="0" tIns="0" rIns="0" bIns="0" rtlCol="0" anchor="ctr"/>
           <a:lstStyle/>
           <a:p>
-            <a:pPr algn="l" indent="0" marL="0">
+            <a:pPr marL="0" indent="0" algn="l">
               <a:buNone/>
             </a:pPr>
             <a:r>
@@ -12865,13 +13493,20 @@
             <a:prstDash val="solid"/>
           </a:ln>
           <a:effectLst>
-            <a:outerShdw sx="100000" sy="100000" kx="0" ky="0" algn="bl" rotWithShape="0" blurRad="127000" dist="38100" dir="8100000">
+            <a:outerShdw blurRad="127000" dist="38100" dir="8100000" algn="bl" rotWithShape="0">
               <a:srgbClr val="000000">
                 <a:alpha val="25000"/>
               </a:srgbClr>
             </a:outerShdw>
           </a:effectLst>
         </p:spPr>
+        <p:txBody>
+          <a:bodyPr/>
+          <a:lstStyle/>
+          <a:p>
+            <a:endParaRPr lang="en-SG"/>
+          </a:p>
+        </p:txBody>
       </p:sp>
       <p:sp>
         <p:nvSpPr>
@@ -12897,6 +13532,13 @@
             <a:prstDash val="solid"/>
           </a:ln>
         </p:spPr>
+        <p:txBody>
+          <a:bodyPr/>
+          <a:lstStyle/>
+          <a:p>
+            <a:endParaRPr lang="en-SG"/>
+          </a:p>
+        </p:txBody>
       </p:sp>
       <p:sp>
         <p:nvSpPr>
@@ -12919,7 +13561,7 @@
           <a:bodyPr wrap="square" lIns="0" tIns="0" rIns="0" bIns="0" rtlCol="0" anchor="ctr"/>
           <a:lstStyle/>
           <a:p>
-            <a:pPr indent="0" marL="0">
+            <a:pPr marL="0" indent="0">
               <a:buNone/>
             </a:pPr>
             <a:r>
@@ -12958,7 +13600,7 @@
           <a:bodyPr wrap="square" lIns="0" tIns="0" rIns="0" bIns="0" rtlCol="0" anchor="ctr"/>
           <a:lstStyle/>
           <a:p>
-            <a:pPr indent="0" marL="0">
+            <a:pPr marL="0" indent="0">
               <a:buNone/>
             </a:pPr>
             <a:r>
@@ -12975,13 +13617,13 @@
             <a:endParaRPr lang="en-US" sz="1200" dirty="0"/>
           </a:p>
           <a:p>
-            <a:pPr indent="0" marL="0">
-              <a:buNone/>
-            </a:pPr>
-            <a:endParaRPr lang="en-US" sz="1200" dirty="0"/>
-          </a:p>
-          <a:p>
-            <a:pPr indent="0" marL="0">
+            <a:pPr marL="0" indent="0">
+              <a:buNone/>
+            </a:pPr>
+            <a:endParaRPr lang="en-US" sz="1200" dirty="0"/>
+          </a:p>
+          <a:p>
+            <a:pPr marL="0" indent="0">
               <a:buNone/>
             </a:pPr>
             <a:r>
@@ -12998,13 +13640,13 @@
             <a:endParaRPr lang="en-US" sz="1200" dirty="0"/>
           </a:p>
           <a:p>
-            <a:pPr indent="0" marL="0">
-              <a:buNone/>
-            </a:pPr>
-            <a:endParaRPr lang="en-US" sz="1200" dirty="0"/>
-          </a:p>
-          <a:p>
-            <a:pPr indent="0" marL="0">
+            <a:pPr marL="0" indent="0">
+              <a:buNone/>
+            </a:pPr>
+            <a:endParaRPr lang="en-US" sz="1200" dirty="0"/>
+          </a:p>
+          <a:p>
+            <a:pPr marL="0" indent="0">
               <a:buNone/>
             </a:pPr>
             <a:r>
@@ -13021,7 +13663,7 @@
             <a:endParaRPr lang="en-US" sz="1200" dirty="0"/>
           </a:p>
           <a:p>
-            <a:pPr indent="0" marL="0">
+            <a:pPr marL="0" indent="0">
               <a:buNone/>
             </a:pPr>
             <a:r>
@@ -13038,7 +13680,7 @@
             <a:endParaRPr lang="en-US" sz="1200" dirty="0"/>
           </a:p>
           <a:p>
-            <a:pPr indent="0" marL="0">
+            <a:pPr marL="0" indent="0">
               <a:buNone/>
             </a:pPr>
             <a:r>
@@ -13055,7 +13697,7 @@
             <a:endParaRPr lang="en-US" sz="1200" dirty="0"/>
           </a:p>
           <a:p>
-            <a:pPr indent="0" marL="0">
+            <a:pPr marL="0" indent="0">
               <a:buNone/>
             </a:pPr>
             <a:r>
@@ -13072,13 +13714,13 @@
             <a:endParaRPr lang="en-US" sz="1200" dirty="0"/>
           </a:p>
           <a:p>
-            <a:pPr indent="0" marL="0">
-              <a:buNone/>
-            </a:pPr>
-            <a:endParaRPr lang="en-US" sz="1200" dirty="0"/>
-          </a:p>
-          <a:p>
-            <a:pPr indent="0" marL="0">
+            <a:pPr marL="0" indent="0">
+              <a:buNone/>
+            </a:pPr>
+            <a:endParaRPr lang="en-US" sz="1200" dirty="0"/>
+          </a:p>
+          <a:p>
+            <a:pPr marL="0" indent="0">
               <a:buNone/>
             </a:pPr>
             <a:r>
@@ -13120,13 +13762,20 @@
             <a:prstDash val="solid"/>
           </a:ln>
           <a:effectLst>
-            <a:outerShdw sx="100000" sy="100000" kx="0" ky="0" algn="bl" rotWithShape="0" blurRad="127000" dist="38100" dir="8100000">
+            <a:outerShdw blurRad="127000" dist="38100" dir="8100000" algn="bl" rotWithShape="0">
               <a:srgbClr val="000000">
                 <a:alpha val="25000"/>
               </a:srgbClr>
             </a:outerShdw>
           </a:effectLst>
         </p:spPr>
+        <p:txBody>
+          <a:bodyPr/>
+          <a:lstStyle/>
+          <a:p>
+            <a:endParaRPr lang="en-SG"/>
+          </a:p>
+        </p:txBody>
       </p:sp>
       <p:sp>
         <p:nvSpPr>
@@ -13152,6 +13801,13 @@
             <a:prstDash val="solid"/>
           </a:ln>
         </p:spPr>
+        <p:txBody>
+          <a:bodyPr/>
+          <a:lstStyle/>
+          <a:p>
+            <a:endParaRPr lang="en-SG"/>
+          </a:p>
+        </p:txBody>
       </p:sp>
       <p:sp>
         <p:nvSpPr>
@@ -13177,6 +13833,13 @@
             <a:prstDash val="solid"/>
           </a:ln>
         </p:spPr>
+        <p:txBody>
+          <a:bodyPr/>
+          <a:lstStyle/>
+          <a:p>
+            <a:endParaRPr lang="en-SG"/>
+          </a:p>
+        </p:txBody>
       </p:sp>
       <p:sp>
         <p:nvSpPr>
@@ -13202,6 +13865,13 @@
             <a:prstDash val="solid"/>
           </a:ln>
         </p:spPr>
+        <p:txBody>
+          <a:bodyPr/>
+          <a:lstStyle/>
+          <a:p>
+            <a:endParaRPr lang="en-SG"/>
+          </a:p>
+        </p:txBody>
       </p:sp>
       <p:sp>
         <p:nvSpPr>
@@ -13227,6 +13897,13 @@
             <a:prstDash val="solid"/>
           </a:ln>
         </p:spPr>
+        <p:txBody>
+          <a:bodyPr/>
+          <a:lstStyle/>
+          <a:p>
+            <a:endParaRPr lang="en-SG"/>
+          </a:p>
+        </p:txBody>
       </p:sp>
       <p:sp>
         <p:nvSpPr>
@@ -13249,7 +13926,7 @@
           <a:bodyPr wrap="square" lIns="0" tIns="0" rIns="0" bIns="0" rtlCol="0" anchor="ctr"/>
           <a:lstStyle/>
           <a:p>
-            <a:pPr algn="ctr" indent="0" marL="0">
+            <a:pPr marL="0" indent="0" algn="ctr">
               <a:buNone/>
             </a:pPr>
             <a:r>
@@ -13288,7 +13965,7 @@
           <a:bodyPr wrap="square" lIns="0" tIns="0" rIns="0" bIns="0" rtlCol="0" anchor="ctr"/>
           <a:lstStyle/>
           <a:p>
-            <a:pPr indent="0" marL="0">
+            <a:pPr marL="0" indent="0">
               <a:buNone/>
             </a:pPr>
             <a:r>
@@ -13305,7 +13982,7 @@
             <a:endParaRPr lang="en-US" sz="1200" dirty="0"/>
           </a:p>
           <a:p>
-            <a:pPr indent="0" marL="0">
+            <a:pPr marL="0" indent="0">
               <a:buNone/>
             </a:pPr>
             <a:r>
@@ -13322,7 +13999,7 @@
             <a:endParaRPr lang="en-US" sz="1200" dirty="0"/>
           </a:p>
           <a:p>
-            <a:pPr indent="0" marL="0">
+            <a:pPr marL="0" indent="0">
               <a:buNone/>
             </a:pPr>
             <a:r>
@@ -13339,13 +14016,13 @@
             <a:endParaRPr lang="en-US" sz="1200" dirty="0"/>
           </a:p>
           <a:p>
-            <a:pPr indent="0" marL="0">
-              <a:buNone/>
-            </a:pPr>
-            <a:endParaRPr lang="en-US" sz="1200" dirty="0"/>
-          </a:p>
-          <a:p>
-            <a:pPr indent="0" marL="0">
+            <a:pPr marL="0" indent="0">
+              <a:buNone/>
+            </a:pPr>
+            <a:endParaRPr lang="en-US" sz="1200" dirty="0"/>
+          </a:p>
+          <a:p>
+            <a:pPr marL="0" indent="0">
               <a:buNone/>
             </a:pPr>
             <a:r>
@@ -13362,7 +14039,7 @@
             <a:endParaRPr lang="en-US" sz="1200" dirty="0"/>
           </a:p>
           <a:p>
-            <a:pPr indent="0" marL="0">
+            <a:pPr marL="0" indent="0">
               <a:buNone/>
             </a:pPr>
             <a:r>
@@ -13379,7 +14056,7 @@
             <a:endParaRPr lang="en-US" sz="1200" dirty="0"/>
           </a:p>
           <a:p>
-            <a:pPr indent="0" marL="0">
+            <a:pPr marL="0" indent="0">
               <a:buNone/>
             </a:pPr>
             <a:r>
@@ -13396,7 +14073,7 @@
             <a:endParaRPr lang="en-US" sz="1200" dirty="0"/>
           </a:p>
           <a:p>
-            <a:pPr indent="0" marL="0">
+            <a:pPr marL="0" indent="0">
               <a:buNone/>
             </a:pPr>
             <a:r>
@@ -13413,13 +14090,13 @@
             <a:endParaRPr lang="en-US" sz="1200" dirty="0"/>
           </a:p>
           <a:p>
-            <a:pPr indent="0" marL="0">
-              <a:buNone/>
-            </a:pPr>
-            <a:endParaRPr lang="en-US" sz="1200" dirty="0"/>
-          </a:p>
-          <a:p>
-            <a:pPr indent="0" marL="0">
+            <a:pPr marL="0" indent="0">
+              <a:buNone/>
+            </a:pPr>
+            <a:endParaRPr lang="en-US" sz="1200" dirty="0"/>
+          </a:p>
+          <a:p>
+            <a:pPr marL="0" indent="0">
               <a:buNone/>
             </a:pPr>
             <a:r>
@@ -13436,7 +14113,7 @@
             <a:endParaRPr lang="en-US" sz="1200" dirty="0"/>
           </a:p>
           <a:p>
-            <a:pPr indent="0" marL="0">
+            <a:pPr marL="0" indent="0">
               <a:buNone/>
             </a:pPr>
             <a:r>
@@ -13453,7 +14130,7 @@
             <a:endParaRPr lang="en-US" sz="1200" dirty="0"/>
           </a:p>
           <a:p>
-            <a:pPr indent="0" marL="0">
+            <a:pPr marL="0" indent="0">
               <a:buNone/>
             </a:pPr>
             <a:r>
@@ -13470,7 +14147,7 @@
             <a:endParaRPr lang="en-US" sz="1200" dirty="0"/>
           </a:p>
           <a:p>
-            <a:pPr indent="0" marL="0">
+            <a:pPr marL="0" indent="0">
               <a:buNone/>
             </a:pPr>
             <a:r>
@@ -13487,13 +14164,13 @@
             <a:endParaRPr lang="en-US" sz="1200" dirty="0"/>
           </a:p>
           <a:p>
-            <a:pPr indent="0" marL="0">
-              <a:buNone/>
-            </a:pPr>
-            <a:endParaRPr lang="en-US" sz="1200" dirty="0"/>
-          </a:p>
-          <a:p>
-            <a:pPr indent="0" marL="0">
+            <a:pPr marL="0" indent="0">
+              <a:buNone/>
+            </a:pPr>
+            <a:endParaRPr lang="en-US" sz="1200" dirty="0"/>
+          </a:p>
+          <a:p>
+            <a:pPr marL="0" indent="0">
               <a:buNone/>
             </a:pPr>
             <a:r>
@@ -13510,7 +14187,7 @@
             <a:endParaRPr lang="en-US" sz="1200" dirty="0"/>
           </a:p>
           <a:p>
-            <a:pPr indent="0" marL="0">
+            <a:pPr marL="0" indent="0">
               <a:buNone/>
             </a:pPr>
             <a:r>
@@ -13552,6 +14229,13 @@
             <a:prstDash val="solid"/>
           </a:ln>
         </p:spPr>
+        <p:txBody>
+          <a:bodyPr/>
+          <a:lstStyle/>
+          <a:p>
+            <a:endParaRPr lang="en-SG"/>
+          </a:p>
+        </p:txBody>
       </p:sp>
       <p:sp>
         <p:nvSpPr>
@@ -13577,6 +14261,13 @@
             <a:prstDash val="solid"/>
           </a:ln>
         </p:spPr>
+        <p:txBody>
+          <a:bodyPr/>
+          <a:lstStyle/>
+          <a:p>
+            <a:endParaRPr lang="en-SG"/>
+          </a:p>
+        </p:txBody>
       </p:sp>
       <p:sp>
         <p:nvSpPr>
@@ -13599,7 +14290,7 @@
           <a:bodyPr wrap="square" lIns="0" tIns="0" rIns="0" bIns="0" rtlCol="0" anchor="ctr"/>
           <a:lstStyle/>
           <a:p>
-            <a:pPr indent="0" marL="0">
+            <a:pPr marL="0" indent="0">
               <a:buNone/>
             </a:pPr>
             <a:r>
@@ -13638,7 +14329,7 @@
           <a:bodyPr wrap="square" lIns="0" tIns="0" rIns="0" bIns="0" rtlCol="0" anchor="ctr"/>
           <a:lstStyle/>
           <a:p>
-            <a:pPr indent="0" marL="0">
+            <a:pPr marL="0" indent="0">
               <a:buNone/>
             </a:pPr>
             <a:r>
@@ -13680,6 +14371,13 @@
             <a:prstDash val="solid"/>
           </a:ln>
         </p:spPr>
+        <p:txBody>
+          <a:bodyPr/>
+          <a:lstStyle/>
+          <a:p>
+            <a:endParaRPr lang="en-SG"/>
+          </a:p>
+        </p:txBody>
       </p:sp>
       <p:sp>
         <p:nvSpPr>
@@ -13702,7 +14400,7 @@
           <a:bodyPr wrap="square" lIns="0" tIns="0" rIns="0" bIns="0" rtlCol="0" anchor="ctr"/>
           <a:lstStyle/>
           <a:p>
-            <a:pPr algn="ctr" indent="0" marL="0">
+            <a:pPr marL="0" indent="0" algn="ctr">
               <a:buNone/>
             </a:pPr>
             <a:r>
@@ -13744,6 +14442,13 @@
             <a:prstDash val="solid"/>
           </a:ln>
         </p:spPr>
+        <p:txBody>
+          <a:bodyPr/>
+          <a:lstStyle/>
+          <a:p>
+            <a:endParaRPr lang="en-SG"/>
+          </a:p>
+        </p:txBody>
       </p:sp>
       <p:sp>
         <p:nvSpPr>
@@ -13766,7 +14471,7 @@
           <a:bodyPr wrap="square" lIns="0" tIns="0" rIns="0" bIns="0" rtlCol="0" anchor="ctr"/>
           <a:lstStyle/>
           <a:p>
-            <a:pPr algn="ctr" indent="0" marL="0">
+            <a:pPr marL="0" indent="0" algn="ctr">
               <a:buNone/>
             </a:pPr>
             <a:r>
@@ -13800,6 +14505,7 @@
         <a:solidFill>
           <a:srgbClr val="080C10"/>
         </a:solidFill>
+        <a:effectLst/>
       </p:bgPr>
     </p:bg>
     <p:spTree>
@@ -13840,17 +14546,24 @@
             <a:prstDash val="solid"/>
           </a:ln>
         </p:spPr>
+        <p:txBody>
+          <a:bodyPr/>
+          <a:lstStyle/>
+          <a:p>
+            <a:endParaRPr lang="en-SG"/>
+          </a:p>
+        </p:txBody>
       </p:sp>
       <p:pic>
         <p:nvPicPr>
-          <p:cNvPr id="3" name="Image 0" descr="preencoded.png">    </p:cNvPr>
+          <p:cNvPr id="3" name="Image 0" descr="preencoded.png"/>
           <p:cNvPicPr>
             <a:picLocks noChangeAspect="1"/>
           </p:cNvPicPr>
           <p:nvPr/>
         </p:nvPicPr>
         <p:blipFill>
-          <a:blip r:embed="rId1"/>
+          <a:blip r:embed="rId3"/>
           <a:stretch>
             <a:fillRect/>
           </a:stretch>
@@ -13886,7 +14599,7 @@
           <a:bodyPr wrap="square" lIns="0" tIns="0" rIns="0" bIns="0" rtlCol="0" anchor="ctr"/>
           <a:lstStyle/>
           <a:p>
-            <a:pPr algn="l" indent="0" marL="0">
+            <a:pPr marL="0" indent="0" algn="l">
               <a:buNone/>
             </a:pPr>
             <a:r>
@@ -13928,13 +14641,20 @@
             <a:prstDash val="solid"/>
           </a:ln>
           <a:effectLst>
-            <a:outerShdw sx="100000" sy="100000" kx="0" ky="0" algn="bl" rotWithShape="0" blurRad="127000" dist="38100" dir="8100000">
+            <a:outerShdw blurRad="127000" dist="38100" dir="8100000" algn="bl" rotWithShape="0">
               <a:srgbClr val="000000">
                 <a:alpha val="25000"/>
               </a:srgbClr>
             </a:outerShdw>
           </a:effectLst>
         </p:spPr>
+        <p:txBody>
+          <a:bodyPr/>
+          <a:lstStyle/>
+          <a:p>
+            <a:endParaRPr lang="en-SG"/>
+          </a:p>
+        </p:txBody>
       </p:sp>
       <p:sp>
         <p:nvSpPr>
@@ -13960,6 +14680,13 @@
             <a:prstDash val="solid"/>
           </a:ln>
         </p:spPr>
+        <p:txBody>
+          <a:bodyPr/>
+          <a:lstStyle/>
+          <a:p>
+            <a:endParaRPr lang="en-SG"/>
+          </a:p>
+        </p:txBody>
       </p:sp>
       <p:sp>
         <p:nvSpPr>
@@ -13985,6 +14712,13 @@
             <a:prstDash val="solid"/>
           </a:ln>
         </p:spPr>
+        <p:txBody>
+          <a:bodyPr/>
+          <a:lstStyle/>
+          <a:p>
+            <a:endParaRPr lang="en-SG"/>
+          </a:p>
+        </p:txBody>
       </p:sp>
       <p:sp>
         <p:nvSpPr>
@@ -14010,6 +14744,13 @@
             <a:prstDash val="solid"/>
           </a:ln>
         </p:spPr>
+        <p:txBody>
+          <a:bodyPr/>
+          <a:lstStyle/>
+          <a:p>
+            <a:endParaRPr lang="en-SG"/>
+          </a:p>
+        </p:txBody>
       </p:sp>
       <p:sp>
         <p:nvSpPr>
@@ -14035,6 +14776,13 @@
             <a:prstDash val="solid"/>
           </a:ln>
         </p:spPr>
+        <p:txBody>
+          <a:bodyPr/>
+          <a:lstStyle/>
+          <a:p>
+            <a:endParaRPr lang="en-SG"/>
+          </a:p>
+        </p:txBody>
       </p:sp>
       <p:sp>
         <p:nvSpPr>
@@ -14057,7 +14805,7 @@
           <a:bodyPr wrap="square" lIns="0" tIns="0" rIns="0" bIns="0" rtlCol="0" anchor="ctr"/>
           <a:lstStyle/>
           <a:p>
-            <a:pPr algn="ctr" indent="0" marL="0">
+            <a:pPr marL="0" indent="0" algn="ctr">
               <a:buNone/>
             </a:pPr>
             <a:r>
@@ -14096,7 +14844,7 @@
           <a:bodyPr wrap="square" lIns="0" tIns="0" rIns="0" bIns="0" rtlCol="0" anchor="ctr"/>
           <a:lstStyle/>
           <a:p>
-            <a:pPr indent="0" marL="0">
+            <a:pPr marL="0" indent="0">
               <a:buNone/>
             </a:pPr>
             <a:r>
@@ -14113,7 +14861,7 @@
             <a:endParaRPr lang="en-US" sz="1250" dirty="0"/>
           </a:p>
           <a:p>
-            <a:pPr indent="0" marL="0">
+            <a:pPr marL="0" indent="0">
               <a:buNone/>
             </a:pPr>
             <a:r>
@@ -14130,13 +14878,13 @@
             <a:endParaRPr lang="en-US" sz="1250" dirty="0"/>
           </a:p>
           <a:p>
-            <a:pPr indent="0" marL="0">
+            <a:pPr marL="0" indent="0">
               <a:buNone/>
             </a:pPr>
             <a:endParaRPr lang="en-US" sz="1250" dirty="0"/>
           </a:p>
           <a:p>
-            <a:pPr indent="0" marL="0">
+            <a:pPr marL="0" indent="0">
               <a:buNone/>
             </a:pPr>
             <a:r>
@@ -14153,7 +14901,7 @@
             <a:endParaRPr lang="en-US" sz="1250" dirty="0"/>
           </a:p>
           <a:p>
-            <a:pPr indent="0" marL="0">
+            <a:pPr marL="0" indent="0">
               <a:buNone/>
             </a:pPr>
             <a:r>
@@ -14170,13 +14918,13 @@
             <a:endParaRPr lang="en-US" sz="1250" dirty="0"/>
           </a:p>
           <a:p>
-            <a:pPr indent="0" marL="0">
+            <a:pPr marL="0" indent="0">
               <a:buNone/>
             </a:pPr>
             <a:endParaRPr lang="en-US" sz="1250" dirty="0"/>
           </a:p>
           <a:p>
-            <a:pPr indent="0" marL="0">
+            <a:pPr marL="0" indent="0">
               <a:buNone/>
             </a:pPr>
             <a:r>
@@ -14193,7 +14941,7 @@
             <a:endParaRPr lang="en-US" sz="1250" dirty="0"/>
           </a:p>
           <a:p>
-            <a:pPr indent="0" marL="0">
+            <a:pPr marL="0" indent="0">
               <a:buNone/>
             </a:pPr>
             <a:r>
@@ -14210,13 +14958,13 @@
             <a:endParaRPr lang="en-US" sz="1250" dirty="0"/>
           </a:p>
           <a:p>
-            <a:pPr indent="0" marL="0">
+            <a:pPr marL="0" indent="0">
               <a:buNone/>
             </a:pPr>
             <a:endParaRPr lang="en-US" sz="1250" dirty="0"/>
           </a:p>
           <a:p>
-            <a:pPr indent="0" marL="0">
+            <a:pPr marL="0" indent="0">
               <a:buNone/>
             </a:pPr>
             <a:r>
@@ -14233,7 +14981,7 @@
             <a:endParaRPr lang="en-US" sz="1250" dirty="0"/>
           </a:p>
           <a:p>
-            <a:pPr indent="0" marL="0">
+            <a:pPr marL="0" indent="0">
               <a:buNone/>
             </a:pPr>
             <a:r>
@@ -14250,7 +14998,7 @@
             <a:endParaRPr lang="en-US" sz="1250" dirty="0"/>
           </a:p>
           <a:p>
-            <a:pPr indent="0" marL="0">
+            <a:pPr marL="0" indent="0">
               <a:buNone/>
             </a:pPr>
             <a:r>
@@ -14267,7 +15015,7 @@
             <a:endParaRPr lang="en-US" sz="1250" dirty="0"/>
           </a:p>
           <a:p>
-            <a:pPr indent="0" marL="0">
+            <a:pPr marL="0" indent="0">
               <a:buNone/>
             </a:pPr>
             <a:r>
@@ -14284,7 +15032,7 @@
             <a:endParaRPr lang="en-US" sz="1250" dirty="0"/>
           </a:p>
           <a:p>
-            <a:pPr indent="0" marL="0">
+            <a:pPr marL="0" indent="0">
               <a:buNone/>
             </a:pPr>
             <a:r>
@@ -14301,7 +15049,7 @@
             <a:endParaRPr lang="en-US" sz="1250" dirty="0"/>
           </a:p>
           <a:p>
-            <a:pPr indent="0" marL="0">
+            <a:pPr marL="0" indent="0">
               <a:buNone/>
             </a:pPr>
             <a:r>
@@ -14318,13 +15066,13 @@
             <a:endParaRPr lang="en-US" sz="1250" dirty="0"/>
           </a:p>
           <a:p>
-            <a:pPr indent="0" marL="0">
+            <a:pPr marL="0" indent="0">
               <a:buNone/>
             </a:pPr>
             <a:endParaRPr lang="en-US" sz="1250" dirty="0"/>
           </a:p>
           <a:p>
-            <a:pPr indent="0" marL="0">
+            <a:pPr marL="0" indent="0">
               <a:buNone/>
             </a:pPr>
             <a:r>
@@ -14341,7 +15089,7 @@
             <a:endParaRPr lang="en-US" sz="1250" dirty="0"/>
           </a:p>
           <a:p>
-            <a:pPr indent="0" marL="0">
+            <a:pPr marL="0" indent="0">
               <a:buNone/>
             </a:pPr>
             <a:r>
@@ -14358,7 +15106,7 @@
             <a:endParaRPr lang="en-US" sz="1250" dirty="0"/>
           </a:p>
           <a:p>
-            <a:pPr indent="0" marL="0">
+            <a:pPr marL="0" indent="0">
               <a:buNone/>
             </a:pPr>
             <a:r>
@@ -14400,6 +15148,13 @@
             <a:prstDash val="solid"/>
           </a:ln>
         </p:spPr>
+        <p:txBody>
+          <a:bodyPr/>
+          <a:lstStyle/>
+          <a:p>
+            <a:endParaRPr lang="en-SG"/>
+          </a:p>
+        </p:txBody>
       </p:sp>
       <p:sp>
         <p:nvSpPr>
@@ -14422,7 +15177,7 @@
           <a:bodyPr wrap="square" lIns="0" tIns="0" rIns="0" bIns="0" rtlCol="0" anchor="ctr"/>
           <a:lstStyle/>
           <a:p>
-            <a:pPr indent="0" marL="0">
+            <a:pPr marL="0" indent="0">
               <a:buNone/>
             </a:pPr>
             <a:r>
@@ -14461,7 +15216,7 @@
           <a:bodyPr wrap="square" lIns="0" tIns="0" rIns="0" bIns="0" rtlCol="0" anchor="ctr"/>
           <a:lstStyle/>
           <a:p>
-            <a:pPr indent="0" marL="0">
+            <a:pPr marL="0" indent="0">
               <a:buNone/>
             </a:pPr>
             <a:r>
@@ -14503,6 +15258,13 @@
             <a:prstDash val="solid"/>
           </a:ln>
         </p:spPr>
+        <p:txBody>
+          <a:bodyPr/>
+          <a:lstStyle/>
+          <a:p>
+            <a:endParaRPr lang="en-SG"/>
+          </a:p>
+        </p:txBody>
       </p:sp>
       <p:sp>
         <p:nvSpPr>
@@ -14528,6 +15290,13 @@
             <a:prstDash val="solid"/>
           </a:ln>
         </p:spPr>
+        <p:txBody>
+          <a:bodyPr/>
+          <a:lstStyle/>
+          <a:p>
+            <a:endParaRPr lang="en-SG"/>
+          </a:p>
+        </p:txBody>
       </p:sp>
       <p:sp>
         <p:nvSpPr>
@@ -14550,7 +15319,7 @@
           <a:bodyPr wrap="square" lIns="0" tIns="0" rIns="0" bIns="0" rtlCol="0" anchor="ctr"/>
           <a:lstStyle/>
           <a:p>
-            <a:pPr indent="0" marL="0">
+            <a:pPr marL="0" indent="0">
               <a:buNone/>
             </a:pPr>
             <a:r>
@@ -14589,7 +15358,7 @@
           <a:bodyPr wrap="square" lIns="0" tIns="0" rIns="0" bIns="0" rtlCol="0" anchor="ctr"/>
           <a:lstStyle/>
           <a:p>
-            <a:pPr indent="0" marL="0">
+            <a:pPr marL="0" indent="0">
               <a:buNone/>
             </a:pPr>
             <a:r>
@@ -14631,6 +15400,13 @@
             <a:prstDash val="solid"/>
           </a:ln>
         </p:spPr>
+        <p:txBody>
+          <a:bodyPr/>
+          <a:lstStyle/>
+          <a:p>
+            <a:endParaRPr lang="en-SG"/>
+          </a:p>
+        </p:txBody>
       </p:sp>
       <p:sp>
         <p:nvSpPr>
@@ -14653,7 +15429,7 @@
           <a:bodyPr wrap="square" lIns="0" tIns="0" rIns="0" bIns="0" rtlCol="0" anchor="ctr"/>
           <a:lstStyle/>
           <a:p>
-            <a:pPr algn="ctr" indent="0" marL="0">
+            <a:pPr marL="0" indent="0" algn="ctr">
               <a:buNone/>
             </a:pPr>
             <a:r>
@@ -14695,6 +15471,13 @@
             <a:prstDash val="solid"/>
           </a:ln>
         </p:spPr>
+        <p:txBody>
+          <a:bodyPr/>
+          <a:lstStyle/>
+          <a:p>
+            <a:endParaRPr lang="en-SG"/>
+          </a:p>
+        </p:txBody>
       </p:sp>
       <p:sp>
         <p:nvSpPr>
@@ -14717,7 +15500,7 @@
           <a:bodyPr wrap="square" lIns="0" tIns="0" rIns="0" bIns="0" rtlCol="0" anchor="ctr"/>
           <a:lstStyle/>
           <a:p>
-            <a:pPr algn="ctr" indent="0" marL="0">
+            <a:pPr marL="0" indent="0" algn="ctr">
               <a:buNone/>
             </a:pPr>
             <a:r>
@@ -14751,6 +15534,7 @@
         <a:solidFill>
           <a:srgbClr val="080C10"/>
         </a:solidFill>
+        <a:effectLst/>
       </p:bgPr>
     </p:bg>
     <p:spTree>
@@ -14791,17 +15575,24 @@
             <a:prstDash val="solid"/>
           </a:ln>
         </p:spPr>
+        <p:txBody>
+          <a:bodyPr/>
+          <a:lstStyle/>
+          <a:p>
+            <a:endParaRPr lang="en-SG"/>
+          </a:p>
+        </p:txBody>
       </p:sp>
       <p:pic>
         <p:nvPicPr>
-          <p:cNvPr id="3" name="Image 0" descr="preencoded.png">    </p:cNvPr>
+          <p:cNvPr id="3" name="Image 0" descr="preencoded.png"/>
           <p:cNvPicPr>
             <a:picLocks noChangeAspect="1"/>
           </p:cNvPicPr>
           <p:nvPr/>
         </p:nvPicPr>
         <p:blipFill>
-          <a:blip r:embed="rId1"/>
+          <a:blip r:embed="rId3"/>
           <a:stretch>
             <a:fillRect/>
           </a:stretch>
@@ -14837,7 +15628,7 @@
           <a:bodyPr wrap="square" lIns="0" tIns="0" rIns="0" bIns="0" rtlCol="0" anchor="ctr"/>
           <a:lstStyle/>
           <a:p>
-            <a:pPr algn="l" indent="0" marL="0">
+            <a:pPr marL="0" indent="0" algn="l">
               <a:buNone/>
             </a:pPr>
             <a:r>
@@ -14879,13 +15670,20 @@
             <a:prstDash val="solid"/>
           </a:ln>
           <a:effectLst>
-            <a:outerShdw sx="100000" sy="100000" kx="0" ky="0" algn="bl" rotWithShape="0" blurRad="127000" dist="38100" dir="8100000">
+            <a:outerShdw blurRad="127000" dist="38100" dir="8100000" algn="bl" rotWithShape="0">
               <a:srgbClr val="000000">
                 <a:alpha val="25000"/>
               </a:srgbClr>
             </a:outerShdw>
           </a:effectLst>
         </p:spPr>
+        <p:txBody>
+          <a:bodyPr/>
+          <a:lstStyle/>
+          <a:p>
+            <a:endParaRPr lang="en-SG"/>
+          </a:p>
+        </p:txBody>
       </p:sp>
       <p:sp>
         <p:nvSpPr>
@@ -14911,6 +15709,13 @@
             <a:prstDash val="solid"/>
           </a:ln>
         </p:spPr>
+        <p:txBody>
+          <a:bodyPr/>
+          <a:lstStyle/>
+          <a:p>
+            <a:endParaRPr lang="en-SG"/>
+          </a:p>
+        </p:txBody>
       </p:sp>
       <p:sp>
         <p:nvSpPr>
@@ -14936,6 +15741,13 @@
             <a:prstDash val="solid"/>
           </a:ln>
         </p:spPr>
+        <p:txBody>
+          <a:bodyPr/>
+          <a:lstStyle/>
+          <a:p>
+            <a:endParaRPr lang="en-SG"/>
+          </a:p>
+        </p:txBody>
       </p:sp>
       <p:sp>
         <p:nvSpPr>
@@ -14961,6 +15773,13 @@
             <a:prstDash val="solid"/>
           </a:ln>
         </p:spPr>
+        <p:txBody>
+          <a:bodyPr/>
+          <a:lstStyle/>
+          <a:p>
+            <a:endParaRPr lang="en-SG"/>
+          </a:p>
+        </p:txBody>
       </p:sp>
       <p:sp>
         <p:nvSpPr>
@@ -14986,6 +15805,13 @@
             <a:prstDash val="solid"/>
           </a:ln>
         </p:spPr>
+        <p:txBody>
+          <a:bodyPr/>
+          <a:lstStyle/>
+          <a:p>
+            <a:endParaRPr lang="en-SG"/>
+          </a:p>
+        </p:txBody>
       </p:sp>
       <p:sp>
         <p:nvSpPr>
@@ -15008,7 +15834,7 @@
           <a:bodyPr wrap="square" lIns="0" tIns="0" rIns="0" bIns="0" rtlCol="0" anchor="ctr"/>
           <a:lstStyle/>
           <a:p>
-            <a:pPr algn="ctr" indent="0" marL="0">
+            <a:pPr marL="0" indent="0" algn="ctr">
               <a:buNone/>
             </a:pPr>
             <a:r>
@@ -15047,11 +15873,11 @@
           <a:bodyPr wrap="square" lIns="0" tIns="0" rIns="0" bIns="0" rtlCol="0" anchor="ctr"/>
           <a:lstStyle/>
           <a:p>
-            <a:pPr indent="0" marL="0">
-              <a:buNone/>
-            </a:pPr>
-            <a:r>
-              <a:rPr lang="en-US" sz="1250" dirty="0">
+            <a:pPr marL="0" indent="0">
+              <a:buNone/>
+            </a:pPr>
+            <a:r>
+              <a:rPr lang="en-US" sz="1200" dirty="0">
                 <a:solidFill>
                   <a:srgbClr val="3DDC84"/>
                 </a:solidFill>
@@ -15061,14 +15887,14 @@
               </a:rPr>
               <a:t># input() always returns a STRING</a:t>
             </a:r>
-            <a:endParaRPr lang="en-US" sz="1250" dirty="0"/>
-          </a:p>
-          <a:p>
-            <a:pPr indent="0" marL="0">
-              <a:buNone/>
-            </a:pPr>
-            <a:r>
-              <a:rPr lang="en-US" sz="1250" dirty="0">
+            <a:endParaRPr lang="en-US" sz="1200" dirty="0"/>
+          </a:p>
+          <a:p>
+            <a:pPr marL="0" indent="0">
+              <a:buNone/>
+            </a:pPr>
+            <a:r>
+              <a:rPr lang="en-US" sz="1200" dirty="0">
                 <a:solidFill>
                   <a:srgbClr val="3DDC84"/>
                 </a:solidFill>
@@ -15078,14 +15904,14 @@
               </a:rPr>
               <a:t>name    = input("What is your name? ")</a:t>
             </a:r>
-            <a:endParaRPr lang="en-US" sz="1250" dirty="0"/>
-          </a:p>
-          <a:p>
-            <a:pPr indent="0" marL="0">
-              <a:buNone/>
-            </a:pPr>
-            <a:r>
-              <a:rPr lang="en-US" sz="1250" dirty="0">
+            <a:endParaRPr lang="en-US" sz="1200" dirty="0"/>
+          </a:p>
+          <a:p>
+            <a:pPr marL="0" indent="0">
+              <a:buNone/>
+            </a:pPr>
+            <a:r>
+              <a:rPr lang="en-US" sz="1200" dirty="0">
                 <a:solidFill>
                   <a:srgbClr val="3DDC84"/>
                 </a:solidFill>
@@ -15095,20 +15921,20 @@
               </a:rPr>
               <a:t>age_str = input("How old are you? ")</a:t>
             </a:r>
-            <a:endParaRPr lang="en-US" sz="1250" dirty="0"/>
-          </a:p>
-          <a:p>
-            <a:pPr indent="0" marL="0">
-              <a:buNone/>
-            </a:pPr>
-            <a:endParaRPr lang="en-US" sz="1250" dirty="0"/>
-          </a:p>
-          <a:p>
-            <a:pPr indent="0" marL="0">
-              <a:buNone/>
-            </a:pPr>
-            <a:r>
-              <a:rPr lang="en-US" sz="1250" dirty="0">
+            <a:endParaRPr lang="en-US" sz="1200" dirty="0"/>
+          </a:p>
+          <a:p>
+            <a:pPr marL="0" indent="0">
+              <a:buNone/>
+            </a:pPr>
+            <a:endParaRPr lang="en-US" sz="1200" dirty="0"/>
+          </a:p>
+          <a:p>
+            <a:pPr marL="0" indent="0">
+              <a:buNone/>
+            </a:pPr>
+            <a:r>
+              <a:rPr lang="en-US" sz="1200" dirty="0">
                 <a:solidFill>
                   <a:srgbClr val="3DDC84"/>
                 </a:solidFill>
@@ -15118,14 +15944,14 @@
               </a:rPr>
               <a:t># Convert to int for calculations</a:t>
             </a:r>
-            <a:endParaRPr lang="en-US" sz="1250" dirty="0"/>
-          </a:p>
-          <a:p>
-            <a:pPr indent="0" marL="0">
-              <a:buNone/>
-            </a:pPr>
-            <a:r>
-              <a:rPr lang="en-US" sz="1250" dirty="0">
+            <a:endParaRPr lang="en-US" sz="1200" dirty="0"/>
+          </a:p>
+          <a:p>
+            <a:pPr marL="0" indent="0">
+              <a:buNone/>
+            </a:pPr>
+            <a:r>
+              <a:rPr lang="en-US" sz="1200" dirty="0">
                 <a:solidFill>
                   <a:srgbClr val="3DDC84"/>
                 </a:solidFill>
@@ -15135,14 +15961,14 @@
               </a:rPr>
               <a:t>age        = int(age_str)</a:t>
             </a:r>
-            <a:endParaRPr lang="en-US" sz="1250" dirty="0"/>
-          </a:p>
-          <a:p>
-            <a:pPr indent="0" marL="0">
-              <a:buNone/>
-            </a:pPr>
-            <a:r>
-              <a:rPr lang="en-US" sz="1250" dirty="0">
+            <a:endParaRPr lang="en-US" sz="1200" dirty="0"/>
+          </a:p>
+          <a:p>
+            <a:pPr marL="0" indent="0">
+              <a:buNone/>
+            </a:pPr>
+            <a:r>
+              <a:rPr lang="en-US" sz="1200" dirty="0">
                 <a:solidFill>
                   <a:srgbClr val="3DDC84"/>
                 </a:solidFill>
@@ -15152,20 +15978,20 @@
               </a:rPr>
               <a:t>birth_year = 2026 - age</a:t>
             </a:r>
-            <a:endParaRPr lang="en-US" sz="1250" dirty="0"/>
-          </a:p>
-          <a:p>
-            <a:pPr indent="0" marL="0">
-              <a:buNone/>
-            </a:pPr>
-            <a:endParaRPr lang="en-US" sz="1250" dirty="0"/>
-          </a:p>
-          <a:p>
-            <a:pPr indent="0" marL="0">
-              <a:buNone/>
-            </a:pPr>
-            <a:r>
-              <a:rPr lang="en-US" sz="1250" dirty="0">
+            <a:endParaRPr lang="en-US" sz="1200" dirty="0"/>
+          </a:p>
+          <a:p>
+            <a:pPr marL="0" indent="0">
+              <a:buNone/>
+            </a:pPr>
+            <a:endParaRPr lang="en-US" sz="1200" dirty="0"/>
+          </a:p>
+          <a:p>
+            <a:pPr marL="0" indent="0">
+              <a:buNone/>
+            </a:pPr>
+            <a:r>
+              <a:rPr lang="en-US" sz="1200" dirty="0">
                 <a:solidFill>
                   <a:srgbClr val="3DDC84"/>
                 </a:solidFill>
@@ -15175,14 +16001,14 @@
               </a:rPr>
               <a:t>print(f"Hello, {name}!")</a:t>
             </a:r>
-            <a:endParaRPr lang="en-US" sz="1250" dirty="0"/>
-          </a:p>
-          <a:p>
-            <a:pPr indent="0" marL="0">
-              <a:buNone/>
-            </a:pPr>
-            <a:r>
-              <a:rPr lang="en-US" sz="1250" dirty="0">
+            <a:endParaRPr lang="en-US" sz="1200" dirty="0"/>
+          </a:p>
+          <a:p>
+            <a:pPr marL="0" indent="0">
+              <a:buNone/>
+            </a:pPr>
+            <a:r>
+              <a:rPr lang="en-US" sz="1200" dirty="0">
                 <a:solidFill>
                   <a:srgbClr val="3DDC84"/>
                 </a:solidFill>
@@ -15192,20 +16018,20 @@
               </a:rPr>
               <a:t>print(f"You were born around {birth_year}.")</a:t>
             </a:r>
-            <a:endParaRPr lang="en-US" sz="1250" dirty="0"/>
-          </a:p>
-          <a:p>
-            <a:pPr indent="0" marL="0">
-              <a:buNone/>
-            </a:pPr>
-            <a:endParaRPr lang="en-US" sz="1250" dirty="0"/>
-          </a:p>
-          <a:p>
-            <a:pPr indent="0" marL="0">
-              <a:buNone/>
-            </a:pPr>
-            <a:r>
-              <a:rPr lang="en-US" sz="1250" dirty="0">
+            <a:endParaRPr lang="en-US" sz="1200" dirty="0"/>
+          </a:p>
+          <a:p>
+            <a:pPr marL="0" indent="0">
+              <a:buNone/>
+            </a:pPr>
+            <a:endParaRPr lang="en-US" sz="1200" dirty="0"/>
+          </a:p>
+          <a:p>
+            <a:pPr marL="0" indent="0">
+              <a:buNone/>
+            </a:pPr>
+            <a:r>
+              <a:rPr lang="en-US" sz="1200" dirty="0">
                 <a:solidFill>
                   <a:srgbClr val="3DDC84"/>
                 </a:solidFill>
@@ -15215,14 +16041,14 @@
               </a:rPr>
               <a:t># Inline casting (common shorthand)</a:t>
             </a:r>
-            <a:endParaRPr lang="en-US" sz="1250" dirty="0"/>
-          </a:p>
-          <a:p>
-            <a:pPr indent="0" marL="0">
-              <a:buNone/>
-            </a:pPr>
-            <a:r>
-              <a:rPr lang="en-US" sz="1250" dirty="0">
+            <a:endParaRPr lang="en-US" sz="1200" dirty="0"/>
+          </a:p>
+          <a:p>
+            <a:pPr marL="0" indent="0">
+              <a:buNone/>
+            </a:pPr>
+            <a:r>
+              <a:rPr lang="en-US" sz="1200" dirty="0">
                 <a:solidFill>
                   <a:srgbClr val="3DDC84"/>
                 </a:solidFill>
@@ -15232,14 +16058,14 @@
               </a:rPr>
               <a:t>score = float(input("Enter your score: "))</a:t>
             </a:r>
-            <a:endParaRPr lang="en-US" sz="1250" dirty="0"/>
-          </a:p>
-          <a:p>
-            <a:pPr indent="0" marL="0">
-              <a:buNone/>
-            </a:pPr>
-            <a:r>
-              <a:rPr lang="en-US" sz="1250" dirty="0">
+            <a:endParaRPr lang="en-US" sz="1200" dirty="0"/>
+          </a:p>
+          <a:p>
+            <a:pPr marL="0" indent="0">
+              <a:buNone/>
+            </a:pPr>
+            <a:r>
+              <a:rPr lang="en-US" sz="1200" dirty="0">
                 <a:solidFill>
                   <a:srgbClr val="3DDC84"/>
                 </a:solidFill>
@@ -15249,20 +16075,20 @@
               </a:rPr>
               <a:t>print(f"Score: {score:.1f}%")</a:t>
             </a:r>
-            <a:endParaRPr lang="en-US" sz="1250" dirty="0"/>
-          </a:p>
-          <a:p>
-            <a:pPr indent="0" marL="0">
-              <a:buNone/>
-            </a:pPr>
-            <a:endParaRPr lang="en-US" sz="1250" dirty="0"/>
-          </a:p>
-          <a:p>
-            <a:pPr indent="0" marL="0">
-              <a:buNone/>
-            </a:pPr>
-            <a:r>
-              <a:rPr lang="en-US" sz="1250" dirty="0">
+            <a:endParaRPr lang="en-US" sz="1200" dirty="0"/>
+          </a:p>
+          <a:p>
+            <a:pPr marL="0" indent="0">
+              <a:buNone/>
+            </a:pPr>
+            <a:endParaRPr lang="en-US" sz="1200" dirty="0"/>
+          </a:p>
+          <a:p>
+            <a:pPr marL="0" indent="0">
+              <a:buNone/>
+            </a:pPr>
+            <a:r>
+              <a:rPr lang="en-US" sz="1200" dirty="0">
                 <a:solidFill>
                   <a:srgbClr val="3DDC84"/>
                 </a:solidFill>
@@ -15272,14 +16098,14 @@
               </a:rPr>
               <a:t># ── Run output ──────────────────────────</a:t>
             </a:r>
-            <a:endParaRPr lang="en-US" sz="1250" dirty="0"/>
-          </a:p>
-          <a:p>
-            <a:pPr indent="0" marL="0">
-              <a:buNone/>
-            </a:pPr>
-            <a:r>
-              <a:rPr lang="en-US" sz="1250" dirty="0">
+            <a:endParaRPr lang="en-US" sz="1200" dirty="0"/>
+          </a:p>
+          <a:p>
+            <a:pPr marL="0" indent="0">
+              <a:buNone/>
+            </a:pPr>
+            <a:r>
+              <a:rPr lang="en-US" sz="1200" dirty="0">
                 <a:solidFill>
                   <a:srgbClr val="3DDC84"/>
                 </a:solidFill>
@@ -15289,14 +16115,14 @@
               </a:rPr>
               <a:t># What is your name?  Aisha</a:t>
             </a:r>
-            <a:endParaRPr lang="en-US" sz="1250" dirty="0"/>
-          </a:p>
-          <a:p>
-            <a:pPr indent="0" marL="0">
-              <a:buNone/>
-            </a:pPr>
-            <a:r>
-              <a:rPr lang="en-US" sz="1250" dirty="0">
+            <a:endParaRPr lang="en-US" sz="1200" dirty="0"/>
+          </a:p>
+          <a:p>
+            <a:pPr marL="0" indent="0">
+              <a:buNone/>
+            </a:pPr>
+            <a:r>
+              <a:rPr lang="en-US" sz="1200" dirty="0">
                 <a:solidFill>
                   <a:srgbClr val="3DDC84"/>
                 </a:solidFill>
@@ -15306,14 +16132,14 @@
               </a:rPr>
               <a:t># How old are you?    16</a:t>
             </a:r>
-            <a:endParaRPr lang="en-US" sz="1250" dirty="0"/>
-          </a:p>
-          <a:p>
-            <a:pPr indent="0" marL="0">
-              <a:buNone/>
-            </a:pPr>
-            <a:r>
-              <a:rPr lang="en-US" sz="1250" dirty="0">
+            <a:endParaRPr lang="en-US" sz="1200" dirty="0"/>
+          </a:p>
+          <a:p>
+            <a:pPr marL="0" indent="0">
+              <a:buNone/>
+            </a:pPr>
+            <a:r>
+              <a:rPr lang="en-US" sz="1200" dirty="0">
                 <a:solidFill>
                   <a:srgbClr val="3DDC84"/>
                 </a:solidFill>
@@ -15323,14 +16149,14 @@
               </a:rPr>
               <a:t># Hello, Aisha!</a:t>
             </a:r>
-            <a:endParaRPr lang="en-US" sz="1250" dirty="0"/>
-          </a:p>
-          <a:p>
-            <a:pPr indent="0" marL="0">
-              <a:buNone/>
-            </a:pPr>
-            <a:r>
-              <a:rPr lang="en-US" sz="1250" dirty="0">
+            <a:endParaRPr lang="en-US" sz="1200" dirty="0"/>
+          </a:p>
+          <a:p>
+            <a:pPr marL="0" indent="0">
+              <a:buNone/>
+            </a:pPr>
+            <a:r>
+              <a:rPr lang="en-US" sz="1200" dirty="0">
                 <a:solidFill>
                   <a:srgbClr val="3DDC84"/>
                 </a:solidFill>
@@ -15340,7 +16166,7 @@
               </a:rPr>
               <a:t># You were born around 2010.</a:t>
             </a:r>
-            <a:endParaRPr lang="en-US" sz="1250" dirty="0"/>
+            <a:endParaRPr lang="en-US" sz="1200" dirty="0"/>
           </a:p>
         </p:txBody>
       </p:sp>
@@ -15368,6 +16194,13 @@
             <a:prstDash val="solid"/>
           </a:ln>
         </p:spPr>
+        <p:txBody>
+          <a:bodyPr/>
+          <a:lstStyle/>
+          <a:p>
+            <a:endParaRPr lang="en-SG"/>
+          </a:p>
+        </p:txBody>
       </p:sp>
       <p:sp>
         <p:nvSpPr>
@@ -15390,7 +16223,7 @@
           <a:bodyPr wrap="square" lIns="0" tIns="0" rIns="0" bIns="0" rtlCol="0" anchor="ctr"/>
           <a:lstStyle/>
           <a:p>
-            <a:pPr indent="0" marL="0">
+            <a:pPr marL="0" indent="0">
               <a:buNone/>
             </a:pPr>
             <a:r>
@@ -15429,7 +16262,7 @@
           <a:bodyPr wrap="square" lIns="0" tIns="0" rIns="0" bIns="0" rtlCol="0" anchor="ctr"/>
           <a:lstStyle/>
           <a:p>
-            <a:pPr indent="0" marL="0">
+            <a:pPr marL="0" indent="0">
               <a:buNone/>
             </a:pPr>
             <a:r>
@@ -15471,6 +16304,13 @@
             <a:prstDash val="solid"/>
           </a:ln>
         </p:spPr>
+        <p:txBody>
+          <a:bodyPr/>
+          <a:lstStyle/>
+          <a:p>
+            <a:endParaRPr lang="en-SG"/>
+          </a:p>
+        </p:txBody>
       </p:sp>
       <p:sp>
         <p:nvSpPr>
@@ -15496,6 +16336,13 @@
             <a:prstDash val="solid"/>
           </a:ln>
         </p:spPr>
+        <p:txBody>
+          <a:bodyPr/>
+          <a:lstStyle/>
+          <a:p>
+            <a:endParaRPr lang="en-SG"/>
+          </a:p>
+        </p:txBody>
       </p:sp>
       <p:sp>
         <p:nvSpPr>
@@ -15518,7 +16365,7 @@
           <a:bodyPr wrap="square" lIns="0" tIns="0" rIns="0" bIns="0" rtlCol="0" anchor="ctr"/>
           <a:lstStyle/>
           <a:p>
-            <a:pPr indent="0" marL="0">
+            <a:pPr marL="0" indent="0">
               <a:buNone/>
             </a:pPr>
             <a:r>
@@ -15557,7 +16404,7 @@
           <a:bodyPr wrap="square" lIns="0" tIns="0" rIns="0" bIns="0" rtlCol="0" anchor="ctr"/>
           <a:lstStyle/>
           <a:p>
-            <a:pPr indent="0" marL="0">
+            <a:pPr marL="0" indent="0">
               <a:buNone/>
             </a:pPr>
             <a:r>
@@ -15599,6 +16446,13 @@
             <a:prstDash val="solid"/>
           </a:ln>
         </p:spPr>
+        <p:txBody>
+          <a:bodyPr/>
+          <a:lstStyle/>
+          <a:p>
+            <a:endParaRPr lang="en-SG"/>
+          </a:p>
+        </p:txBody>
       </p:sp>
       <p:sp>
         <p:nvSpPr>
@@ -15621,7 +16475,7 @@
           <a:bodyPr wrap="square" lIns="0" tIns="0" rIns="0" bIns="0" rtlCol="0" anchor="ctr"/>
           <a:lstStyle/>
           <a:p>
-            <a:pPr algn="ctr" indent="0" marL="0">
+            <a:pPr marL="0" indent="0" algn="ctr">
               <a:buNone/>
             </a:pPr>
             <a:r>
@@ -15663,6 +16517,13 @@
             <a:prstDash val="solid"/>
           </a:ln>
         </p:spPr>
+        <p:txBody>
+          <a:bodyPr/>
+          <a:lstStyle/>
+          <a:p>
+            <a:endParaRPr lang="en-SG"/>
+          </a:p>
+        </p:txBody>
       </p:sp>
       <p:sp>
         <p:nvSpPr>
@@ -15685,7 +16546,7 @@
           <a:bodyPr wrap="square" lIns="0" tIns="0" rIns="0" bIns="0" rtlCol="0" anchor="ctr"/>
           <a:lstStyle/>
           <a:p>
-            <a:pPr algn="ctr" indent="0" marL="0">
+            <a:pPr marL="0" indent="0" algn="ctr">
               <a:buNone/>
             </a:pPr>
             <a:r>
@@ -15719,6 +16580,7 @@
         <a:solidFill>
           <a:srgbClr val="080C10"/>
         </a:solidFill>
+        <a:effectLst/>
       </p:bgPr>
     </p:bg>
     <p:spTree>
@@ -15759,17 +16621,24 @@
             <a:prstDash val="solid"/>
           </a:ln>
         </p:spPr>
+        <p:txBody>
+          <a:bodyPr/>
+          <a:lstStyle/>
+          <a:p>
+            <a:endParaRPr lang="en-SG"/>
+          </a:p>
+        </p:txBody>
       </p:sp>
       <p:pic>
         <p:nvPicPr>
-          <p:cNvPr id="3" name="Image 0" descr="preencoded.png">    </p:cNvPr>
+          <p:cNvPr id="3" name="Image 0" descr="preencoded.png"/>
           <p:cNvPicPr>
             <a:picLocks noChangeAspect="1"/>
           </p:cNvPicPr>
           <p:nvPr/>
         </p:nvPicPr>
         <p:blipFill>
-          <a:blip r:embed="rId1"/>
+          <a:blip r:embed="rId3"/>
           <a:stretch>
             <a:fillRect/>
           </a:stretch>
@@ -15805,7 +16674,7 @@
           <a:bodyPr wrap="square" lIns="0" tIns="0" rIns="0" bIns="0" rtlCol="0" anchor="ctr"/>
           <a:lstStyle/>
           <a:p>
-            <a:pPr algn="l" indent="0" marL="0">
+            <a:pPr marL="0" indent="0" algn="l">
               <a:buNone/>
             </a:pPr>
             <a:r>
@@ -15847,13 +16716,20 @@
             <a:prstDash val="solid"/>
           </a:ln>
           <a:effectLst>
-            <a:outerShdw sx="100000" sy="100000" kx="0" ky="0" algn="bl" rotWithShape="0" blurRad="127000" dist="38100" dir="8100000">
+            <a:outerShdw blurRad="127000" dist="38100" dir="8100000" algn="bl" rotWithShape="0">
               <a:srgbClr val="000000">
                 <a:alpha val="25000"/>
               </a:srgbClr>
             </a:outerShdw>
           </a:effectLst>
         </p:spPr>
+        <p:txBody>
+          <a:bodyPr/>
+          <a:lstStyle/>
+          <a:p>
+            <a:endParaRPr lang="en-SG"/>
+          </a:p>
+        </p:txBody>
       </p:sp>
       <p:sp>
         <p:nvSpPr>
@@ -15879,6 +16755,13 @@
             <a:prstDash val="solid"/>
           </a:ln>
         </p:spPr>
+        <p:txBody>
+          <a:bodyPr/>
+          <a:lstStyle/>
+          <a:p>
+            <a:endParaRPr lang="en-SG"/>
+          </a:p>
+        </p:txBody>
       </p:sp>
       <p:sp>
         <p:nvSpPr>
@@ -15901,7 +16784,7 @@
           <a:bodyPr wrap="square" lIns="0" tIns="0" rIns="0" bIns="0" rtlCol="0" anchor="ctr"/>
           <a:lstStyle/>
           <a:p>
-            <a:pPr indent="0" marL="0">
+            <a:pPr marL="0" indent="0">
               <a:buNone/>
             </a:pPr>
             <a:r>
@@ -15940,7 +16823,7 @@
           <a:bodyPr wrap="square" lIns="0" tIns="0" rIns="0" bIns="0" rtlCol="0" anchor="ctr"/>
           <a:lstStyle/>
           <a:p>
-            <a:pPr indent="0" marL="0">
+            <a:pPr marL="0" indent="0">
               <a:buNone/>
             </a:pPr>
             <a:r>
@@ -15957,13 +16840,13 @@
             <a:endParaRPr lang="en-US" sz="1200" dirty="0"/>
           </a:p>
           <a:p>
-            <a:pPr indent="0" marL="0">
-              <a:buNone/>
-            </a:pPr>
-            <a:endParaRPr lang="en-US" sz="1200" dirty="0"/>
-          </a:p>
-          <a:p>
-            <a:pPr indent="0" marL="0">
+            <a:pPr marL="0" indent="0">
+              <a:buNone/>
+            </a:pPr>
+            <a:endParaRPr lang="en-US" sz="1200" dirty="0"/>
+          </a:p>
+          <a:p>
+            <a:pPr marL="0" indent="0">
               <a:buNone/>
             </a:pPr>
             <a:r>
@@ -15980,7 +16863,7 @@
             <a:endParaRPr lang="en-US" sz="1200" dirty="0"/>
           </a:p>
           <a:p>
-            <a:pPr indent="0" marL="0">
+            <a:pPr marL="0" indent="0">
               <a:buNone/>
             </a:pPr>
             <a:r>
@@ -15997,7 +16880,7 @@
             <a:endParaRPr lang="en-US" sz="1200" dirty="0"/>
           </a:p>
           <a:p>
-            <a:pPr indent="0" marL="0">
+            <a:pPr marL="0" indent="0">
               <a:buNone/>
             </a:pPr>
             <a:r>
@@ -16014,7 +16897,7 @@
             <a:endParaRPr lang="en-US" sz="1200" dirty="0"/>
           </a:p>
           <a:p>
-            <a:pPr indent="0" marL="0">
+            <a:pPr marL="0" indent="0">
               <a:buNone/>
             </a:pPr>
             <a:r>
@@ -16031,7 +16914,7 @@
             <a:endParaRPr lang="en-US" sz="1200" dirty="0"/>
           </a:p>
           <a:p>
-            <a:pPr indent="0" marL="0">
+            <a:pPr marL="0" indent="0">
               <a:buNone/>
             </a:pPr>
             <a:r>
@@ -16048,7 +16931,7 @@
             <a:endParaRPr lang="en-US" sz="1200" dirty="0"/>
           </a:p>
           <a:p>
-            <a:pPr indent="0" marL="0">
+            <a:pPr marL="0" indent="0">
               <a:buNone/>
             </a:pPr>
             <a:r>
@@ -16065,7 +16948,7 @@
             <a:endParaRPr lang="en-US" sz="1200" dirty="0"/>
           </a:p>
           <a:p>
-            <a:pPr indent="0" marL="0">
+            <a:pPr marL="0" indent="0">
               <a:buNone/>
             </a:pPr>
             <a:r>
@@ -16082,13 +16965,13 @@
             <a:endParaRPr lang="en-US" sz="1200" dirty="0"/>
           </a:p>
           <a:p>
-            <a:pPr indent="0" marL="0">
-              <a:buNone/>
-            </a:pPr>
-            <a:endParaRPr lang="en-US" sz="1200" dirty="0"/>
-          </a:p>
-          <a:p>
-            <a:pPr indent="0" marL="0">
+            <a:pPr marL="0" indent="0">
+              <a:buNone/>
+            </a:pPr>
+            <a:endParaRPr lang="en-US" sz="1200" dirty="0"/>
+          </a:p>
+          <a:p>
+            <a:pPr marL="0" indent="0">
               <a:buNone/>
             </a:pPr>
             <a:r>
@@ -16105,7 +16988,7 @@
             <a:endParaRPr lang="en-US" sz="1200" dirty="0"/>
           </a:p>
           <a:p>
-            <a:pPr indent="0" marL="0">
+            <a:pPr marL="0" indent="0">
               <a:buNone/>
             </a:pPr>
             <a:r>
@@ -16147,13 +17030,20 @@
             <a:prstDash val="solid"/>
           </a:ln>
           <a:effectLst>
-            <a:outerShdw sx="100000" sy="100000" kx="0" ky="0" algn="bl" rotWithShape="0" blurRad="127000" dist="38100" dir="8100000">
+            <a:outerShdw blurRad="127000" dist="38100" dir="8100000" algn="bl" rotWithShape="0">
               <a:srgbClr val="000000">
                 <a:alpha val="25000"/>
               </a:srgbClr>
             </a:outerShdw>
           </a:effectLst>
         </p:spPr>
+        <p:txBody>
+          <a:bodyPr/>
+          <a:lstStyle/>
+          <a:p>
+            <a:endParaRPr lang="en-SG"/>
+          </a:p>
+        </p:txBody>
       </p:sp>
       <p:sp>
         <p:nvSpPr>
@@ -16179,6 +17069,13 @@
             <a:prstDash val="solid"/>
           </a:ln>
         </p:spPr>
+        <p:txBody>
+          <a:bodyPr/>
+          <a:lstStyle/>
+          <a:p>
+            <a:endParaRPr lang="en-SG"/>
+          </a:p>
+        </p:txBody>
       </p:sp>
       <p:sp>
         <p:nvSpPr>
@@ -16204,6 +17101,13 @@
             <a:prstDash val="solid"/>
           </a:ln>
         </p:spPr>
+        <p:txBody>
+          <a:bodyPr/>
+          <a:lstStyle/>
+          <a:p>
+            <a:endParaRPr lang="en-SG"/>
+          </a:p>
+        </p:txBody>
       </p:sp>
       <p:sp>
         <p:nvSpPr>
@@ -16229,6 +17133,13 @@
             <a:prstDash val="solid"/>
           </a:ln>
         </p:spPr>
+        <p:txBody>
+          <a:bodyPr/>
+          <a:lstStyle/>
+          <a:p>
+            <a:endParaRPr lang="en-SG"/>
+          </a:p>
+        </p:txBody>
       </p:sp>
       <p:sp>
         <p:nvSpPr>
@@ -16254,6 +17165,13 @@
             <a:prstDash val="solid"/>
           </a:ln>
         </p:spPr>
+        <p:txBody>
+          <a:bodyPr/>
+          <a:lstStyle/>
+          <a:p>
+            <a:endParaRPr lang="en-SG"/>
+          </a:p>
+        </p:txBody>
       </p:sp>
       <p:sp>
         <p:nvSpPr>
@@ -16276,7 +17194,7 @@
           <a:bodyPr wrap="square" lIns="0" tIns="0" rIns="0" bIns="0" rtlCol="0" anchor="ctr"/>
           <a:lstStyle/>
           <a:p>
-            <a:pPr algn="ctr" indent="0" marL="0">
+            <a:pPr marL="0" indent="0" algn="ctr">
               <a:buNone/>
             </a:pPr>
             <a:r>
@@ -16315,7 +17233,7 @@
           <a:bodyPr wrap="square" lIns="0" tIns="0" rIns="0" bIns="0" rtlCol="0" anchor="ctr"/>
           <a:lstStyle/>
           <a:p>
-            <a:pPr indent="0" marL="0">
+            <a:pPr marL="0" indent="0">
               <a:buNone/>
             </a:pPr>
             <a:r>
@@ -16332,7 +17250,7 @@
             <a:endParaRPr lang="en-US" sz="1200" dirty="0"/>
           </a:p>
           <a:p>
-            <a:pPr indent="0" marL="0">
+            <a:pPr marL="0" indent="0">
               <a:buNone/>
             </a:pPr>
             <a:r>
@@ -16349,7 +17267,7 @@
             <a:endParaRPr lang="en-US" sz="1200" dirty="0"/>
           </a:p>
           <a:p>
-            <a:pPr indent="0" marL="0">
+            <a:pPr marL="0" indent="0">
               <a:buNone/>
             </a:pPr>
             <a:r>
@@ -16366,13 +17284,13 @@
             <a:endParaRPr lang="en-US" sz="1200" dirty="0"/>
           </a:p>
           <a:p>
-            <a:pPr indent="0" marL="0">
-              <a:buNone/>
-            </a:pPr>
-            <a:endParaRPr lang="en-US" sz="1200" dirty="0"/>
-          </a:p>
-          <a:p>
-            <a:pPr indent="0" marL="0">
+            <a:pPr marL="0" indent="0">
+              <a:buNone/>
+            </a:pPr>
+            <a:endParaRPr lang="en-US" sz="1200" dirty="0"/>
+          </a:p>
+          <a:p>
+            <a:pPr marL="0" indent="0">
               <a:buNone/>
             </a:pPr>
             <a:r>
@@ -16389,7 +17307,7 @@
             <a:endParaRPr lang="en-US" sz="1200" dirty="0"/>
           </a:p>
           <a:p>
-            <a:pPr indent="0" marL="0">
+            <a:pPr marL="0" indent="0">
               <a:buNone/>
             </a:pPr>
             <a:r>
@@ -16406,7 +17324,7 @@
             <a:endParaRPr lang="en-US" sz="1200" dirty="0"/>
           </a:p>
           <a:p>
-            <a:pPr indent="0" marL="0">
+            <a:pPr marL="0" indent="0">
               <a:buNone/>
             </a:pPr>
             <a:r>
@@ -16423,13 +17341,13 @@
             <a:endParaRPr lang="en-US" sz="1200" dirty="0"/>
           </a:p>
           <a:p>
-            <a:pPr indent="0" marL="0">
-              <a:buNone/>
-            </a:pPr>
-            <a:endParaRPr lang="en-US" sz="1200" dirty="0"/>
-          </a:p>
-          <a:p>
-            <a:pPr indent="0" marL="0">
+            <a:pPr marL="0" indent="0">
+              <a:buNone/>
+            </a:pPr>
+            <a:endParaRPr lang="en-US" sz="1200" dirty="0"/>
+          </a:p>
+          <a:p>
+            <a:pPr marL="0" indent="0">
               <a:buNone/>
             </a:pPr>
             <a:r>
@@ -16446,7 +17364,7 @@
             <a:endParaRPr lang="en-US" sz="1200" dirty="0"/>
           </a:p>
           <a:p>
-            <a:pPr indent="0" marL="0">
+            <a:pPr marL="0" indent="0">
               <a:buNone/>
             </a:pPr>
             <a:r>
@@ -16463,7 +17381,7 @@
             <a:endParaRPr lang="en-US" sz="1200" dirty="0"/>
           </a:p>
           <a:p>
-            <a:pPr indent="0" marL="0">
+            <a:pPr marL="0" indent="0">
               <a:buNone/>
             </a:pPr>
             <a:r>
@@ -16480,13 +17398,13 @@
             <a:endParaRPr lang="en-US" sz="1200" dirty="0"/>
           </a:p>
           <a:p>
-            <a:pPr indent="0" marL="0">
-              <a:buNone/>
-            </a:pPr>
-            <a:endParaRPr lang="en-US" sz="1200" dirty="0"/>
-          </a:p>
-          <a:p>
-            <a:pPr indent="0" marL="0">
+            <a:pPr marL="0" indent="0">
+              <a:buNone/>
+            </a:pPr>
+            <a:endParaRPr lang="en-US" sz="1200" dirty="0"/>
+          </a:p>
+          <a:p>
+            <a:pPr marL="0" indent="0">
               <a:buNone/>
             </a:pPr>
             <a:r>
@@ -16503,7 +17421,7 @@
             <a:endParaRPr lang="en-US" sz="1200" dirty="0"/>
           </a:p>
           <a:p>
-            <a:pPr indent="0" marL="0">
+            <a:pPr marL="0" indent="0">
               <a:buNone/>
             </a:pPr>
             <a:r>
@@ -16520,7 +17438,7 @@
             <a:endParaRPr lang="en-US" sz="1200" dirty="0"/>
           </a:p>
           <a:p>
-            <a:pPr indent="0" marL="0">
+            <a:pPr marL="0" indent="0">
               <a:buNone/>
             </a:pPr>
             <a:r>
@@ -16537,7 +17455,7 @@
             <a:endParaRPr lang="en-US" sz="1200" dirty="0"/>
           </a:p>
           <a:p>
-            <a:pPr indent="0" marL="0">
+            <a:pPr marL="0" indent="0">
               <a:buNone/>
             </a:pPr>
             <a:r>
@@ -16554,7 +17472,7 @@
             <a:endParaRPr lang="en-US" sz="1200" dirty="0"/>
           </a:p>
           <a:p>
-            <a:pPr indent="0" marL="0">
+            <a:pPr marL="0" indent="0">
               <a:buNone/>
             </a:pPr>
             <a:r>
@@ -16571,7 +17489,7 @@
             <a:endParaRPr lang="en-US" sz="1200" dirty="0"/>
           </a:p>
           <a:p>
-            <a:pPr indent="0" marL="0">
+            <a:pPr marL="0" indent="0">
               <a:buNone/>
             </a:pPr>
             <a:r>
@@ -16613,6 +17531,13 @@
             <a:prstDash val="solid"/>
           </a:ln>
         </p:spPr>
+        <p:txBody>
+          <a:bodyPr/>
+          <a:lstStyle/>
+          <a:p>
+            <a:endParaRPr lang="en-SG"/>
+          </a:p>
+        </p:txBody>
       </p:sp>
       <p:sp>
         <p:nvSpPr>
@@ -16638,6 +17563,13 @@
             <a:prstDash val="solid"/>
           </a:ln>
         </p:spPr>
+        <p:txBody>
+          <a:bodyPr/>
+          <a:lstStyle/>
+          <a:p>
+            <a:endParaRPr lang="en-SG"/>
+          </a:p>
+        </p:txBody>
       </p:sp>
       <p:sp>
         <p:nvSpPr>
@@ -16660,7 +17592,7 @@
           <a:bodyPr wrap="square" lIns="0" tIns="0" rIns="0" bIns="0" rtlCol="0" anchor="ctr"/>
           <a:lstStyle/>
           <a:p>
-            <a:pPr indent="0" marL="0">
+            <a:pPr marL="0" indent="0">
               <a:buNone/>
             </a:pPr>
             <a:r>
@@ -16699,7 +17631,7 @@
           <a:bodyPr wrap="square" lIns="0" tIns="0" rIns="0" bIns="0" rtlCol="0" anchor="ctr"/>
           <a:lstStyle/>
           <a:p>
-            <a:pPr indent="0" marL="0">
+            <a:pPr marL="0" indent="0">
               <a:buNone/>
             </a:pPr>
             <a:r>
@@ -16741,6 +17673,13 @@
             <a:prstDash val="solid"/>
           </a:ln>
         </p:spPr>
+        <p:txBody>
+          <a:bodyPr/>
+          <a:lstStyle/>
+          <a:p>
+            <a:endParaRPr lang="en-SG"/>
+          </a:p>
+        </p:txBody>
       </p:sp>
       <p:sp>
         <p:nvSpPr>
@@ -16763,7 +17702,7 @@
           <a:bodyPr wrap="square" lIns="0" tIns="0" rIns="0" bIns="0" rtlCol="0" anchor="ctr"/>
           <a:lstStyle/>
           <a:p>
-            <a:pPr algn="ctr" indent="0" marL="0">
+            <a:pPr marL="0" indent="0" algn="ctr">
               <a:buNone/>
             </a:pPr>
             <a:r>
@@ -16805,6 +17744,13 @@
             <a:prstDash val="solid"/>
           </a:ln>
         </p:spPr>
+        <p:txBody>
+          <a:bodyPr/>
+          <a:lstStyle/>
+          <a:p>
+            <a:endParaRPr lang="en-SG"/>
+          </a:p>
+        </p:txBody>
       </p:sp>
       <p:sp>
         <p:nvSpPr>
@@ -16827,7 +17773,7 @@
           <a:bodyPr wrap="square" lIns="0" tIns="0" rIns="0" bIns="0" rtlCol="0" anchor="ctr"/>
           <a:lstStyle/>
           <a:p>
-            <a:pPr algn="ctr" indent="0" marL="0">
+            <a:pPr marL="0" indent="0" algn="ctr">
               <a:buNone/>
             </a:pPr>
             <a:r>
@@ -16861,6 +17807,7 @@
         <a:solidFill>
           <a:srgbClr val="080C10"/>
         </a:solidFill>
+        <a:effectLst/>
       </p:bgPr>
     </p:bg>
     <p:spTree>
@@ -16901,17 +17848,24 @@
             <a:prstDash val="solid"/>
           </a:ln>
         </p:spPr>
+        <p:txBody>
+          <a:bodyPr/>
+          <a:lstStyle/>
+          <a:p>
+            <a:endParaRPr lang="en-SG"/>
+          </a:p>
+        </p:txBody>
       </p:sp>
       <p:pic>
         <p:nvPicPr>
-          <p:cNvPr id="3" name="Image 0" descr="preencoded.png">    </p:cNvPr>
+          <p:cNvPr id="3" name="Image 0" descr="preencoded.png"/>
           <p:cNvPicPr>
             <a:picLocks noChangeAspect="1"/>
           </p:cNvPicPr>
           <p:nvPr/>
         </p:nvPicPr>
         <p:blipFill>
-          <a:blip r:embed="rId1"/>
+          <a:blip r:embed="rId3"/>
           <a:stretch>
             <a:fillRect/>
           </a:stretch>
@@ -16947,7 +17901,7 @@
           <a:bodyPr wrap="square" lIns="0" tIns="0" rIns="0" bIns="0" rtlCol="0" anchor="ctr"/>
           <a:lstStyle/>
           <a:p>
-            <a:pPr algn="l" indent="0" marL="0">
+            <a:pPr marL="0" indent="0" algn="l">
               <a:buNone/>
             </a:pPr>
             <a:r>
@@ -16989,13 +17943,20 @@
             <a:prstDash val="solid"/>
           </a:ln>
           <a:effectLst>
-            <a:outerShdw sx="100000" sy="100000" kx="0" ky="0" algn="bl" rotWithShape="0" blurRad="127000" dist="38100" dir="8100000">
+            <a:outerShdw blurRad="127000" dist="38100" dir="8100000" algn="bl" rotWithShape="0">
               <a:srgbClr val="000000">
                 <a:alpha val="25000"/>
               </a:srgbClr>
             </a:outerShdw>
           </a:effectLst>
         </p:spPr>
+        <p:txBody>
+          <a:bodyPr/>
+          <a:lstStyle/>
+          <a:p>
+            <a:endParaRPr lang="en-SG"/>
+          </a:p>
+        </p:txBody>
       </p:sp>
       <p:sp>
         <p:nvSpPr>
@@ -17021,6 +17982,13 @@
             <a:prstDash val="solid"/>
           </a:ln>
         </p:spPr>
+        <p:txBody>
+          <a:bodyPr/>
+          <a:lstStyle/>
+          <a:p>
+            <a:endParaRPr lang="en-SG"/>
+          </a:p>
+        </p:txBody>
       </p:sp>
       <p:sp>
         <p:nvSpPr>
@@ -17043,7 +18011,7 @@
           <a:bodyPr wrap="square" lIns="0" tIns="0" rIns="0" bIns="0" rtlCol="0" anchor="ctr"/>
           <a:lstStyle/>
           <a:p>
-            <a:pPr indent="0" marL="0">
+            <a:pPr marL="0" indent="0">
               <a:buNone/>
             </a:pPr>
             <a:r>
@@ -17082,7 +18050,7 @@
           <a:bodyPr wrap="square" lIns="0" tIns="0" rIns="0" bIns="0" rtlCol="0" anchor="ctr"/>
           <a:lstStyle/>
           <a:p>
-            <a:pPr indent="0" marL="0">
+            <a:pPr marL="0" indent="0">
               <a:buNone/>
             </a:pPr>
             <a:r>
@@ -17099,13 +18067,13 @@
             <a:endParaRPr lang="en-US" sz="1200" dirty="0"/>
           </a:p>
           <a:p>
-            <a:pPr indent="0" marL="0">
-              <a:buNone/>
-            </a:pPr>
-            <a:endParaRPr lang="en-US" sz="1200" dirty="0"/>
-          </a:p>
-          <a:p>
-            <a:pPr indent="0" marL="0">
+            <a:pPr marL="0" indent="0">
+              <a:buNone/>
+            </a:pPr>
+            <a:endParaRPr lang="en-US" sz="1200" dirty="0"/>
+          </a:p>
+          <a:p>
+            <a:pPr marL="0" indent="0">
               <a:buNone/>
             </a:pPr>
             <a:r>
@@ -17122,7 +18090,7 @@
             <a:endParaRPr lang="en-US" sz="1200" dirty="0"/>
           </a:p>
           <a:p>
-            <a:pPr indent="0" marL="0">
+            <a:pPr marL="0" indent="0">
               <a:buNone/>
             </a:pPr>
             <a:r>
@@ -17139,7 +18107,7 @@
             <a:endParaRPr lang="en-US" sz="1200" dirty="0"/>
           </a:p>
           <a:p>
-            <a:pPr indent="0" marL="0">
+            <a:pPr marL="0" indent="0">
               <a:buNone/>
             </a:pPr>
             <a:r>
@@ -17156,13 +18124,13 @@
             <a:endParaRPr lang="en-US" sz="1200" dirty="0"/>
           </a:p>
           <a:p>
-            <a:pPr indent="0" marL="0">
-              <a:buNone/>
-            </a:pPr>
-            <a:endParaRPr lang="en-US" sz="1200" dirty="0"/>
-          </a:p>
-          <a:p>
-            <a:pPr indent="0" marL="0">
+            <a:pPr marL="0" indent="0">
+              <a:buNone/>
+            </a:pPr>
+            <a:endParaRPr lang="en-US" sz="1200" dirty="0"/>
+          </a:p>
+          <a:p>
+            <a:pPr marL="0" indent="0">
               <a:buNone/>
             </a:pPr>
             <a:r>
@@ -17179,7 +18147,7 @@
             <a:endParaRPr lang="en-US" sz="1200" dirty="0"/>
           </a:p>
           <a:p>
-            <a:pPr indent="0" marL="0">
+            <a:pPr marL="0" indent="0">
               <a:buNone/>
             </a:pPr>
             <a:r>
@@ -17196,7 +18164,7 @@
             <a:endParaRPr lang="en-US" sz="1200" dirty="0"/>
           </a:p>
           <a:p>
-            <a:pPr indent="0" marL="0">
+            <a:pPr marL="0" indent="0">
               <a:buNone/>
             </a:pPr>
             <a:r>
@@ -17213,7 +18181,7 @@
             <a:endParaRPr lang="en-US" sz="1200" dirty="0"/>
           </a:p>
           <a:p>
-            <a:pPr indent="0" marL="0">
+            <a:pPr marL="0" indent="0">
               <a:buNone/>
             </a:pPr>
             <a:r>
@@ -17230,13 +18198,13 @@
             <a:endParaRPr lang="en-US" sz="1200" dirty="0"/>
           </a:p>
           <a:p>
-            <a:pPr indent="0" marL="0">
-              <a:buNone/>
-            </a:pPr>
-            <a:endParaRPr lang="en-US" sz="1200" dirty="0"/>
-          </a:p>
-          <a:p>
-            <a:pPr indent="0" marL="0">
+            <a:pPr marL="0" indent="0">
+              <a:buNone/>
+            </a:pPr>
+            <a:endParaRPr lang="en-US" sz="1200" dirty="0"/>
+          </a:p>
+          <a:p>
+            <a:pPr marL="0" indent="0">
               <a:buNone/>
             </a:pPr>
             <a:r>
@@ -17253,7 +18221,7 @@
             <a:endParaRPr lang="en-US" sz="1200" dirty="0"/>
           </a:p>
           <a:p>
-            <a:pPr indent="0" marL="0">
+            <a:pPr marL="0" indent="0">
               <a:buNone/>
             </a:pPr>
             <a:r>
@@ -17270,7 +18238,7 @@
             <a:endParaRPr lang="en-US" sz="1200" dirty="0"/>
           </a:p>
           <a:p>
-            <a:pPr indent="0" marL="0">
+            <a:pPr marL="0" indent="0">
               <a:buNone/>
             </a:pPr>
             <a:r>
@@ -17287,7 +18255,7 @@
             <a:endParaRPr lang="en-US" sz="1200" dirty="0"/>
           </a:p>
           <a:p>
-            <a:pPr indent="0" marL="0">
+            <a:pPr marL="0" indent="0">
               <a:buNone/>
             </a:pPr>
             <a:r>
@@ -17329,13 +18297,20 @@
             <a:prstDash val="solid"/>
           </a:ln>
           <a:effectLst>
-            <a:outerShdw sx="100000" sy="100000" kx="0" ky="0" algn="bl" rotWithShape="0" blurRad="127000" dist="38100" dir="8100000">
+            <a:outerShdw blurRad="127000" dist="38100" dir="8100000" algn="bl" rotWithShape="0">
               <a:srgbClr val="000000">
                 <a:alpha val="25000"/>
               </a:srgbClr>
             </a:outerShdw>
           </a:effectLst>
         </p:spPr>
+        <p:txBody>
+          <a:bodyPr/>
+          <a:lstStyle/>
+          <a:p>
+            <a:endParaRPr lang="en-SG"/>
+          </a:p>
+        </p:txBody>
       </p:sp>
       <p:sp>
         <p:nvSpPr>
@@ -17361,6 +18336,13 @@
             <a:prstDash val="solid"/>
           </a:ln>
         </p:spPr>
+        <p:txBody>
+          <a:bodyPr/>
+          <a:lstStyle/>
+          <a:p>
+            <a:endParaRPr lang="en-SG"/>
+          </a:p>
+        </p:txBody>
       </p:sp>
       <p:sp>
         <p:nvSpPr>
@@ -17386,6 +18368,13 @@
             <a:prstDash val="solid"/>
           </a:ln>
         </p:spPr>
+        <p:txBody>
+          <a:bodyPr/>
+          <a:lstStyle/>
+          <a:p>
+            <a:endParaRPr lang="en-SG"/>
+          </a:p>
+        </p:txBody>
       </p:sp>
       <p:sp>
         <p:nvSpPr>
@@ -17411,6 +18400,13 @@
             <a:prstDash val="solid"/>
           </a:ln>
         </p:spPr>
+        <p:txBody>
+          <a:bodyPr/>
+          <a:lstStyle/>
+          <a:p>
+            <a:endParaRPr lang="en-SG"/>
+          </a:p>
+        </p:txBody>
       </p:sp>
       <p:sp>
         <p:nvSpPr>
@@ -17436,6 +18432,13 @@
             <a:prstDash val="solid"/>
           </a:ln>
         </p:spPr>
+        <p:txBody>
+          <a:bodyPr/>
+          <a:lstStyle/>
+          <a:p>
+            <a:endParaRPr lang="en-SG"/>
+          </a:p>
+        </p:txBody>
       </p:sp>
       <p:sp>
         <p:nvSpPr>
@@ -17458,7 +18461,7 @@
           <a:bodyPr wrap="square" lIns="0" tIns="0" rIns="0" bIns="0" rtlCol="0" anchor="ctr"/>
           <a:lstStyle/>
           <a:p>
-            <a:pPr algn="ctr" indent="0" marL="0">
+            <a:pPr marL="0" indent="0" algn="ctr">
               <a:buNone/>
             </a:pPr>
             <a:r>
@@ -17497,7 +18500,7 @@
           <a:bodyPr wrap="square" lIns="0" tIns="0" rIns="0" bIns="0" rtlCol="0" anchor="ctr"/>
           <a:lstStyle/>
           <a:p>
-            <a:pPr indent="0" marL="0">
+            <a:pPr marL="0" indent="0">
               <a:buNone/>
             </a:pPr>
             <a:r>
@@ -17514,13 +18517,13 @@
             <a:endParaRPr lang="en-US" sz="1200" dirty="0"/>
           </a:p>
           <a:p>
-            <a:pPr indent="0" marL="0">
-              <a:buNone/>
-            </a:pPr>
-            <a:endParaRPr lang="en-US" sz="1200" dirty="0"/>
-          </a:p>
-          <a:p>
-            <a:pPr indent="0" marL="0">
+            <a:pPr marL="0" indent="0">
+              <a:buNone/>
+            </a:pPr>
+            <a:endParaRPr lang="en-US" sz="1200" dirty="0"/>
+          </a:p>
+          <a:p>
+            <a:pPr marL="0" indent="0">
               <a:buNone/>
             </a:pPr>
             <a:r>
@@ -17537,7 +18540,7 @@
             <a:endParaRPr lang="en-US" sz="1200" dirty="0"/>
           </a:p>
           <a:p>
-            <a:pPr indent="0" marL="0">
+            <a:pPr marL="0" indent="0">
               <a:buNone/>
             </a:pPr>
             <a:r>
@@ -17554,7 +18557,7 @@
             <a:endParaRPr lang="en-US" sz="1200" dirty="0"/>
           </a:p>
           <a:p>
-            <a:pPr indent="0" marL="0">
+            <a:pPr marL="0" indent="0">
               <a:buNone/>
             </a:pPr>
             <a:r>
@@ -17571,7 +18574,7 @@
             <a:endParaRPr lang="en-US" sz="1200" dirty="0"/>
           </a:p>
           <a:p>
-            <a:pPr indent="0" marL="0">
+            <a:pPr marL="0" indent="0">
               <a:buNone/>
             </a:pPr>
             <a:r>
@@ -17588,7 +18591,7 @@
             <a:endParaRPr lang="en-US" sz="1200" dirty="0"/>
           </a:p>
           <a:p>
-            <a:pPr indent="0" marL="0">
+            <a:pPr marL="0" indent="0">
               <a:buNone/>
             </a:pPr>
             <a:r>
@@ -17605,7 +18608,7 @@
             <a:endParaRPr lang="en-US" sz="1200" dirty="0"/>
           </a:p>
           <a:p>
-            <a:pPr indent="0" marL="0">
+            <a:pPr marL="0" indent="0">
               <a:buNone/>
             </a:pPr>
             <a:r>
@@ -17622,7 +18625,7 @@
             <a:endParaRPr lang="en-US" sz="1200" dirty="0"/>
           </a:p>
           <a:p>
-            <a:pPr indent="0" marL="0">
+            <a:pPr marL="0" indent="0">
               <a:buNone/>
             </a:pPr>
             <a:r>
@@ -17639,7 +18642,7 @@
             <a:endParaRPr lang="en-US" sz="1200" dirty="0"/>
           </a:p>
           <a:p>
-            <a:pPr indent="0" marL="0">
+            <a:pPr marL="0" indent="0">
               <a:buNone/>
             </a:pPr>
             <a:r>
@@ -17656,13 +18659,13 @@
             <a:endParaRPr lang="en-US" sz="1200" dirty="0"/>
           </a:p>
           <a:p>
-            <a:pPr indent="0" marL="0">
-              <a:buNone/>
-            </a:pPr>
-            <a:endParaRPr lang="en-US" sz="1200" dirty="0"/>
-          </a:p>
-          <a:p>
-            <a:pPr indent="0" marL="0">
+            <a:pPr marL="0" indent="0">
+              <a:buNone/>
+            </a:pPr>
+            <a:endParaRPr lang="en-US" sz="1200" dirty="0"/>
+          </a:p>
+          <a:p>
+            <a:pPr marL="0" indent="0">
               <a:buNone/>
             </a:pPr>
             <a:r>
@@ -17679,7 +18682,7 @@
             <a:endParaRPr lang="en-US" sz="1200" dirty="0"/>
           </a:p>
           <a:p>
-            <a:pPr indent="0" marL="0">
+            <a:pPr marL="0" indent="0">
               <a:buNone/>
             </a:pPr>
             <a:r>
@@ -17696,7 +18699,7 @@
             <a:endParaRPr lang="en-US" sz="1200" dirty="0"/>
           </a:p>
           <a:p>
-            <a:pPr indent="0" marL="0">
+            <a:pPr marL="0" indent="0">
               <a:buNone/>
             </a:pPr>
             <a:r>
@@ -17713,7 +18716,7 @@
             <a:endParaRPr lang="en-US" sz="1200" dirty="0"/>
           </a:p>
           <a:p>
-            <a:pPr indent="0" marL="0">
+            <a:pPr marL="0" indent="0">
               <a:buNone/>
             </a:pPr>
             <a:r>
@@ -17730,7 +18733,7 @@
             <a:endParaRPr lang="en-US" sz="1200" dirty="0"/>
           </a:p>
           <a:p>
-            <a:pPr indent="0" marL="0">
+            <a:pPr marL="0" indent="0">
               <a:buNone/>
             </a:pPr>
             <a:r>
@@ -17747,7 +18750,7 @@
             <a:endParaRPr lang="en-US" sz="1200" dirty="0"/>
           </a:p>
           <a:p>
-            <a:pPr indent="0" marL="0">
+            <a:pPr marL="0" indent="0">
               <a:buNone/>
             </a:pPr>
             <a:r>
@@ -17764,7 +18767,7 @@
             <a:endParaRPr lang="en-US" sz="1200" dirty="0"/>
           </a:p>
           <a:p>
-            <a:pPr indent="0" marL="0">
+            <a:pPr marL="0" indent="0">
               <a:buNone/>
             </a:pPr>
             <a:r>
@@ -17806,6 +18809,13 @@
             <a:prstDash val="solid"/>
           </a:ln>
         </p:spPr>
+        <p:txBody>
+          <a:bodyPr/>
+          <a:lstStyle/>
+          <a:p>
+            <a:endParaRPr lang="en-SG"/>
+          </a:p>
+        </p:txBody>
       </p:sp>
       <p:sp>
         <p:nvSpPr>
@@ -17831,6 +18841,13 @@
             <a:prstDash val="solid"/>
           </a:ln>
         </p:spPr>
+        <p:txBody>
+          <a:bodyPr/>
+          <a:lstStyle/>
+          <a:p>
+            <a:endParaRPr lang="en-SG"/>
+          </a:p>
+        </p:txBody>
       </p:sp>
       <p:sp>
         <p:nvSpPr>
@@ -17853,7 +18870,7 @@
           <a:bodyPr wrap="square" lIns="0" tIns="0" rIns="0" bIns="0" rtlCol="0" anchor="ctr"/>
           <a:lstStyle/>
           <a:p>
-            <a:pPr indent="0" marL="0">
+            <a:pPr marL="0" indent="0">
               <a:buNone/>
             </a:pPr>
             <a:r>
@@ -17892,7 +18909,7 @@
           <a:bodyPr wrap="square" lIns="0" tIns="0" rIns="0" bIns="0" rtlCol="0" anchor="ctr"/>
           <a:lstStyle/>
           <a:p>
-            <a:pPr indent="0" marL="0">
+            <a:pPr marL="0" indent="0">
               <a:buNone/>
             </a:pPr>
             <a:r>
@@ -17934,6 +18951,13 @@
             <a:prstDash val="solid"/>
           </a:ln>
         </p:spPr>
+        <p:txBody>
+          <a:bodyPr/>
+          <a:lstStyle/>
+          <a:p>
+            <a:endParaRPr lang="en-SG"/>
+          </a:p>
+        </p:txBody>
       </p:sp>
       <p:sp>
         <p:nvSpPr>
@@ -17956,7 +18980,7 @@
           <a:bodyPr wrap="square" lIns="0" tIns="0" rIns="0" bIns="0" rtlCol="0" anchor="ctr"/>
           <a:lstStyle/>
           <a:p>
-            <a:pPr algn="ctr" indent="0" marL="0">
+            <a:pPr marL="0" indent="0" algn="ctr">
               <a:buNone/>
             </a:pPr>
             <a:r>
@@ -17998,6 +19022,13 @@
             <a:prstDash val="solid"/>
           </a:ln>
         </p:spPr>
+        <p:txBody>
+          <a:bodyPr/>
+          <a:lstStyle/>
+          <a:p>
+            <a:endParaRPr lang="en-SG"/>
+          </a:p>
+        </p:txBody>
       </p:sp>
       <p:sp>
         <p:nvSpPr>
@@ -18020,7 +19051,7 @@
           <a:bodyPr wrap="square" lIns="0" tIns="0" rIns="0" bIns="0" rtlCol="0" anchor="ctr"/>
           <a:lstStyle/>
           <a:p>
-            <a:pPr algn="ctr" indent="0" marL="0">
+            <a:pPr marL="0" indent="0" algn="ctr">
               <a:buNone/>
             </a:pPr>
             <a:r>
@@ -18339,4 +19370,319 @@
     </a:ext>
   </a:extLst>
 </a:theme>
+</file>
+
+<file path=ppt/theme/theme2.xml><?xml version="1.0" encoding="utf-8"?>
+<a:theme xmlns:a="http://schemas.openxmlformats.org/drawingml/2006/main" name="Office Theme">
+  <a:themeElements>
+    <a:clrScheme name="Office">
+      <a:dk1>
+        <a:sysClr val="windowText" lastClr="000000"/>
+      </a:dk1>
+      <a:lt1>
+        <a:sysClr val="window" lastClr="FFFFFF"/>
+      </a:lt1>
+      <a:dk2>
+        <a:srgbClr val="0E2841"/>
+      </a:dk2>
+      <a:lt2>
+        <a:srgbClr val="E8E8E8"/>
+      </a:lt2>
+      <a:accent1>
+        <a:srgbClr val="156082"/>
+      </a:accent1>
+      <a:accent2>
+        <a:srgbClr val="E97132"/>
+      </a:accent2>
+      <a:accent3>
+        <a:srgbClr val="196B24"/>
+      </a:accent3>
+      <a:accent4>
+        <a:srgbClr val="0F9ED5"/>
+      </a:accent4>
+      <a:accent5>
+        <a:srgbClr val="A02B93"/>
+      </a:accent5>
+      <a:accent6>
+        <a:srgbClr val="4EA72E"/>
+      </a:accent6>
+      <a:hlink>
+        <a:srgbClr val="467886"/>
+      </a:hlink>
+      <a:folHlink>
+        <a:srgbClr val="96607D"/>
+      </a:folHlink>
+    </a:clrScheme>
+    <a:fontScheme name="Office">
+      <a:majorFont>
+        <a:latin typeface="Aptos Display" panose="02110004020202020204"/>
+        <a:ea typeface=""/>
+        <a:cs typeface=""/>
+        <a:font script="Jpan" typeface="游ゴシック Light"/>
+        <a:font script="Hang" typeface="맑은 고딕"/>
+        <a:font script="Hans" typeface="等线 Light"/>
+        <a:font script="Hant" typeface="新細明體"/>
+        <a:font script="Arab" typeface="Times New Roman"/>
+        <a:font script="Hebr" typeface="Times New Roman"/>
+        <a:font script="Thai" typeface="Angsana New"/>
+        <a:font script="Ethi" typeface="Nyala"/>
+        <a:font script="Beng" typeface="Vrinda"/>
+        <a:font script="Gujr" typeface="Shruti"/>
+        <a:font script="Khmr" typeface="MoolBoran"/>
+        <a:font script="Knda" typeface="Tunga"/>
+        <a:font script="Guru" typeface="Raavi"/>
+        <a:font script="Cans" typeface="Euphemia"/>
+        <a:font script="Cher" typeface="Plantagenet Cherokee"/>
+        <a:font script="Yiii" typeface="Microsoft Yi Baiti"/>
+        <a:font script="Tibt" typeface="Microsoft Himalaya"/>
+        <a:font script="Thaa" typeface="MV Boli"/>
+        <a:font script="Deva" typeface="Mangal"/>
+        <a:font script="Telu" typeface="Gautami"/>
+        <a:font script="Taml" typeface="Latha"/>
+        <a:font script="Syrc" typeface="Estrangelo Edessa"/>
+        <a:font script="Orya" typeface="Kalinga"/>
+        <a:font script="Mlym" typeface="Kartika"/>
+        <a:font script="Laoo" typeface="DokChampa"/>
+        <a:font script="Sinh" typeface="Iskoola Pota"/>
+        <a:font script="Mong" typeface="Mongolian Baiti"/>
+        <a:font script="Viet" typeface="Times New Roman"/>
+        <a:font script="Uigh" typeface="Microsoft Uighur"/>
+        <a:font script="Geor" typeface="Sylfaen"/>
+        <a:font script="Armn" typeface="Arial"/>
+        <a:font script="Bugi" typeface="Leelawadee UI"/>
+        <a:font script="Bopo" typeface="Microsoft JhengHei"/>
+        <a:font script="Java" typeface="Javanese Text"/>
+        <a:font script="Lisu" typeface="Segoe UI"/>
+        <a:font script="Mymr" typeface="Myanmar Text"/>
+        <a:font script="Nkoo" typeface="Ebrima"/>
+        <a:font script="Olck" typeface="Nirmala UI"/>
+        <a:font script="Osma" typeface="Ebrima"/>
+        <a:font script="Phag" typeface="Phagspa"/>
+        <a:font script="Syrn" typeface="Estrangelo Edessa"/>
+        <a:font script="Syrj" typeface="Estrangelo Edessa"/>
+        <a:font script="Syre" typeface="Estrangelo Edessa"/>
+        <a:font script="Sora" typeface="Nirmala UI"/>
+        <a:font script="Tale" typeface="Microsoft Tai Le"/>
+        <a:font script="Talu" typeface="Microsoft New Tai Lue"/>
+        <a:font script="Tfng" typeface="Ebrima"/>
+      </a:majorFont>
+      <a:minorFont>
+        <a:latin typeface="Aptos" panose="02110004020202020204"/>
+        <a:ea typeface=""/>
+        <a:cs typeface=""/>
+        <a:font script="Jpan" typeface="游ゴシック"/>
+        <a:font script="Hang" typeface="맑은 고딕"/>
+        <a:font script="Hans" typeface="等线"/>
+        <a:font script="Hant" typeface="新細明體"/>
+        <a:font script="Arab" typeface="Arial"/>
+        <a:font script="Hebr" typeface="Arial"/>
+        <a:font script="Thai" typeface="Cordia New"/>
+        <a:font script="Ethi" typeface="Nyala"/>
+        <a:font script="Beng" typeface="Vrinda"/>
+        <a:font script="Gujr" typeface="Shruti"/>
+        <a:font script="Khmr" typeface="DaunPenh"/>
+        <a:font script="Knda" typeface="Tunga"/>
+        <a:font script="Guru" typeface="Raavi"/>
+        <a:font script="Cans" typeface="Euphemia"/>
+        <a:font script="Cher" typeface="Plantagenet Cherokee"/>
+        <a:font script="Yiii" typeface="Microsoft Yi Baiti"/>
+        <a:font script="Tibt" typeface="Microsoft Himalaya"/>
+        <a:font script="Thaa" typeface="MV Boli"/>
+        <a:font script="Deva" typeface="Mangal"/>
+        <a:font script="Telu" typeface="Gautami"/>
+        <a:font script="Taml" typeface="Latha"/>
+        <a:font script="Syrc" typeface="Estrangelo Edessa"/>
+        <a:font script="Orya" typeface="Kalinga"/>
+        <a:font script="Mlym" typeface="Kartika"/>
+        <a:font script="Laoo" typeface="DokChampa"/>
+        <a:font script="Sinh" typeface="Iskoola Pota"/>
+        <a:font script="Mong" typeface="Mongolian Baiti"/>
+        <a:font script="Viet" typeface="Arial"/>
+        <a:font script="Uigh" typeface="Microsoft Uighur"/>
+        <a:font script="Geor" typeface="Sylfaen"/>
+        <a:font script="Armn" typeface="Arial"/>
+        <a:font script="Bugi" typeface="Leelawadee UI"/>
+        <a:font script="Bopo" typeface="Microsoft JhengHei"/>
+        <a:font script="Java" typeface="Javanese Text"/>
+        <a:font script="Lisu" typeface="Segoe UI"/>
+        <a:font script="Mymr" typeface="Myanmar Text"/>
+        <a:font script="Nkoo" typeface="Ebrima"/>
+        <a:font script="Olck" typeface="Nirmala UI"/>
+        <a:font script="Osma" typeface="Ebrima"/>
+        <a:font script="Phag" typeface="Phagspa"/>
+        <a:font script="Syrn" typeface="Estrangelo Edessa"/>
+        <a:font script="Syrj" typeface="Estrangelo Edessa"/>
+        <a:font script="Syre" typeface="Estrangelo Edessa"/>
+        <a:font script="Sora" typeface="Nirmala UI"/>
+        <a:font script="Tale" typeface="Microsoft Tai Le"/>
+        <a:font script="Talu" typeface="Microsoft New Tai Lue"/>
+        <a:font script="Tfng" typeface="Ebrima"/>
+      </a:minorFont>
+    </a:fontScheme>
+    <a:fmtScheme name="Office">
+      <a:fillStyleLst>
+        <a:solidFill>
+          <a:schemeClr val="phClr"/>
+        </a:solidFill>
+        <a:gradFill rotWithShape="1">
+          <a:gsLst>
+            <a:gs pos="0">
+              <a:schemeClr val="phClr">
+                <a:lumMod val="110000"/>
+                <a:satMod val="105000"/>
+                <a:tint val="67000"/>
+              </a:schemeClr>
+            </a:gs>
+            <a:gs pos="50000">
+              <a:schemeClr val="phClr">
+                <a:lumMod val="105000"/>
+                <a:satMod val="103000"/>
+                <a:tint val="73000"/>
+              </a:schemeClr>
+            </a:gs>
+            <a:gs pos="100000">
+              <a:schemeClr val="phClr">
+                <a:lumMod val="105000"/>
+                <a:satMod val="109000"/>
+                <a:tint val="81000"/>
+              </a:schemeClr>
+            </a:gs>
+          </a:gsLst>
+          <a:lin ang="5400000" scaled="0"/>
+        </a:gradFill>
+        <a:gradFill rotWithShape="1">
+          <a:gsLst>
+            <a:gs pos="0">
+              <a:schemeClr val="phClr">
+                <a:satMod val="103000"/>
+                <a:lumMod val="102000"/>
+                <a:tint val="94000"/>
+              </a:schemeClr>
+            </a:gs>
+            <a:gs pos="50000">
+              <a:schemeClr val="phClr">
+                <a:satMod val="110000"/>
+                <a:lumMod val="100000"/>
+                <a:shade val="100000"/>
+              </a:schemeClr>
+            </a:gs>
+            <a:gs pos="100000">
+              <a:schemeClr val="phClr">
+                <a:lumMod val="99000"/>
+                <a:satMod val="120000"/>
+                <a:shade val="78000"/>
+              </a:schemeClr>
+            </a:gs>
+          </a:gsLst>
+          <a:lin ang="5400000" scaled="0"/>
+        </a:gradFill>
+      </a:fillStyleLst>
+      <a:lnStyleLst>
+        <a:ln w="12700" cap="flat" cmpd="sng" algn="ctr">
+          <a:solidFill>
+            <a:schemeClr val="phClr"/>
+          </a:solidFill>
+          <a:prstDash val="solid"/>
+          <a:miter lim="800000"/>
+        </a:ln>
+        <a:ln w="19050" cap="flat" cmpd="sng" algn="ctr">
+          <a:solidFill>
+            <a:schemeClr val="phClr"/>
+          </a:solidFill>
+          <a:prstDash val="solid"/>
+          <a:miter lim="800000"/>
+        </a:ln>
+        <a:ln w="25400" cap="flat" cmpd="sng" algn="ctr">
+          <a:solidFill>
+            <a:schemeClr val="phClr"/>
+          </a:solidFill>
+          <a:prstDash val="solid"/>
+          <a:miter lim="800000"/>
+        </a:ln>
+      </a:lnStyleLst>
+      <a:effectStyleLst>
+        <a:effectStyle>
+          <a:effectLst/>
+        </a:effectStyle>
+        <a:effectStyle>
+          <a:effectLst/>
+        </a:effectStyle>
+        <a:effectStyle>
+          <a:effectLst>
+            <a:outerShdw blurRad="57150" dist="19050" dir="5400000" algn="ctr" rotWithShape="0">
+              <a:srgbClr val="000000">
+                <a:alpha val="63000"/>
+              </a:srgbClr>
+            </a:outerShdw>
+          </a:effectLst>
+        </a:effectStyle>
+      </a:effectStyleLst>
+      <a:bgFillStyleLst>
+        <a:solidFill>
+          <a:schemeClr val="phClr"/>
+        </a:solidFill>
+        <a:solidFill>
+          <a:schemeClr val="phClr">
+            <a:tint val="95000"/>
+            <a:satMod val="170000"/>
+          </a:schemeClr>
+        </a:solidFill>
+        <a:gradFill rotWithShape="1">
+          <a:gsLst>
+            <a:gs pos="0">
+              <a:schemeClr val="phClr">
+                <a:tint val="93000"/>
+                <a:satMod val="150000"/>
+                <a:shade val="98000"/>
+                <a:lumMod val="102000"/>
+              </a:schemeClr>
+            </a:gs>
+            <a:gs pos="50000">
+              <a:schemeClr val="phClr">
+                <a:tint val="98000"/>
+                <a:satMod val="130000"/>
+                <a:shade val="90000"/>
+                <a:lumMod val="103000"/>
+              </a:schemeClr>
+            </a:gs>
+            <a:gs pos="100000">
+              <a:schemeClr val="phClr">
+                <a:shade val="63000"/>
+                <a:satMod val="120000"/>
+              </a:schemeClr>
+            </a:gs>
+          </a:gsLst>
+          <a:lin ang="5400000" scaled="0"/>
+        </a:gradFill>
+      </a:bgFillStyleLst>
+    </a:fmtScheme>
+  </a:themeElements>
+  <a:objectDefaults>
+    <a:lnDef>
+      <a:spPr/>
+      <a:bodyPr/>
+      <a:lstStyle/>
+      <a:style>
+        <a:lnRef idx="2">
+          <a:schemeClr val="accent1"/>
+        </a:lnRef>
+        <a:fillRef idx="0">
+          <a:schemeClr val="accent1"/>
+        </a:fillRef>
+        <a:effectRef idx="1">
+          <a:schemeClr val="accent1"/>
+        </a:effectRef>
+        <a:fontRef idx="minor">
+          <a:schemeClr val="tx1"/>
+        </a:fontRef>
+      </a:style>
+    </a:lnDef>
+  </a:objectDefaults>
+  <a:extraClrSchemeLst/>
+  <a:extLst>
+    <a:ext uri="{05A4C25C-085E-4340-85A3-A5531E510DB2}">
+      <thm15:themeFamily xmlns:thm15="http://schemas.microsoft.com/office/thememl/2012/main" name="Office Theme" id="{2E142A2C-CD16-42D6-873A-C26D2A0506FA}" vid="{1BDDFF52-6CD6-40A5-AB3C-68EB2F1E4D0A}"/>
+    </a:ext>
+  </a:extLst>
+</a:theme>
 </file>